--- a/a7/packages/A7 Unit 5 - Multi-Step Proportional Relationships/Lessons/5.04/A7 5.04 Real-World Scale Drawings - Slides.pptx
+++ b/a7/packages/A7 Unit 5 - Multi-Step Proportional Relationships/Lessons/5.04/A7 5.04 Real-World Scale Drawings - Slides.pptx
@@ -4383,7 +4383,7 @@
                 </a:solidFill>
                 <a:latin typeface="Lexend"/>
               </a:rPr>
-              <a:t>A map is drawn at 1 cm : 50 km. Two towns are 7.4 cm apart on it. A bus travels at 100 km per hour.</a:t>
+              <a:t>On a drawing a wall is 4 in long; the real wall is 18 ft. Another wall is 6 in long on the drawing.</a:t>
             </a:r>
           </a:p>
         </p:txBody>
@@ -4418,7 +4418,7 @@
                 </a:solidFill>
                 <a:latin typeface="Lexend"/>
               </a:rPr>
-              <a:t>How far apart are the towns, and how long does the bus take?</a:t>
+              <a:t>How long is the second wall really?</a:t>
             </a:r>
           </a:p>
         </p:txBody>
@@ -4653,7 +4653,7 @@
       </p:sp>
       <p:pic>
         <p:nvPicPr>
-          <p:cNvPr id="8" name="Picture 7" descr="3d32c211b3122974.png"/>
+          <p:cNvPr id="8" name="Picture 7" descr="0261f8592fb08f79.png"/>
           <p:cNvPicPr>
             <a:picLocks noChangeAspect="1"/>
           </p:cNvPicPr>
@@ -4668,7 +4668,7 @@
         <p:spPr>
           <a:xfrm>
             <a:off x="1828800" y="1920240"/>
-            <a:ext cx="2292096" cy="277368"/>
+            <a:ext cx="3459480" cy="384048"/>
           </a:xfrm>
           <a:prstGeom prst="rect">
             <a:avLst/>
@@ -4677,7 +4677,7 @@
       </p:pic>
       <p:pic>
         <p:nvPicPr>
-          <p:cNvPr id="9" name="Picture 8" descr="85cdfc9b31127bfb.png"/>
+          <p:cNvPr id="9" name="Picture 8" descr="022db8f1da267dc9.png"/>
           <p:cNvPicPr>
             <a:picLocks noChangeAspect="1"/>
           </p:cNvPicPr>
@@ -4691,8 +4691,8 @@
         </p:blipFill>
         <p:spPr>
           <a:xfrm>
-            <a:off x="1828800" y="2471928"/>
-            <a:ext cx="2529840" cy="277368"/>
+            <a:off x="1828800" y="2578608"/>
+            <a:ext cx="1847088" cy="280416"/>
           </a:xfrm>
           <a:prstGeom prst="rect">
             <a:avLst/>
@@ -4729,7 +4729,7 @@
                 </a:solidFill>
                 <a:latin typeface="Lexend"/>
               </a:rPr>
-              <a:t>Answer:   370 km; 3.7 hours</a:t>
+              <a:t>Answer:   27 ft</a:t>
             </a:r>
           </a:p>
         </p:txBody>
@@ -4992,7 +4992,7 @@
                 </a:solidFill>
                 <a:latin typeface="Lexend"/>
               </a:rPr>
-              <a:t>A map is drawn at 1 cm : 25 km. Two towns are 6.2 cm apart on it. A bus travels at 50 km per hour.</a:t>
+              <a:t>On a drawing a wall is 2 in long; the real wall is 13 ft. Another wall is 5 in long on the drawing.</a:t>
             </a:r>
           </a:p>
         </p:txBody>
@@ -5027,7 +5027,7 @@
                 </a:solidFill>
                 <a:latin typeface="Lexend"/>
               </a:rPr>
-              <a:t>How far apart are the towns, and how long does the bus take?</a:t>
+              <a:t>How long is the second wall really?</a:t>
             </a:r>
           </a:p>
         </p:txBody>
@@ -5290,7 +5290,7 @@
                 </a:solidFill>
                 <a:latin typeface="Lexend"/>
               </a:rPr>
-              <a:t>A map is drawn at 1 cm : 25 km. Two towns are 6.2 cm apart on it. A bus travels at 50 km per hour.</a:t>
+              <a:t>On a drawing a wall is 2 in long; the real wall is 13 ft. Another wall is 5 in long on the drawing.</a:t>
             </a:r>
           </a:p>
         </p:txBody>
@@ -5325,14 +5325,14 @@
                 </a:solidFill>
                 <a:latin typeface="Lexend"/>
               </a:rPr>
-              <a:t>How far apart are the towns, and how long does the bus take?</a:t>
+              <a:t>How long is the second wall really?</a:t>
             </a:r>
           </a:p>
         </p:txBody>
       </p:sp>
       <p:pic>
         <p:nvPicPr>
-          <p:cNvPr id="10" name="Picture 9" descr="0d83e4adbda31b97.png"/>
+          <p:cNvPr id="10" name="Picture 9" descr="bbb8c08ba0d81647.png"/>
           <p:cNvPicPr>
             <a:picLocks noChangeAspect="1"/>
           </p:cNvPicPr>
@@ -5346,17 +5346,52 @@
         </p:blipFill>
         <p:spPr>
           <a:xfrm>
-            <a:off x="5116067" y="3258643"/>
-            <a:ext cx="2020824" cy="256032"/>
+            <a:off x="4514874" y="3258643"/>
+            <a:ext cx="1642872" cy="256032"/>
           </a:xfrm>
           <a:prstGeom prst="rect">
             <a:avLst/>
           </a:prstGeom>
         </p:spPr>
       </p:pic>
+      <p:sp>
+        <p:nvSpPr>
+          <p:cNvPr id="11" name="TextBox 10"/>
+          <p:cNvSpPr txBox="1"/>
+          <p:nvPr/>
+        </p:nvSpPr>
+        <p:spPr>
+          <a:xfrm>
+            <a:off x="6157746" y="3158059"/>
+            <a:ext cx="1735787" cy="457200"/>
+          </a:xfrm>
+          <a:prstGeom prst="rect">
+            <a:avLst/>
+          </a:prstGeom>
+          <a:noFill/>
+        </p:spPr>
+        <p:txBody>
+          <a:bodyPr wrap="none" lIns="45720" rIns="45720" tIns="18288" bIns="18288" anchor="ctr">
+            <a:noAutofit/>
+          </a:bodyPr>
+          <a:lstStyle/>
+          <a:p>
+            <a:pPr algn="l"/>
+            <a:r>
+              <a:rPr sz="2750" b="0" i="0">
+                <a:solidFill>
+                  <a:srgbClr val="1A1A1A"/>
+                </a:solidFill>
+                <a:latin typeface="Lexend"/>
+              </a:rPr>
+              <a:t> ft per in</a:t>
+            </a:r>
+          </a:p>
+        </p:txBody>
+      </p:sp>
       <p:pic>
         <p:nvPicPr>
-          <p:cNvPr id="11" name="Picture 10" descr="a99fb84cec36a6dc.png"/>
+          <p:cNvPr id="12" name="Picture 11" descr="563feef954113147.png"/>
           <p:cNvPicPr>
             <a:picLocks noChangeAspect="1"/>
           </p:cNvPicPr>
@@ -5370,8 +5405,8 @@
         </p:blipFill>
         <p:spPr>
           <a:xfrm>
-            <a:off x="5116067" y="3799663"/>
-            <a:ext cx="2039112" cy="252984"/>
+            <a:off x="4514874" y="3798139"/>
+            <a:ext cx="1923288" cy="256032"/>
           </a:xfrm>
           <a:prstGeom prst="rect">
             <a:avLst/>
@@ -5380,7 +5415,7 @@
       </p:pic>
       <p:sp>
         <p:nvSpPr>
-          <p:cNvPr id="12" name="TextBox 11"/>
+          <p:cNvPr id="13" name="TextBox 12"/>
           <p:cNvSpPr txBox="1"/>
           <p:nvPr/>
         </p:nvSpPr>
@@ -5408,7 +5443,7 @@
                 </a:solidFill>
                 <a:latin typeface="Lexend"/>
               </a:rPr>
-              <a:t>Answer:   155 km; 3.1 hours</a:t>
+              <a:t>Answer:   32.5 ft</a:t>
             </a:r>
           </a:p>
         </p:txBody>
@@ -10844,7 +10879,7 @@
                 </a:solidFill>
                 <a:latin typeface="Lexend"/>
               </a:rPr>
-              <a:t>A plane is 48 ft long. One model of it is built at 1 : 48, another at 1 : 72.</a:t>
+              <a:t>A plane is 36 ft long. One model of it is built at 1 : 48, another at 1 : 72.</a:t>
             </a:r>
           </a:p>
         </p:txBody>
@@ -11177,7 +11212,7 @@
                 </a:solidFill>
                 <a:latin typeface="Lexend"/>
               </a:rPr>
-              <a:t>A plane is 48 ft long. One model of it is built at 1 : 48, another at 1 : 72.</a:t>
+              <a:t>A plane is 36 ft long. One model of it is built at 1 : 48, another at 1 : 72.</a:t>
             </a:r>
           </a:p>
         </p:txBody>
@@ -11219,7 +11254,7 @@
       </p:sp>
       <p:pic>
         <p:nvPicPr>
-          <p:cNvPr id="10" name="Picture 9" descr="fe971a9b48dfbd0f.png"/>
+          <p:cNvPr id="10" name="Picture 9" descr="5542fd061f65cd2d.png"/>
           <p:cNvPicPr>
             <a:picLocks noChangeAspect="1"/>
           </p:cNvPicPr>
@@ -11233,8 +11268,8 @@
         </p:blipFill>
         <p:spPr>
           <a:xfrm>
-            <a:off x="3896867" y="3578683"/>
-            <a:ext cx="1975104" cy="256032"/>
+            <a:off x="3973067" y="3578683"/>
+            <a:ext cx="1953768" cy="256032"/>
           </a:xfrm>
           <a:prstGeom prst="rect">
             <a:avLst/>
@@ -11249,7 +11284,7 @@
         </p:nvSpPr>
         <p:spPr>
           <a:xfrm>
-            <a:off x="5871971" y="3478099"/>
+            <a:off x="5926835" y="3478099"/>
             <a:ext cx="637940" cy="457200"/>
           </a:xfrm>
           <a:prstGeom prst="rect">
@@ -11278,7 +11313,7 @@
       </p:sp>
       <p:pic>
         <p:nvPicPr>
-          <p:cNvPr id="12" name="Picture 11" descr="52736d6124745743.png"/>
+          <p:cNvPr id="12" name="Picture 11" descr="5f9988afdad05b27.png"/>
           <p:cNvPicPr>
             <a:picLocks noChangeAspect="1"/>
           </p:cNvPicPr>
@@ -11292,8 +11327,8 @@
         </p:blipFill>
         <p:spPr>
           <a:xfrm>
-            <a:off x="3896867" y="4118179"/>
-            <a:ext cx="4480560" cy="256032"/>
+            <a:off x="3973067" y="4118179"/>
+            <a:ext cx="4328160" cy="256032"/>
           </a:xfrm>
           <a:prstGeom prst="rect">
             <a:avLst/>
@@ -11330,7 +11365,7 @@
                 </a:solidFill>
                 <a:latin typeface="Lexend"/>
               </a:rPr>
-              <a:t>Answer:   The 1 : 48 model, by 4 in (12 in against 8 in)</a:t>
+              <a:t>Answer:   The 1 : 48 model, by 3 in (9 in against 6 in)</a:t>
             </a:r>
           </a:p>
         </p:txBody>
@@ -12152,7 +12187,7 @@
                 </a:solidFill>
                 <a:latin typeface="Lexend"/>
               </a:rPr>
-              <a:t>Mia, who is 12, enlarges her 9 in by 12 in poster into a mural at 1 in : 2 ft.</a:t>
+              <a:t>Mia, who is 13, enlarges her 9 in by 12 in poster into a mural at 1 in : 2 ft.</a:t>
             </a:r>
           </a:p>
         </p:txBody>
@@ -12485,7 +12520,7 @@
                 </a:solidFill>
                 <a:latin typeface="Lexend"/>
               </a:rPr>
-              <a:t>Mia, who is 12, enlarges her 9 in by 12 in poster into a mural at 1 in : 2 ft.</a:t>
+              <a:t>Mia, who is 13, enlarges her 9 in by 12 in poster into a mural at 1 in : 2 ft.</a:t>
             </a:r>
           </a:p>
         </p:txBody>
@@ -12842,7 +12877,7 @@
                 </a:solidFill>
                 <a:latin typeface="Lexend"/>
               </a:rPr>
-              <a:t>Andrew's drawing shows a wall 3.5 in wide; the real wall is 26.25 ft wide. The drawn height is 4 in.</a:t>
+              <a:t>On Andrew's drawing a wall is 3.5 in wide and 4 in tall; the real wall is 26.25 ft wide.</a:t>
             </a:r>
           </a:p>
         </p:txBody>
@@ -12877,7 +12912,7 @@
                 </a:solidFill>
                 <a:latin typeface="Lexend"/>
               </a:rPr>
-              <a:t>Find the real height and the wall's real area. Which step uses the scale factor?</a:t>
+              <a:t>Find the real height and the real area. Which step uses the scale?</a:t>
             </a:r>
           </a:p>
         </p:txBody>
@@ -13175,7 +13210,7 @@
                 </a:solidFill>
                 <a:latin typeface="Lexend"/>
               </a:rPr>
-              <a:t>Andrew's drawing shows a wall 3.5 in wide; the real wall is 26.25 ft wide. The drawn height is 4 in.</a:t>
+              <a:t>On Andrew's drawing a wall is 3.5 in wide and 4 in tall; the real wall is 26.25 ft wide.</a:t>
             </a:r>
           </a:p>
         </p:txBody>
@@ -13210,7 +13245,7 @@
                 </a:solidFill>
                 <a:latin typeface="Lexend"/>
               </a:rPr>
-              <a:t>Find the real height and the wall's real area. Which step uses the scale factor?</a:t>
+              <a:t>Find the real height and the real area. Which step uses the scale?</a:t>
             </a:r>
           </a:p>
         </p:txBody>
@@ -13311,7 +13346,7 @@
                 </a:solidFill>
                 <a:latin typeface="Lexend"/>
               </a:rPr>
-              <a:t>. The scale factor (7.5 ft per in) is the step from 4 in to 30 ft.</a:t>
+              <a:t>. The scale (7.5 ft per in) is the step from 4 in to 30 ft.</a:t>
             </a:r>
           </a:p>
         </p:txBody>
@@ -13889,7 +13924,7 @@
                 </a:solidFill>
                 <a:latin typeface="Lexend"/>
               </a:rPr>
-              <a:t>A model boat is built at 1 : 40 and is 15 cm long. Find the real boat's length in metres.</a:t>
+              <a:t>A model boat is built at 1 : 40 and is 15 cm long. Find the real boat's length in meters.</a:t>
             </a:r>
           </a:p>
         </p:txBody>
@@ -13959,7 +13994,7 @@
                 </a:solidFill>
                 <a:latin typeface="Lexend"/>
               </a:rPr>
-              <a:t>A map is drawn at 1 cm : 20 km. Two towns are 8.5 cm apart on it. How far apart are they, and how long does a train at 85 km per hour take?</a:t>
+              <a:t>On a drawing a wall is 3 in long; the real wall is 16.5 ft. Another wall is 5 in long on the drawing. How long is it really?</a:t>
             </a:r>
           </a:p>
         </p:txBody>
@@ -14744,7 +14779,7 @@
         <p:spPr>
           <a:xfrm>
             <a:off x="777240" y="1463040"/>
-            <a:ext cx="10607040" cy="429370"/>
+            <a:ext cx="10607040" cy="393589"/>
           </a:xfrm>
           <a:prstGeom prst="rect">
             <a:avLst/>
@@ -14759,7 +14794,7 @@
           <a:p>
             <a:pPr algn="l"/>
             <a:r>
-              <a:rPr sz="2280" b="1" i="0">
+              <a:rPr sz="2090" b="1" i="0">
                 <a:solidFill>
                   <a:srgbClr val="0B5394"/>
                 </a:solidFill>
@@ -14778,8 +14813,8 @@
         </p:nvSpPr>
         <p:spPr>
           <a:xfrm>
-            <a:off x="1143000" y="1892410"/>
-            <a:ext cx="10241280" cy="393589"/>
+            <a:off x="1143000" y="1856629"/>
+            <a:ext cx="10241280" cy="357808"/>
           </a:xfrm>
           <a:prstGeom prst="rect">
             <a:avLst/>
@@ -14794,7 +14829,7 @@
           <a:p>
             <a:pPr algn="l"/>
             <a:r>
-              <a:rPr sz="2090" b="0" i="0">
+              <a:rPr sz="1900" b="0" i="0">
                 <a:solidFill>
                   <a:srgbClr val="1A1A1A"/>
                 </a:solidFill>
@@ -14813,8 +14848,8 @@
         </p:nvSpPr>
         <p:spPr>
           <a:xfrm>
-            <a:off x="777240" y="2523744"/>
-            <a:ext cx="10607040" cy="429370"/>
+            <a:off x="777240" y="2452182"/>
+            <a:ext cx="10607040" cy="393589"/>
           </a:xfrm>
           <a:prstGeom prst="rect">
             <a:avLst/>
@@ -14829,7 +14864,7 @@
           <a:p>
             <a:pPr algn="l"/>
             <a:r>
-              <a:rPr sz="2280" b="1" i="0">
+              <a:rPr sz="2090" b="1" i="0">
                 <a:solidFill>
                   <a:srgbClr val="0B5394"/>
                 </a:solidFill>
@@ -14848,8 +14883,8 @@
         </p:nvSpPr>
         <p:spPr>
           <a:xfrm>
-            <a:off x="1143000" y="2953114"/>
-            <a:ext cx="10241280" cy="787179"/>
+            <a:off x="1143000" y="2845771"/>
+            <a:ext cx="10241280" cy="357808"/>
           </a:xfrm>
           <a:prstGeom prst="rect">
             <a:avLst/>
@@ -14864,7 +14899,7 @@
           <a:p>
             <a:pPr algn="l"/>
             <a:r>
-              <a:rPr sz="2090" b="0" i="0">
+              <a:rPr sz="1900" b="0" i="0">
                 <a:solidFill>
                   <a:srgbClr val="1A1A1A"/>
                 </a:solidFill>
@@ -14883,8 +14918,8 @@
         </p:nvSpPr>
         <p:spPr>
           <a:xfrm>
-            <a:off x="777240" y="3978037"/>
-            <a:ext cx="10607040" cy="429370"/>
+            <a:off x="777240" y="3441324"/>
+            <a:ext cx="10607040" cy="393589"/>
           </a:xfrm>
           <a:prstGeom prst="rect">
             <a:avLst/>
@@ -14899,7 +14934,7 @@
           <a:p>
             <a:pPr algn="l"/>
             <a:r>
-              <a:rPr sz="2280" b="1" i="0">
+              <a:rPr sz="2090" b="1" i="0">
                 <a:solidFill>
                   <a:srgbClr val="0B5394"/>
                 </a:solidFill>
@@ -14918,8 +14953,8 @@
         </p:nvSpPr>
         <p:spPr>
           <a:xfrm>
-            <a:off x="1143000" y="4407407"/>
-            <a:ext cx="10241280" cy="393589"/>
+            <a:off x="1143000" y="3834914"/>
+            <a:ext cx="10241280" cy="357808"/>
           </a:xfrm>
           <a:prstGeom prst="rect">
             <a:avLst/>
@@ -14934,13 +14969,83 @@
           <a:p>
             <a:pPr algn="l"/>
             <a:r>
-              <a:rPr sz="2090" b="0" i="0">
+              <a:rPr sz="1900" b="0" i="0">
                 <a:solidFill>
                   <a:srgbClr val="1A1A1A"/>
                 </a:solidFill>
                 <a:latin typeface="Lexend"/>
               </a:rPr>
               <a:t>the scale written per 1 drawing unit: ¼ in : 1 ft is 1 in : 4 ft</a:t>
+            </a:r>
+          </a:p>
+        </p:txBody>
+      </p:sp>
+      <p:sp>
+        <p:nvSpPr>
+          <p:cNvPr id="14" name="TextBox 13"/>
+          <p:cNvSpPr txBox="1"/>
+          <p:nvPr/>
+        </p:nvSpPr>
+        <p:spPr>
+          <a:xfrm>
+            <a:off x="777240" y="4430466"/>
+            <a:ext cx="10607040" cy="393589"/>
+          </a:xfrm>
+          <a:prstGeom prst="rect">
+            <a:avLst/>
+          </a:prstGeom>
+          <a:noFill/>
+        </p:spPr>
+        <p:txBody>
+          <a:bodyPr wrap="square" lIns="45720" rIns="45720" tIns="18288" bIns="18288" anchor="t">
+            <a:spAutoFit/>
+          </a:bodyPr>
+          <a:lstStyle/>
+          <a:p>
+            <a:pPr algn="l"/>
+            <a:r>
+              <a:rPr sz="2090" b="1" i="0">
+                <a:solidFill>
+                  <a:srgbClr val="0B5394"/>
+                </a:solidFill>
+                <a:latin typeface="Lexend"/>
+              </a:rPr>
+              <a:t>scale with one unit</a:t>
+            </a:r>
+          </a:p>
+        </p:txBody>
+      </p:sp>
+      <p:sp>
+        <p:nvSpPr>
+          <p:cNvPr id="15" name="TextBox 14"/>
+          <p:cNvSpPr txBox="1"/>
+          <p:nvPr/>
+        </p:nvSpPr>
+        <p:spPr>
+          <a:xfrm>
+            <a:off x="1143000" y="4824056"/>
+            <a:ext cx="10241280" cy="715617"/>
+          </a:xfrm>
+          <a:prstGeom prst="rect">
+            <a:avLst/>
+          </a:prstGeom>
+          <a:noFill/>
+        </p:spPr>
+        <p:txBody>
+          <a:bodyPr wrap="square" lIns="45720" rIns="45720" tIns="18288" bIns="18288" anchor="t">
+            <a:spAutoFit/>
+          </a:bodyPr>
+          <a:lstStyle/>
+          <a:p>
+            <a:pPr algn="l"/>
+            <a:r>
+              <a:rPr sz="1900" b="0" i="0">
+                <a:solidFill>
+                  <a:srgbClr val="1A1A1A"/>
+                </a:solidFill>
+                <a:latin typeface="Lexend"/>
+              </a:rPr>
+              <a:t>1 : 50 — no units: 1 cm of model is 50 cm of car. 1 in : 4 ft is 1 : 48 this way, and 48 is the scale factor</a:t>
             </a:r>
           </a:p>
         </p:txBody>
@@ -15276,7 +15381,7 @@
         <p:spPr>
           <a:xfrm>
             <a:off x="987552" y="2999232"/>
-            <a:ext cx="10131551" cy="475488"/>
+            <a:ext cx="10131551" cy="950976"/>
           </a:xfrm>
           <a:prstGeom prst="rect">
             <a:avLst/>
@@ -15297,7 +15402,7 @@
                 </a:solidFill>
                 <a:latin typeface="Lexend"/>
               </a:rPr>
-              <a:t>Drawing × rate = real.  Real ÷ rate = drawing.</a:t>
+              <a:t>Drawing × rate = real.  Real ÷ rate = drawing.  With one unit, 1 in : 4 ft is 1 : 48.</a:t>
             </a:r>
           </a:p>
         </p:txBody>
@@ -15970,6 +16075,59 @@
           </a:prstGeom>
         </p:spPr>
       </p:pic>
+      <p:sp>
+        <p:nvSpPr>
+          <p:cNvPr id="11" name="TextBox 10"/>
+          <p:cNvSpPr txBox="1"/>
+          <p:nvPr/>
+        </p:nvSpPr>
+        <p:spPr>
+          <a:xfrm>
+            <a:off x="987552" y="2743200"/>
+            <a:ext cx="10131551" cy="475488"/>
+          </a:xfrm>
+          <a:prstGeom prst="rect">
+            <a:avLst/>
+          </a:prstGeom>
+          <a:noFill/>
+        </p:spPr>
+        <p:txBody>
+          <a:bodyPr wrap="square" lIns="45720" rIns="45720" tIns="18288" bIns="18288" anchor="t">
+            <a:spAutoFit/>
+          </a:bodyPr>
+          <a:lstStyle/>
+          <a:p>
+            <a:pPr algn="l"/>
+            <a:r>
+              <a:rPr sz="2180" b="1" i="0">
+                <a:solidFill>
+                  <a:srgbClr val="1A1A1A"/>
+                </a:solidFill>
+                <a:latin typeface="Lexend"/>
+              </a:rPr>
+              <a:t>No scale printed? One pair gives it: 2 in </a:t>
+            </a:r>
+            <a:r>
+              <a:rPr sz="2180" b="1" i="0">
+                <a:solidFill>
+                  <a:srgbClr val="1A1A1A"/>
+                </a:solidFill>
+                <a:latin typeface="Arial"/>
+              </a:rPr>
+              <a:t>↔</a:t>
+            </a:r>
+            <a:r>
+              <a:rPr sz="2180" b="1" i="0">
+                <a:solidFill>
+                  <a:srgbClr val="1A1A1A"/>
+                </a:solidFill>
+                <a:latin typeface="Lexend"/>
+              </a:rPr>
+              <a:t> 9 ft is 4.5 ft per inch.</a:t>
+            </a:r>
+          </a:p>
+        </p:txBody>
+      </p:sp>
     </p:spTree>
   </p:cSld>
   <p:clrMapOvr>

--- a/a7/packages/A7 Unit 5 - Multi-Step Proportional Relationships/Lessons/5.04/A7 5.04 Real-World Scale Drawings - Slides.pptx
+++ b/a7/packages/A7 Unit 5 - Multi-Step Proportional Relationships/Lessons/5.04/A7 5.04 Real-World Scale Drawings - Slides.pptx
@@ -3673,7 +3673,101 @@
         </p:nvSpPr>
         <p:spPr>
           <a:xfrm>
-            <a:off x="777240" y="1600200"/>
+            <a:off x="3606016" y="1641348"/>
+            <a:ext cx="3757832" cy="457200"/>
+          </a:xfrm>
+          <a:prstGeom prst="rect">
+            <a:avLst/>
+          </a:prstGeom>
+          <a:noFill/>
+        </p:spPr>
+        <p:txBody>
+          <a:bodyPr wrap="none" lIns="45720" rIns="45720" tIns="18288" bIns="18288" anchor="ctr">
+            <a:noAutofit/>
+          </a:bodyPr>
+          <a:lstStyle/>
+          <a:p>
+            <a:pPr algn="l"/>
+            <a:r>
+              <a:rPr sz="2280" b="0" i="0">
+                <a:solidFill>
+                  <a:srgbClr val="1A1A1A"/>
+                </a:solidFill>
+                <a:latin typeface="Lexend"/>
+              </a:rPr>
+              <a:t>A floor plan is drawn at </a:t>
+            </a:r>
+          </a:p>
+        </p:txBody>
+      </p:sp>
+      <p:pic>
+        <p:nvPicPr>
+          <p:cNvPr id="9" name="Picture 8" descr="9ca189c78b28bad0.png"/>
+          <p:cNvPicPr>
+            <a:picLocks noChangeAspect="1"/>
+          </p:cNvPicPr>
+          <p:nvPr/>
+        </p:nvPicPr>
+        <p:blipFill>
+          <a:blip r:embed="rId2"/>
+          <a:stretch>
+            <a:fillRect/>
+          </a:stretch>
+        </p:blipFill>
+        <p:spPr>
+          <a:xfrm>
+            <a:off x="7226689" y="1600200"/>
+            <a:ext cx="1185672" cy="539496"/>
+          </a:xfrm>
+          <a:prstGeom prst="rect">
+            <a:avLst/>
+          </a:prstGeom>
+        </p:spPr>
+      </p:pic>
+      <p:sp>
+        <p:nvSpPr>
+          <p:cNvPr id="10" name="TextBox 9"/>
+          <p:cNvSpPr txBox="1"/>
+          <p:nvPr/>
+        </p:nvSpPr>
+        <p:spPr>
+          <a:xfrm>
+            <a:off x="8412361" y="1641348"/>
+            <a:ext cx="280301" cy="457200"/>
+          </a:xfrm>
+          <a:prstGeom prst="rect">
+            <a:avLst/>
+          </a:prstGeom>
+          <a:noFill/>
+        </p:spPr>
+        <p:txBody>
+          <a:bodyPr wrap="none" lIns="45720" rIns="45720" tIns="18288" bIns="18288" anchor="ctr">
+            <a:noAutofit/>
+          </a:bodyPr>
+          <a:lstStyle/>
+          <a:p>
+            <a:pPr algn="l"/>
+            <a:r>
+              <a:rPr sz="2280" b="0" i="0">
+                <a:solidFill>
+                  <a:srgbClr val="1A1A1A"/>
+                </a:solidFill>
+                <a:latin typeface="Lexend"/>
+              </a:rPr>
+              <a:t>.</a:t>
+            </a:r>
+          </a:p>
+        </p:txBody>
+      </p:sp>
+      <p:sp>
+        <p:nvSpPr>
+          <p:cNvPr id="11" name="TextBox 10"/>
+          <p:cNvSpPr txBox="1"/>
+          <p:nvPr/>
+        </p:nvSpPr>
+        <p:spPr>
+          <a:xfrm>
+            <a:off x="777240" y="2414015"/>
             <a:ext cx="10607040" cy="429370"/>
           </a:xfrm>
           <a:prstGeom prst="rect">
@@ -3695,20 +3789,20 @@
                 </a:solidFill>
                 <a:latin typeface="Lexend"/>
               </a:rPr>
-              <a:t>A floor plan is drawn at ¼ in : 1 ft. A room is 1.5 in by 4 in on the plan.</a:t>
-            </a:r>
-          </a:p>
-        </p:txBody>
-      </p:sp>
-      <p:sp>
-        <p:nvSpPr>
-          <p:cNvPr id="9" name="TextBox 8"/>
-          <p:cNvSpPr txBox="1"/>
-          <p:nvPr/>
-        </p:nvSpPr>
-        <p:spPr>
-          <a:xfrm>
-            <a:off x="777240" y="2139298"/>
+              <a:t>A room is 1.5 in by 4 in on the plan.</a:t>
+            </a:r>
+          </a:p>
+        </p:txBody>
+      </p:sp>
+      <p:sp>
+        <p:nvSpPr>
+          <p:cNvPr id="12" name="TextBox 11"/>
+          <p:cNvSpPr txBox="1"/>
+          <p:nvPr/>
+        </p:nvSpPr>
+        <p:spPr>
+          <a:xfrm>
+            <a:off x="777240" y="2953114"/>
             <a:ext cx="10607040" cy="429370"/>
           </a:xfrm>
           <a:prstGeom prst="rect">
@@ -3971,21 +4065,21 @@
         </p:nvSpPr>
         <p:spPr>
           <a:xfrm>
-            <a:off x="777240" y="1600200"/>
-            <a:ext cx="10607040" cy="429370"/>
-          </a:xfrm>
-          <a:prstGeom prst="rect">
-            <a:avLst/>
-          </a:prstGeom>
-          <a:noFill/>
-        </p:spPr>
-        <p:txBody>
-          <a:bodyPr wrap="square" lIns="45720" rIns="45720" tIns="18288" bIns="18288" anchor="t">
-            <a:spAutoFit/>
-          </a:bodyPr>
-          <a:lstStyle/>
-          <a:p>
-            <a:pPr algn="ctr"/>
+            <a:off x="3604492" y="1641348"/>
+            <a:ext cx="3757832" cy="457200"/>
+          </a:xfrm>
+          <a:prstGeom prst="rect">
+            <a:avLst/>
+          </a:prstGeom>
+          <a:noFill/>
+        </p:spPr>
+        <p:txBody>
+          <a:bodyPr wrap="none" lIns="45720" rIns="45720" tIns="18288" bIns="18288" anchor="ctr">
+            <a:noAutofit/>
+          </a:bodyPr>
+          <a:lstStyle/>
+          <a:p>
+            <a:pPr algn="l"/>
             <a:r>
               <a:rPr sz="2280" b="0" i="0">
                 <a:solidFill>
@@ -3993,49 +4087,14 @@
                 </a:solidFill>
                 <a:latin typeface="Lexend"/>
               </a:rPr>
-              <a:t>A floor plan is drawn at ¼ in : 1 ft. A room is 1.5 in by 4 in on the plan.</a:t>
-            </a:r>
-          </a:p>
-        </p:txBody>
-      </p:sp>
-      <p:sp>
-        <p:nvSpPr>
-          <p:cNvPr id="9" name="TextBox 8"/>
-          <p:cNvSpPr txBox="1"/>
-          <p:nvPr/>
-        </p:nvSpPr>
-        <p:spPr>
-          <a:xfrm>
-            <a:off x="777240" y="2139298"/>
-            <a:ext cx="10607040" cy="429370"/>
-          </a:xfrm>
-          <a:prstGeom prst="rect">
-            <a:avLst/>
-          </a:prstGeom>
-          <a:noFill/>
-        </p:spPr>
-        <p:txBody>
-          <a:bodyPr wrap="square" lIns="45720" rIns="45720" tIns="18288" bIns="18288" anchor="t">
-            <a:spAutoFit/>
-          </a:bodyPr>
-          <a:lstStyle/>
-          <a:p>
-            <a:pPr algn="ctr"/>
-            <a:r>
-              <a:rPr sz="2280" b="0" i="0">
-                <a:solidFill>
-                  <a:srgbClr val="1A1A1A"/>
-                </a:solidFill>
-                <a:latin typeface="Lexend"/>
-              </a:rPr>
-              <a:t>Find the room's real dimensions and area.</a:t>
+              <a:t>A floor plan is drawn at </a:t>
             </a:r>
           </a:p>
         </p:txBody>
       </p:sp>
       <p:pic>
         <p:nvPicPr>
-          <p:cNvPr id="10" name="Picture 9" descr="2ca6e5298287df6c.png"/>
+          <p:cNvPr id="9" name="Picture 8" descr="9141fd4a1e45fcc5.png"/>
           <p:cNvPicPr>
             <a:picLocks noChangeAspect="1"/>
           </p:cNvPicPr>
@@ -4049,17 +4108,122 @@
         </p:blipFill>
         <p:spPr>
           <a:xfrm>
-            <a:off x="4375403" y="2829272"/>
-            <a:ext cx="3523488" cy="256032"/>
+            <a:off x="7225165" y="1600200"/>
+            <a:ext cx="1188720" cy="539496"/>
           </a:xfrm>
           <a:prstGeom prst="rect">
             <a:avLst/>
           </a:prstGeom>
         </p:spPr>
       </p:pic>
+      <p:sp>
+        <p:nvSpPr>
+          <p:cNvPr id="10" name="TextBox 9"/>
+          <p:cNvSpPr txBox="1"/>
+          <p:nvPr/>
+        </p:nvSpPr>
+        <p:spPr>
+          <a:xfrm>
+            <a:off x="8413885" y="1641348"/>
+            <a:ext cx="280301" cy="457200"/>
+          </a:xfrm>
+          <a:prstGeom prst="rect">
+            <a:avLst/>
+          </a:prstGeom>
+          <a:noFill/>
+        </p:spPr>
+        <p:txBody>
+          <a:bodyPr wrap="none" lIns="45720" rIns="45720" tIns="18288" bIns="18288" anchor="ctr">
+            <a:noAutofit/>
+          </a:bodyPr>
+          <a:lstStyle/>
+          <a:p>
+            <a:pPr algn="l"/>
+            <a:r>
+              <a:rPr sz="2280" b="0" i="0">
+                <a:solidFill>
+                  <a:srgbClr val="1A1A1A"/>
+                </a:solidFill>
+                <a:latin typeface="Lexend"/>
+              </a:rPr>
+              <a:t>.</a:t>
+            </a:r>
+          </a:p>
+        </p:txBody>
+      </p:sp>
+      <p:sp>
+        <p:nvSpPr>
+          <p:cNvPr id="11" name="TextBox 10"/>
+          <p:cNvSpPr txBox="1"/>
+          <p:nvPr/>
+        </p:nvSpPr>
+        <p:spPr>
+          <a:xfrm>
+            <a:off x="777240" y="2414015"/>
+            <a:ext cx="10607040" cy="429370"/>
+          </a:xfrm>
+          <a:prstGeom prst="rect">
+            <a:avLst/>
+          </a:prstGeom>
+          <a:noFill/>
+        </p:spPr>
+        <p:txBody>
+          <a:bodyPr wrap="square" lIns="45720" rIns="45720" tIns="18288" bIns="18288" anchor="t">
+            <a:spAutoFit/>
+          </a:bodyPr>
+          <a:lstStyle/>
+          <a:p>
+            <a:pPr algn="ctr"/>
+            <a:r>
+              <a:rPr sz="2280" b="0" i="0">
+                <a:solidFill>
+                  <a:srgbClr val="1A1A1A"/>
+                </a:solidFill>
+                <a:latin typeface="Lexend"/>
+              </a:rPr>
+              <a:t>A room is 1.5 in by 4 in on the plan.</a:t>
+            </a:r>
+          </a:p>
+        </p:txBody>
+      </p:sp>
+      <p:sp>
+        <p:nvSpPr>
+          <p:cNvPr id="12" name="TextBox 11"/>
+          <p:cNvSpPr txBox="1"/>
+          <p:nvPr/>
+        </p:nvSpPr>
+        <p:spPr>
+          <a:xfrm>
+            <a:off x="777240" y="2953114"/>
+            <a:ext cx="10607040" cy="429370"/>
+          </a:xfrm>
+          <a:prstGeom prst="rect">
+            <a:avLst/>
+          </a:prstGeom>
+          <a:noFill/>
+        </p:spPr>
+        <p:txBody>
+          <a:bodyPr wrap="square" lIns="45720" rIns="45720" tIns="18288" bIns="18288" anchor="t">
+            <a:spAutoFit/>
+          </a:bodyPr>
+          <a:lstStyle/>
+          <a:p>
+            <a:pPr algn="ctr"/>
+            <a:r>
+              <a:rPr sz="2280" b="0" i="0">
+                <a:solidFill>
+                  <a:srgbClr val="1A1A1A"/>
+                </a:solidFill>
+                <a:latin typeface="Lexend"/>
+              </a:rPr>
+              <a:t>Find the room's real dimensions and area.</a:t>
+            </a:r>
+          </a:p>
+        </p:txBody>
+      </p:sp>
       <p:pic>
         <p:nvPicPr>
-          <p:cNvPr id="11" name="Picture 10" descr="5fd038657ddc92fe.png"/>
+          <p:cNvPr id="13" name="Picture 12" descr="2ca6e5298287df6c.png"/>
           <p:cNvPicPr>
             <a:picLocks noChangeAspect="1"/>
           </p:cNvPicPr>
@@ -4073,7 +4237,31 @@
         </p:blipFill>
         <p:spPr>
           <a:xfrm>
-            <a:off x="4375403" y="3370292"/>
+            <a:off x="4375403" y="3659281"/>
+            <a:ext cx="3523488" cy="256032"/>
+          </a:xfrm>
+          <a:prstGeom prst="rect">
+            <a:avLst/>
+          </a:prstGeom>
+        </p:spPr>
+      </p:pic>
+      <p:pic>
+        <p:nvPicPr>
+          <p:cNvPr id="14" name="Picture 13" descr="5fd038657ddc92fe.png"/>
+          <p:cNvPicPr>
+            <a:picLocks noChangeAspect="1"/>
+          </p:cNvPicPr>
+          <p:nvPr/>
+        </p:nvPicPr>
+        <p:blipFill>
+          <a:blip r:embed="rId4"/>
+          <a:stretch>
+            <a:fillRect/>
+          </a:stretch>
+        </p:blipFill>
+        <p:spPr>
+          <a:xfrm>
+            <a:off x="4375403" y="4195729"/>
             <a:ext cx="1551432" cy="252984"/>
           </a:xfrm>
           <a:prstGeom prst="rect">
@@ -4083,13 +4271,13 @@
       </p:pic>
       <p:sp>
         <p:nvSpPr>
-          <p:cNvPr id="12" name="TextBox 11"/>
-          <p:cNvSpPr txBox="1"/>
-          <p:nvPr/>
-        </p:nvSpPr>
-        <p:spPr>
-          <a:xfrm>
-            <a:off x="777240" y="4572000"/>
+          <p:cNvPr id="15" name="TextBox 14"/>
+          <p:cNvSpPr txBox="1"/>
+          <p:nvPr/>
+        </p:nvSpPr>
+        <p:spPr>
+          <a:xfrm>
+            <a:off x="777240" y="4653500"/>
             <a:ext cx="10607040" cy="548640"/>
           </a:xfrm>
           <a:prstGeom prst="rect">
@@ -5346,7 +5534,7 @@
         </p:blipFill>
         <p:spPr>
           <a:xfrm>
-            <a:off x="4514874" y="3258643"/>
+            <a:off x="4514874" y="3274835"/>
             <a:ext cx="1642872" cy="256032"/>
           </a:xfrm>
           <a:prstGeom prst="rect">
@@ -5405,7 +5593,7 @@
         </p:blipFill>
         <p:spPr>
           <a:xfrm>
-            <a:off x="4514874" y="3798139"/>
+            <a:off x="4514874" y="3814331"/>
             <a:ext cx="1923288" cy="256032"/>
           </a:xfrm>
           <a:prstGeom prst="rect">
@@ -5684,7 +5872,101 @@
         </p:nvSpPr>
         <p:spPr>
           <a:xfrm>
-            <a:off x="1234440" y="1874519"/>
+            <a:off x="1234440" y="1917192"/>
+            <a:ext cx="2976011" cy="457200"/>
+          </a:xfrm>
+          <a:prstGeom prst="rect">
+            <a:avLst/>
+          </a:prstGeom>
+          <a:noFill/>
+        </p:spPr>
+        <p:txBody>
+          <a:bodyPr wrap="none" lIns="45720" rIns="45720" tIns="18288" bIns="18288" anchor="ctr">
+            <a:noAutofit/>
+          </a:bodyPr>
+          <a:lstStyle/>
+          <a:p>
+            <a:pPr algn="l"/>
+            <a:r>
+              <a:rPr sz="2280" b="0" i="0">
+                <a:solidFill>
+                  <a:srgbClr val="1A1A1A"/>
+                </a:solidFill>
+                <a:latin typeface="Lexend"/>
+              </a:rPr>
+              <a:t>A plan is drawn at </a:t>
+            </a:r>
+          </a:p>
+        </p:txBody>
+      </p:sp>
+      <p:pic>
+        <p:nvPicPr>
+          <p:cNvPr id="9" name="Picture 8" descr="e7b684faf8832363.png"/>
+          <p:cNvPicPr>
+            <a:picLocks noChangeAspect="1"/>
+          </p:cNvPicPr>
+          <p:nvPr/>
+        </p:nvPicPr>
+        <p:blipFill>
+          <a:blip r:embed="rId2"/>
+          <a:stretch>
+            <a:fillRect/>
+          </a:stretch>
+        </p:blipFill>
+        <p:spPr>
+          <a:xfrm>
+            <a:off x="4073291" y="1874519"/>
+            <a:ext cx="1161288" cy="542544"/>
+          </a:xfrm>
+          <a:prstGeom prst="rect">
+            <a:avLst/>
+          </a:prstGeom>
+        </p:spPr>
+      </p:pic>
+      <p:sp>
+        <p:nvSpPr>
+          <p:cNvPr id="10" name="TextBox 9"/>
+          <p:cNvSpPr txBox="1"/>
+          <p:nvPr/>
+        </p:nvSpPr>
+        <p:spPr>
+          <a:xfrm>
+            <a:off x="5234579" y="1917192"/>
+            <a:ext cx="280301" cy="457200"/>
+          </a:xfrm>
+          <a:prstGeom prst="rect">
+            <a:avLst/>
+          </a:prstGeom>
+          <a:noFill/>
+        </p:spPr>
+        <p:txBody>
+          <a:bodyPr wrap="none" lIns="45720" rIns="45720" tIns="18288" bIns="18288" anchor="ctr">
+            <a:noAutofit/>
+          </a:bodyPr>
+          <a:lstStyle/>
+          <a:p>
+            <a:pPr algn="l"/>
+            <a:r>
+              <a:rPr sz="2280" b="0" i="0">
+                <a:solidFill>
+                  <a:srgbClr val="1A1A1A"/>
+                </a:solidFill>
+                <a:latin typeface="Lexend"/>
+              </a:rPr>
+              <a:t>.</a:t>
+            </a:r>
+          </a:p>
+        </p:txBody>
+      </p:sp>
+      <p:sp>
+        <p:nvSpPr>
+          <p:cNvPr id="11" name="TextBox 10"/>
+          <p:cNvSpPr txBox="1"/>
+          <p:nvPr/>
+        </p:nvSpPr>
+        <p:spPr>
+          <a:xfrm>
+            <a:off x="1234440" y="2618232"/>
             <a:ext cx="10058400" cy="429370"/>
           </a:xfrm>
           <a:prstGeom prst="rect">
@@ -5706,20 +5988,20 @@
                 </a:solidFill>
                 <a:latin typeface="Lexend"/>
               </a:rPr>
-              <a:t>A plan is drawn at ½ in : 1 ft. A wall is 4 in long on it.</a:t>
-            </a:r>
-          </a:p>
-        </p:txBody>
-      </p:sp>
-      <p:sp>
-        <p:nvSpPr>
-          <p:cNvPr id="9" name="TextBox 8"/>
-          <p:cNvSpPr txBox="1"/>
-          <p:nvPr/>
-        </p:nvSpPr>
-        <p:spPr>
-          <a:xfrm>
-            <a:off x="1234440" y="2413618"/>
+              <a:t>A wall is 4 in long on it.</a:t>
+            </a:r>
+          </a:p>
+        </p:txBody>
+      </p:sp>
+      <p:sp>
+        <p:nvSpPr>
+          <p:cNvPr id="12" name="TextBox 11"/>
+          <p:cNvSpPr txBox="1"/>
+          <p:nvPr/>
+        </p:nvSpPr>
+        <p:spPr>
+          <a:xfrm>
+            <a:off x="1234440" y="3157330"/>
             <a:ext cx="10058400" cy="429370"/>
           </a:xfrm>
           <a:prstGeom prst="rect">
@@ -5748,7 +6030,7 @@
       </p:sp>
       <p:sp>
         <p:nvSpPr>
-          <p:cNvPr id="10" name="TextBox 9"/>
+          <p:cNvPr id="13" name="TextBox 12"/>
           <p:cNvSpPr txBox="1"/>
           <p:nvPr/>
         </p:nvSpPr>
@@ -6017,17 +6299,17 @@
         </p:nvSpPr>
         <p:spPr>
           <a:xfrm>
-            <a:off x="1234440" y="1874519"/>
-            <a:ext cx="10058400" cy="429370"/>
-          </a:xfrm>
-          <a:prstGeom prst="rect">
-            <a:avLst/>
-          </a:prstGeom>
-          <a:noFill/>
-        </p:spPr>
-        <p:txBody>
-          <a:bodyPr wrap="square" lIns="45720" rIns="45720" tIns="18288" bIns="18288" anchor="t">
-            <a:spAutoFit/>
+            <a:off x="1234440" y="1917192"/>
+            <a:ext cx="2976011" cy="457200"/>
+          </a:xfrm>
+          <a:prstGeom prst="rect">
+            <a:avLst/>
+          </a:prstGeom>
+          <a:noFill/>
+        </p:spPr>
+        <p:txBody>
+          <a:bodyPr wrap="none" lIns="45720" rIns="45720" tIns="18288" bIns="18288" anchor="ctr">
+            <a:noAutofit/>
           </a:bodyPr>
           <a:lstStyle/>
           <a:p>
@@ -6039,49 +6321,14 @@
                 </a:solidFill>
                 <a:latin typeface="Lexend"/>
               </a:rPr>
-              <a:t>A plan is drawn at ½ in : 1 ft. A wall is 4 in long on it.</a:t>
-            </a:r>
-          </a:p>
-        </p:txBody>
-      </p:sp>
-      <p:sp>
-        <p:nvSpPr>
-          <p:cNvPr id="9" name="TextBox 8"/>
-          <p:cNvSpPr txBox="1"/>
-          <p:nvPr/>
-        </p:nvSpPr>
-        <p:spPr>
-          <a:xfrm>
-            <a:off x="1234440" y="2413618"/>
-            <a:ext cx="10058400" cy="429370"/>
-          </a:xfrm>
-          <a:prstGeom prst="rect">
-            <a:avLst/>
-          </a:prstGeom>
-          <a:noFill/>
-        </p:spPr>
-        <p:txBody>
-          <a:bodyPr wrap="square" lIns="45720" rIns="45720" tIns="18288" bIns="18288" anchor="t">
-            <a:spAutoFit/>
-          </a:bodyPr>
-          <a:lstStyle/>
-          <a:p>
-            <a:pPr algn="l"/>
-            <a:r>
-              <a:rPr sz="2280" b="1" i="0">
-                <a:solidFill>
-                  <a:srgbClr val="1A1A1A"/>
-                </a:solidFill>
-                <a:latin typeface="Lexend"/>
-              </a:rPr>
-              <a:t>How long is the real wall?</a:t>
+              <a:t>A plan is drawn at </a:t>
             </a:r>
           </a:p>
         </p:txBody>
       </p:sp>
       <p:pic>
         <p:nvPicPr>
-          <p:cNvPr id="10" name="Picture 9" descr="c8c92f87f3d6ee8d.png"/>
+          <p:cNvPr id="9" name="Picture 8" descr="73bf4039381e9adf.png"/>
           <p:cNvPicPr>
             <a:picLocks noChangeAspect="1"/>
           </p:cNvPicPr>
@@ -6095,17 +6342,122 @@
         </p:blipFill>
         <p:spPr>
           <a:xfrm>
-            <a:off x="4605528" y="3071588"/>
-            <a:ext cx="3060192" cy="606552"/>
+            <a:off x="4073291" y="1874519"/>
+            <a:ext cx="1167384" cy="542544"/>
           </a:xfrm>
           <a:prstGeom prst="rect">
             <a:avLst/>
           </a:prstGeom>
         </p:spPr>
       </p:pic>
+      <p:sp>
+        <p:nvSpPr>
+          <p:cNvPr id="10" name="TextBox 9"/>
+          <p:cNvSpPr txBox="1"/>
+          <p:nvPr/>
+        </p:nvSpPr>
+        <p:spPr>
+          <a:xfrm>
+            <a:off x="5240675" y="1917192"/>
+            <a:ext cx="280301" cy="457200"/>
+          </a:xfrm>
+          <a:prstGeom prst="rect">
+            <a:avLst/>
+          </a:prstGeom>
+          <a:noFill/>
+        </p:spPr>
+        <p:txBody>
+          <a:bodyPr wrap="none" lIns="45720" rIns="45720" tIns="18288" bIns="18288" anchor="ctr">
+            <a:noAutofit/>
+          </a:bodyPr>
+          <a:lstStyle/>
+          <a:p>
+            <a:pPr algn="l"/>
+            <a:r>
+              <a:rPr sz="2280" b="0" i="0">
+                <a:solidFill>
+                  <a:srgbClr val="1A1A1A"/>
+                </a:solidFill>
+                <a:latin typeface="Lexend"/>
+              </a:rPr>
+              <a:t>.</a:t>
+            </a:r>
+          </a:p>
+        </p:txBody>
+      </p:sp>
+      <p:sp>
+        <p:nvSpPr>
+          <p:cNvPr id="11" name="TextBox 10"/>
+          <p:cNvSpPr txBox="1"/>
+          <p:nvPr/>
+        </p:nvSpPr>
+        <p:spPr>
+          <a:xfrm>
+            <a:off x="1234440" y="2618232"/>
+            <a:ext cx="10058400" cy="429370"/>
+          </a:xfrm>
+          <a:prstGeom prst="rect">
+            <a:avLst/>
+          </a:prstGeom>
+          <a:noFill/>
+        </p:spPr>
+        <p:txBody>
+          <a:bodyPr wrap="square" lIns="45720" rIns="45720" tIns="18288" bIns="18288" anchor="t">
+            <a:spAutoFit/>
+          </a:bodyPr>
+          <a:lstStyle/>
+          <a:p>
+            <a:pPr algn="l"/>
+            <a:r>
+              <a:rPr sz="2280" b="0" i="0">
+                <a:solidFill>
+                  <a:srgbClr val="1A1A1A"/>
+                </a:solidFill>
+                <a:latin typeface="Lexend"/>
+              </a:rPr>
+              <a:t>A wall is 4 in long on it.</a:t>
+            </a:r>
+          </a:p>
+        </p:txBody>
+      </p:sp>
+      <p:sp>
+        <p:nvSpPr>
+          <p:cNvPr id="12" name="TextBox 11"/>
+          <p:cNvSpPr txBox="1"/>
+          <p:nvPr/>
+        </p:nvSpPr>
+        <p:spPr>
+          <a:xfrm>
+            <a:off x="1234440" y="3157330"/>
+            <a:ext cx="10058400" cy="429370"/>
+          </a:xfrm>
+          <a:prstGeom prst="rect">
+            <a:avLst/>
+          </a:prstGeom>
+          <a:noFill/>
+        </p:spPr>
+        <p:txBody>
+          <a:bodyPr wrap="square" lIns="45720" rIns="45720" tIns="18288" bIns="18288" anchor="t">
+            <a:spAutoFit/>
+          </a:bodyPr>
+          <a:lstStyle/>
+          <a:p>
+            <a:pPr algn="l"/>
+            <a:r>
+              <a:rPr sz="2280" b="1" i="0">
+                <a:solidFill>
+                  <a:srgbClr val="1A1A1A"/>
+                </a:solidFill>
+                <a:latin typeface="Lexend"/>
+              </a:rPr>
+              <a:t>How long is the real wall?</a:t>
+            </a:r>
+          </a:p>
+        </p:txBody>
+      </p:sp>
       <p:pic>
         <p:nvPicPr>
-          <p:cNvPr id="11" name="Picture 10" descr="4c79ce6c59743c22.png"/>
+          <p:cNvPr id="13" name="Picture 12" descr="c8c92f87f3d6ee8d.png"/>
           <p:cNvPicPr>
             <a:picLocks noChangeAspect="1"/>
           </p:cNvPicPr>
@@ -6119,7 +6471,31 @@
         </p:blipFill>
         <p:spPr>
           <a:xfrm>
-            <a:off x="4605528" y="3886928"/>
+            <a:off x="4605528" y="3815300"/>
+            <a:ext cx="3060192" cy="606552"/>
+          </a:xfrm>
+          <a:prstGeom prst="rect">
+            <a:avLst/>
+          </a:prstGeom>
+        </p:spPr>
+      </p:pic>
+      <p:pic>
+        <p:nvPicPr>
+          <p:cNvPr id="14" name="Picture 13" descr="4c79ce6c59743c22.png"/>
+          <p:cNvPicPr>
+            <a:picLocks noChangeAspect="1"/>
+          </p:cNvPicPr>
+          <p:nvPr/>
+        </p:nvPicPr>
+        <p:blipFill>
+          <a:blip r:embed="rId4"/>
+          <a:stretch>
+            <a:fillRect/>
+          </a:stretch>
+        </p:blipFill>
+        <p:spPr>
+          <a:xfrm>
+            <a:off x="4605528" y="4646833"/>
             <a:ext cx="1210056" cy="249935"/>
           </a:xfrm>
           <a:prstGeom prst="rect">
@@ -6129,13 +6505,13 @@
       </p:pic>
       <p:sp>
         <p:nvSpPr>
-          <p:cNvPr id="12" name="TextBox 11"/>
-          <p:cNvSpPr txBox="1"/>
-          <p:nvPr/>
-        </p:nvSpPr>
-        <p:spPr>
-          <a:xfrm>
-            <a:off x="777240" y="4663440"/>
+          <p:cNvPr id="15" name="TextBox 14"/>
+          <p:cNvSpPr txBox="1"/>
+          <p:nvPr/>
+        </p:nvSpPr>
+        <p:spPr>
+          <a:xfrm>
+            <a:off x="777240" y="5098508"/>
             <a:ext cx="10607040" cy="548640"/>
           </a:xfrm>
           <a:prstGeom prst="rect">
@@ -6398,7 +6774,101 @@
         </p:nvSpPr>
         <p:spPr>
           <a:xfrm>
-            <a:off x="1234440" y="1874519"/>
+            <a:off x="1234440" y="1851660"/>
+            <a:ext cx="2976011" cy="457200"/>
+          </a:xfrm>
+          <a:prstGeom prst="rect">
+            <a:avLst/>
+          </a:prstGeom>
+          <a:noFill/>
+        </p:spPr>
+        <p:txBody>
+          <a:bodyPr wrap="none" lIns="45720" rIns="45720" tIns="18288" bIns="18288" anchor="ctr">
+            <a:noAutofit/>
+          </a:bodyPr>
+          <a:lstStyle/>
+          <a:p>
+            <a:pPr algn="l"/>
+            <a:r>
+              <a:rPr sz="2280" b="0" i="0">
+                <a:solidFill>
+                  <a:srgbClr val="1A1A1A"/>
+                </a:solidFill>
+                <a:latin typeface="Lexend"/>
+              </a:rPr>
+              <a:t>A plan is drawn at </a:t>
+            </a:r>
+          </a:p>
+        </p:txBody>
+      </p:sp>
+      <p:pic>
+        <p:nvPicPr>
+          <p:cNvPr id="9" name="Picture 8" descr="d7e1b174636e6749.png"/>
+          <p:cNvPicPr>
+            <a:picLocks noChangeAspect="1"/>
+          </p:cNvPicPr>
+          <p:nvPr/>
+        </p:nvPicPr>
+        <p:blipFill>
+          <a:blip r:embed="rId2"/>
+          <a:stretch>
+            <a:fillRect/>
+          </a:stretch>
+        </p:blipFill>
+        <p:spPr>
+          <a:xfrm>
+            <a:off x="4073291" y="1956815"/>
+            <a:ext cx="1094232" cy="243840"/>
+          </a:xfrm>
+          <a:prstGeom prst="rect">
+            <a:avLst/>
+          </a:prstGeom>
+        </p:spPr>
+      </p:pic>
+      <p:sp>
+        <p:nvSpPr>
+          <p:cNvPr id="10" name="TextBox 9"/>
+          <p:cNvSpPr txBox="1"/>
+          <p:nvPr/>
+        </p:nvSpPr>
+        <p:spPr>
+          <a:xfrm>
+            <a:off x="5167523" y="1851660"/>
+            <a:ext cx="280301" cy="457200"/>
+          </a:xfrm>
+          <a:prstGeom prst="rect">
+            <a:avLst/>
+          </a:prstGeom>
+          <a:noFill/>
+        </p:spPr>
+        <p:txBody>
+          <a:bodyPr wrap="none" lIns="45720" rIns="45720" tIns="18288" bIns="18288" anchor="ctr">
+            <a:noAutofit/>
+          </a:bodyPr>
+          <a:lstStyle/>
+          <a:p>
+            <a:pPr algn="l"/>
+            <a:r>
+              <a:rPr sz="2280" b="0" i="0">
+                <a:solidFill>
+                  <a:srgbClr val="1A1A1A"/>
+                </a:solidFill>
+                <a:latin typeface="Lexend"/>
+              </a:rPr>
+              <a:t>.</a:t>
+            </a:r>
+          </a:p>
+        </p:txBody>
+      </p:sp>
+      <p:sp>
+        <p:nvSpPr>
+          <p:cNvPr id="11" name="TextBox 10"/>
+          <p:cNvSpPr txBox="1"/>
+          <p:nvPr/>
+        </p:nvSpPr>
+        <p:spPr>
+          <a:xfrm>
+            <a:off x="1234440" y="2487168"/>
             <a:ext cx="10058400" cy="429370"/>
           </a:xfrm>
           <a:prstGeom prst="rect">
@@ -6420,20 +6890,20 @@
                 </a:solidFill>
                 <a:latin typeface="Lexend"/>
               </a:rPr>
-              <a:t>A plan is drawn at 1 in : 3 ft. A room is 2.5 in long on it.</a:t>
-            </a:r>
-          </a:p>
-        </p:txBody>
-      </p:sp>
-      <p:sp>
-        <p:nvSpPr>
-          <p:cNvPr id="9" name="TextBox 8"/>
-          <p:cNvSpPr txBox="1"/>
-          <p:nvPr/>
-        </p:nvSpPr>
-        <p:spPr>
-          <a:xfrm>
-            <a:off x="1234440" y="2413618"/>
+              <a:t>A room is 2.5 in long on it.</a:t>
+            </a:r>
+          </a:p>
+        </p:txBody>
+      </p:sp>
+      <p:sp>
+        <p:nvSpPr>
+          <p:cNvPr id="12" name="TextBox 11"/>
+          <p:cNvSpPr txBox="1"/>
+          <p:nvPr/>
+        </p:nvSpPr>
+        <p:spPr>
+          <a:xfrm>
+            <a:off x="1234440" y="3026266"/>
             <a:ext cx="10058400" cy="429370"/>
           </a:xfrm>
           <a:prstGeom prst="rect">
@@ -6462,7 +6932,7 @@
       </p:sp>
       <p:sp>
         <p:nvSpPr>
-          <p:cNvPr id="10" name="TextBox 9"/>
+          <p:cNvPr id="13" name="TextBox 12"/>
           <p:cNvSpPr txBox="1"/>
           <p:nvPr/>
         </p:nvSpPr>
@@ -6731,17 +7201,17 @@
         </p:nvSpPr>
         <p:spPr>
           <a:xfrm>
-            <a:off x="1234440" y="1874519"/>
-            <a:ext cx="10058400" cy="429370"/>
-          </a:xfrm>
-          <a:prstGeom prst="rect">
-            <a:avLst/>
-          </a:prstGeom>
-          <a:noFill/>
-        </p:spPr>
-        <p:txBody>
-          <a:bodyPr wrap="square" lIns="45720" rIns="45720" tIns="18288" bIns="18288" anchor="t">
-            <a:spAutoFit/>
+            <a:off x="1234440" y="1851660"/>
+            <a:ext cx="2976011" cy="457200"/>
+          </a:xfrm>
+          <a:prstGeom prst="rect">
+            <a:avLst/>
+          </a:prstGeom>
+          <a:noFill/>
+        </p:spPr>
+        <p:txBody>
+          <a:bodyPr wrap="none" lIns="45720" rIns="45720" tIns="18288" bIns="18288" anchor="ctr">
+            <a:noAutofit/>
           </a:bodyPr>
           <a:lstStyle/>
           <a:p>
@@ -6753,49 +7223,14 @@
                 </a:solidFill>
                 <a:latin typeface="Lexend"/>
               </a:rPr>
-              <a:t>A plan is drawn at 1 in : 3 ft. A room is 2.5 in long on it.</a:t>
-            </a:r>
-          </a:p>
-        </p:txBody>
-      </p:sp>
-      <p:sp>
-        <p:nvSpPr>
-          <p:cNvPr id="9" name="TextBox 8"/>
-          <p:cNvSpPr txBox="1"/>
-          <p:nvPr/>
-        </p:nvSpPr>
-        <p:spPr>
-          <a:xfrm>
-            <a:off x="1234440" y="2413618"/>
-            <a:ext cx="10058400" cy="429370"/>
-          </a:xfrm>
-          <a:prstGeom prst="rect">
-            <a:avLst/>
-          </a:prstGeom>
-          <a:noFill/>
-        </p:spPr>
-        <p:txBody>
-          <a:bodyPr wrap="square" lIns="45720" rIns="45720" tIns="18288" bIns="18288" anchor="t">
-            <a:spAutoFit/>
-          </a:bodyPr>
-          <a:lstStyle/>
-          <a:p>
-            <a:pPr algn="l"/>
-            <a:r>
-              <a:rPr sz="2280" b="1" i="0">
-                <a:solidFill>
-                  <a:srgbClr val="1A1A1A"/>
-                </a:solidFill>
-                <a:latin typeface="Lexend"/>
-              </a:rPr>
-              <a:t>How long is the real room?</a:t>
+              <a:t>A plan is drawn at </a:t>
             </a:r>
           </a:p>
         </p:txBody>
       </p:sp>
       <p:pic>
         <p:nvPicPr>
-          <p:cNvPr id="10" name="Picture 9" descr="7f47ff26618b217b.png"/>
+          <p:cNvPr id="9" name="Picture 8" descr="bc94ef922c26df09.png"/>
           <p:cNvPicPr>
             <a:picLocks noChangeAspect="1"/>
           </p:cNvPicPr>
@@ -6809,7 +7244,136 @@
         </p:blipFill>
         <p:spPr>
           <a:xfrm>
-            <a:off x="5279135" y="3150836"/>
+            <a:off x="4073291" y="1956815"/>
+            <a:ext cx="1094232" cy="243840"/>
+          </a:xfrm>
+          <a:prstGeom prst="rect">
+            <a:avLst/>
+          </a:prstGeom>
+        </p:spPr>
+      </p:pic>
+      <p:sp>
+        <p:nvSpPr>
+          <p:cNvPr id="10" name="TextBox 9"/>
+          <p:cNvSpPr txBox="1"/>
+          <p:nvPr/>
+        </p:nvSpPr>
+        <p:spPr>
+          <a:xfrm>
+            <a:off x="5167523" y="1851660"/>
+            <a:ext cx="280301" cy="457200"/>
+          </a:xfrm>
+          <a:prstGeom prst="rect">
+            <a:avLst/>
+          </a:prstGeom>
+          <a:noFill/>
+        </p:spPr>
+        <p:txBody>
+          <a:bodyPr wrap="none" lIns="45720" rIns="45720" tIns="18288" bIns="18288" anchor="ctr">
+            <a:noAutofit/>
+          </a:bodyPr>
+          <a:lstStyle/>
+          <a:p>
+            <a:pPr algn="l"/>
+            <a:r>
+              <a:rPr sz="2280" b="0" i="0">
+                <a:solidFill>
+                  <a:srgbClr val="1A1A1A"/>
+                </a:solidFill>
+                <a:latin typeface="Lexend"/>
+              </a:rPr>
+              <a:t>.</a:t>
+            </a:r>
+          </a:p>
+        </p:txBody>
+      </p:sp>
+      <p:sp>
+        <p:nvSpPr>
+          <p:cNvPr id="11" name="TextBox 10"/>
+          <p:cNvSpPr txBox="1"/>
+          <p:nvPr/>
+        </p:nvSpPr>
+        <p:spPr>
+          <a:xfrm>
+            <a:off x="1234440" y="2487168"/>
+            <a:ext cx="10058400" cy="429370"/>
+          </a:xfrm>
+          <a:prstGeom prst="rect">
+            <a:avLst/>
+          </a:prstGeom>
+          <a:noFill/>
+        </p:spPr>
+        <p:txBody>
+          <a:bodyPr wrap="square" lIns="45720" rIns="45720" tIns="18288" bIns="18288" anchor="t">
+            <a:spAutoFit/>
+          </a:bodyPr>
+          <a:lstStyle/>
+          <a:p>
+            <a:pPr algn="l"/>
+            <a:r>
+              <a:rPr sz="2280" b="0" i="0">
+                <a:solidFill>
+                  <a:srgbClr val="1A1A1A"/>
+                </a:solidFill>
+                <a:latin typeface="Lexend"/>
+              </a:rPr>
+              <a:t>A room is 2.5 in long on it.</a:t>
+            </a:r>
+          </a:p>
+        </p:txBody>
+      </p:sp>
+      <p:sp>
+        <p:nvSpPr>
+          <p:cNvPr id="12" name="TextBox 11"/>
+          <p:cNvSpPr txBox="1"/>
+          <p:nvPr/>
+        </p:nvSpPr>
+        <p:spPr>
+          <a:xfrm>
+            <a:off x="1234440" y="3026266"/>
+            <a:ext cx="10058400" cy="429370"/>
+          </a:xfrm>
+          <a:prstGeom prst="rect">
+            <a:avLst/>
+          </a:prstGeom>
+          <a:noFill/>
+        </p:spPr>
+        <p:txBody>
+          <a:bodyPr wrap="square" lIns="45720" rIns="45720" tIns="18288" bIns="18288" anchor="t">
+            <a:spAutoFit/>
+          </a:bodyPr>
+          <a:lstStyle/>
+          <a:p>
+            <a:pPr algn="l"/>
+            <a:r>
+              <a:rPr sz="2280" b="1" i="0">
+                <a:solidFill>
+                  <a:srgbClr val="1A1A1A"/>
+                </a:solidFill>
+                <a:latin typeface="Lexend"/>
+              </a:rPr>
+              <a:t>How long is the real room?</a:t>
+            </a:r>
+          </a:p>
+        </p:txBody>
+      </p:sp>
+      <p:pic>
+        <p:nvPicPr>
+          <p:cNvPr id="13" name="Picture 12" descr="7f47ff26618b217b.png"/>
+          <p:cNvPicPr>
+            <a:picLocks noChangeAspect="1"/>
+          </p:cNvPicPr>
+          <p:nvPr/>
+        </p:nvPicPr>
+        <p:blipFill>
+          <a:blip r:embed="rId3"/>
+          <a:stretch>
+            <a:fillRect/>
+          </a:stretch>
+        </p:blipFill>
+        <p:spPr>
+          <a:xfrm>
+            <a:off x="5279135" y="3781201"/>
             <a:ext cx="1712976" cy="252984"/>
           </a:xfrm>
           <a:prstGeom prst="rect">
@@ -6819,7 +7383,7 @@
       </p:pic>
       <p:sp>
         <p:nvSpPr>
-          <p:cNvPr id="11" name="TextBox 10"/>
+          <p:cNvPr id="14" name="TextBox 13"/>
           <p:cNvSpPr txBox="1"/>
           <p:nvPr/>
         </p:nvSpPr>
@@ -7089,7 +7653,7 @@
         <p:spPr>
           <a:xfrm>
             <a:off x="1874519" y="1440180"/>
-            <a:ext cx="9658761" cy="457200"/>
+            <a:ext cx="3002638" cy="457200"/>
           </a:xfrm>
           <a:prstGeom prst="rect">
             <a:avLst/>
@@ -7110,102 +7674,14 @@
                 </a:solidFill>
                 <a:latin typeface="Lexend"/>
               </a:rPr>
-              <a:t>1.   A figure with area 9 cm</a:t>
-            </a:r>
-            <a:r>
-              <a:rPr sz="2180" b="0" i="0" baseline="30000">
-                <a:solidFill>
-                  <a:srgbClr val="1A1A1A"/>
-                </a:solidFill>
-                <a:latin typeface="Lexend"/>
-              </a:rPr>
-              <a:t>2</a:t>
-            </a:r>
-            <a:r>
-              <a:rPr sz="2180" b="0" i="0">
-                <a:solidFill>
-                  <a:srgbClr val="1A1A1A"/>
-                </a:solidFill>
-                <a:latin typeface="Lexend"/>
-              </a:rPr>
-              <a:t> is scaled by k = 2. Find the copy's area.</a:t>
-            </a:r>
-          </a:p>
-        </p:txBody>
-      </p:sp>
-      <p:sp>
-        <p:nvSpPr>
-          <p:cNvPr id="9" name="TextBox 8"/>
-          <p:cNvSpPr txBox="1"/>
-          <p:nvPr/>
-        </p:nvSpPr>
-        <p:spPr>
-          <a:xfrm>
-            <a:off x="1874519" y="2052828"/>
-            <a:ext cx="9170535" cy="457200"/>
-          </a:xfrm>
-          <a:prstGeom prst="rect">
-            <a:avLst/>
-          </a:prstGeom>
-          <a:noFill/>
-        </p:spPr>
-        <p:txBody>
-          <a:bodyPr wrap="none" lIns="45720" rIns="45720" tIns="18288" bIns="18288" anchor="ctr">
-            <a:noAutofit/>
-          </a:bodyPr>
-          <a:lstStyle/>
-          <a:p>
-            <a:pPr algn="l"/>
-            <a:r>
-              <a:rPr sz="2180" b="0" i="0">
-                <a:solidFill>
-                  <a:srgbClr val="1A1A1A"/>
-                </a:solidFill>
-                <a:latin typeface="Lexend"/>
-              </a:rPr>
-              <a:t>2.   A 5 cm side becomes 3 cm in the copy. Find the scale factor.</a:t>
-            </a:r>
-          </a:p>
-        </p:txBody>
-      </p:sp>
-      <p:sp>
-        <p:nvSpPr>
-          <p:cNvPr id="10" name="TextBox 9"/>
-          <p:cNvSpPr txBox="1"/>
-          <p:nvPr/>
-        </p:nvSpPr>
-        <p:spPr>
-          <a:xfrm>
-            <a:off x="1874519" y="2665476"/>
-            <a:ext cx="3275301" cy="457200"/>
-          </a:xfrm>
-          <a:prstGeom prst="rect">
-            <a:avLst/>
-          </a:prstGeom>
-          <a:noFill/>
-        </p:spPr>
-        <p:txBody>
-          <a:bodyPr wrap="none" lIns="45720" rIns="45720" tIns="18288" bIns="18288" anchor="ctr">
-            <a:noAutofit/>
-          </a:bodyPr>
-          <a:lstStyle/>
-          <a:p>
-            <a:pPr algn="l"/>
-            <a:r>
-              <a:rPr sz="2180" b="0" i="0">
-                <a:solidFill>
-                  <a:srgbClr val="1A1A1A"/>
-                </a:solidFill>
-                <a:latin typeface="Lexend"/>
-              </a:rPr>
-              <a:t>3.   Find the product:  </a:t>
+              <a:t>1.   A figure of area </a:t>
             </a:r>
           </a:p>
         </p:txBody>
       </p:sp>
       <p:pic>
         <p:nvPicPr>
-          <p:cNvPr id="11" name="Picture 10" descr="7ec5cb8616fd94f3.png"/>
+          <p:cNvPr id="9" name="Picture 8" descr="edb32a36259546d5.png"/>
           <p:cNvPicPr>
             <a:picLocks noChangeAspect="1"/>
           </p:cNvPicPr>
@@ -7219,7 +7695,195 @@
         </p:blipFill>
         <p:spPr>
           <a:xfrm>
-            <a:off x="5012661" y="2781300"/>
+            <a:off x="4739998" y="1507045"/>
+            <a:ext cx="786384" cy="277368"/>
+          </a:xfrm>
+          <a:prstGeom prst="rect">
+            <a:avLst/>
+          </a:prstGeom>
+        </p:spPr>
+      </p:pic>
+      <p:sp>
+        <p:nvSpPr>
+          <p:cNvPr id="10" name="TextBox 9"/>
+          <p:cNvSpPr txBox="1"/>
+          <p:nvPr/>
+        </p:nvSpPr>
+        <p:spPr>
+          <a:xfrm>
+            <a:off x="5526382" y="1440180"/>
+            <a:ext cx="2026935" cy="457200"/>
+          </a:xfrm>
+          <a:prstGeom prst="rect">
+            <a:avLst/>
+          </a:prstGeom>
+          <a:noFill/>
+        </p:spPr>
+        <p:txBody>
+          <a:bodyPr wrap="none" lIns="45720" rIns="45720" tIns="18288" bIns="18288" anchor="ctr">
+            <a:noAutofit/>
+          </a:bodyPr>
+          <a:lstStyle/>
+          <a:p>
+            <a:pPr algn="l"/>
+            <a:r>
+              <a:rPr sz="2180" b="0" i="0">
+                <a:solidFill>
+                  <a:srgbClr val="1A1A1A"/>
+                </a:solidFill>
+                <a:latin typeface="Lexend"/>
+              </a:rPr>
+              <a:t> is scaled by </a:t>
+            </a:r>
+          </a:p>
+        </p:txBody>
+      </p:sp>
+      <p:pic>
+        <p:nvPicPr>
+          <p:cNvPr id="11" name="Picture 10" descr="365db93adf7efc23.png"/>
+          <p:cNvPicPr>
+            <a:picLocks noChangeAspect="1"/>
+          </p:cNvPicPr>
+          <p:nvPr/>
+        </p:nvPicPr>
+        <p:blipFill>
+          <a:blip r:embed="rId3"/>
+          <a:stretch>
+            <a:fillRect/>
+          </a:stretch>
+        </p:blipFill>
+        <p:spPr>
+          <a:xfrm>
+            <a:off x="7416157" y="1546669"/>
+            <a:ext cx="612648" cy="231648"/>
+          </a:xfrm>
+          <a:prstGeom prst="rect">
+            <a:avLst/>
+          </a:prstGeom>
+        </p:spPr>
+      </p:pic>
+      <p:sp>
+        <p:nvSpPr>
+          <p:cNvPr id="12" name="TextBox 11"/>
+          <p:cNvSpPr txBox="1"/>
+          <p:nvPr/>
+        </p:nvSpPr>
+        <p:spPr>
+          <a:xfrm>
+            <a:off x="8028805" y="1440180"/>
+            <a:ext cx="2738367" cy="457200"/>
+          </a:xfrm>
+          <a:prstGeom prst="rect">
+            <a:avLst/>
+          </a:prstGeom>
+          <a:noFill/>
+        </p:spPr>
+        <p:txBody>
+          <a:bodyPr wrap="none" lIns="45720" rIns="45720" tIns="18288" bIns="18288" anchor="ctr">
+            <a:noAutofit/>
+          </a:bodyPr>
+          <a:lstStyle/>
+          <a:p>
+            <a:pPr algn="l"/>
+            <a:r>
+              <a:rPr sz="2180" b="0" i="0">
+                <a:solidFill>
+                  <a:srgbClr val="1A1A1A"/>
+                </a:solidFill>
+                <a:latin typeface="Lexend"/>
+              </a:rPr>
+              <a:t>. The copy's area?</a:t>
+            </a:r>
+          </a:p>
+        </p:txBody>
+      </p:sp>
+      <p:sp>
+        <p:nvSpPr>
+          <p:cNvPr id="13" name="TextBox 12"/>
+          <p:cNvSpPr txBox="1"/>
+          <p:nvPr/>
+        </p:nvSpPr>
+        <p:spPr>
+          <a:xfrm>
+            <a:off x="1874519" y="2052828"/>
+            <a:ext cx="9170535" cy="457200"/>
+          </a:xfrm>
+          <a:prstGeom prst="rect">
+            <a:avLst/>
+          </a:prstGeom>
+          <a:noFill/>
+        </p:spPr>
+        <p:txBody>
+          <a:bodyPr wrap="none" lIns="45720" rIns="45720" tIns="18288" bIns="18288" anchor="ctr">
+            <a:noAutofit/>
+          </a:bodyPr>
+          <a:lstStyle/>
+          <a:p>
+            <a:pPr algn="l"/>
+            <a:r>
+              <a:rPr sz="2180" b="0" i="0">
+                <a:solidFill>
+                  <a:srgbClr val="1A1A1A"/>
+                </a:solidFill>
+                <a:latin typeface="Lexend"/>
+              </a:rPr>
+              <a:t>2.   A 5 cm side becomes 3 cm in the copy. Find the scale factor.</a:t>
+            </a:r>
+          </a:p>
+        </p:txBody>
+      </p:sp>
+      <p:sp>
+        <p:nvSpPr>
+          <p:cNvPr id="14" name="TextBox 13"/>
+          <p:cNvSpPr txBox="1"/>
+          <p:nvPr/>
+        </p:nvSpPr>
+        <p:spPr>
+          <a:xfrm>
+            <a:off x="1874519" y="2665476"/>
+            <a:ext cx="3275301" cy="457200"/>
+          </a:xfrm>
+          <a:prstGeom prst="rect">
+            <a:avLst/>
+          </a:prstGeom>
+          <a:noFill/>
+        </p:spPr>
+        <p:txBody>
+          <a:bodyPr wrap="none" lIns="45720" rIns="45720" tIns="18288" bIns="18288" anchor="ctr">
+            <a:noAutofit/>
+          </a:bodyPr>
+          <a:lstStyle/>
+          <a:p>
+            <a:pPr algn="l"/>
+            <a:r>
+              <a:rPr sz="2180" b="0" i="0">
+                <a:solidFill>
+                  <a:srgbClr val="1A1A1A"/>
+                </a:solidFill>
+                <a:latin typeface="Lexend"/>
+              </a:rPr>
+              <a:t>3.   Find the product:  </a:t>
+            </a:r>
+          </a:p>
+        </p:txBody>
+      </p:sp>
+      <p:pic>
+        <p:nvPicPr>
+          <p:cNvPr id="15" name="Picture 14" descr="7ec5cb8616fd94f3.png"/>
+          <p:cNvPicPr>
+            <a:picLocks noChangeAspect="1"/>
+          </p:cNvPicPr>
+          <p:nvPr/>
+        </p:nvPicPr>
+        <p:blipFill>
+          <a:blip r:embed="rId4"/>
+          <a:stretch>
+            <a:fillRect/>
+          </a:stretch>
+        </p:blipFill>
+        <p:spPr>
+          <a:xfrm>
+            <a:off x="5012661" y="2784157"/>
             <a:ext cx="1072896" cy="225552"/>
           </a:xfrm>
           <a:prstGeom prst="rect">
@@ -7229,7 +7893,7 @@
       </p:pic>
       <p:sp>
         <p:nvSpPr>
-          <p:cNvPr id="12" name="TextBox 11"/>
+          <p:cNvPr id="16" name="TextBox 15"/>
           <p:cNvSpPr txBox="1"/>
           <p:nvPr/>
         </p:nvSpPr>
@@ -7498,7 +8162,101 @@
         </p:nvSpPr>
         <p:spPr>
           <a:xfrm>
-            <a:off x="1234440" y="1874519"/>
+            <a:off x="1234440" y="1851660"/>
+            <a:ext cx="2976011" cy="457200"/>
+          </a:xfrm>
+          <a:prstGeom prst="rect">
+            <a:avLst/>
+          </a:prstGeom>
+          <a:noFill/>
+        </p:spPr>
+        <p:txBody>
+          <a:bodyPr wrap="none" lIns="45720" rIns="45720" tIns="18288" bIns="18288" anchor="ctr">
+            <a:noAutofit/>
+          </a:bodyPr>
+          <a:lstStyle/>
+          <a:p>
+            <a:pPr algn="l"/>
+            <a:r>
+              <a:rPr sz="2280" b="0" i="0">
+                <a:solidFill>
+                  <a:srgbClr val="1A1A1A"/>
+                </a:solidFill>
+                <a:latin typeface="Lexend"/>
+              </a:rPr>
+              <a:t>A plan is drawn at </a:t>
+            </a:r>
+          </a:p>
+        </p:txBody>
+      </p:sp>
+      <p:pic>
+        <p:nvPicPr>
+          <p:cNvPr id="9" name="Picture 8" descr="d7e1b174636e6749.png"/>
+          <p:cNvPicPr>
+            <a:picLocks noChangeAspect="1"/>
+          </p:cNvPicPr>
+          <p:nvPr/>
+        </p:nvPicPr>
+        <p:blipFill>
+          <a:blip r:embed="rId2"/>
+          <a:stretch>
+            <a:fillRect/>
+          </a:stretch>
+        </p:blipFill>
+        <p:spPr>
+          <a:xfrm>
+            <a:off x="4073291" y="1956815"/>
+            <a:ext cx="1094232" cy="243840"/>
+          </a:xfrm>
+          <a:prstGeom prst="rect">
+            <a:avLst/>
+          </a:prstGeom>
+        </p:spPr>
+      </p:pic>
+      <p:sp>
+        <p:nvSpPr>
+          <p:cNvPr id="10" name="TextBox 9"/>
+          <p:cNvSpPr txBox="1"/>
+          <p:nvPr/>
+        </p:nvSpPr>
+        <p:spPr>
+          <a:xfrm>
+            <a:off x="5167523" y="1851660"/>
+            <a:ext cx="280301" cy="457200"/>
+          </a:xfrm>
+          <a:prstGeom prst="rect">
+            <a:avLst/>
+          </a:prstGeom>
+          <a:noFill/>
+        </p:spPr>
+        <p:txBody>
+          <a:bodyPr wrap="none" lIns="45720" rIns="45720" tIns="18288" bIns="18288" anchor="ctr">
+            <a:noAutofit/>
+          </a:bodyPr>
+          <a:lstStyle/>
+          <a:p>
+            <a:pPr algn="l"/>
+            <a:r>
+              <a:rPr sz="2280" b="0" i="0">
+                <a:solidFill>
+                  <a:srgbClr val="1A1A1A"/>
+                </a:solidFill>
+                <a:latin typeface="Lexend"/>
+              </a:rPr>
+              <a:t>.</a:t>
+            </a:r>
+          </a:p>
+        </p:txBody>
+      </p:sp>
+      <p:sp>
+        <p:nvSpPr>
+          <p:cNvPr id="11" name="TextBox 10"/>
+          <p:cNvSpPr txBox="1"/>
+          <p:nvPr/>
+        </p:nvSpPr>
+        <p:spPr>
+          <a:xfrm>
+            <a:off x="1234440" y="2487168"/>
             <a:ext cx="10058400" cy="429370"/>
           </a:xfrm>
           <a:prstGeom prst="rect">
@@ -7520,20 +8278,20 @@
                 </a:solidFill>
                 <a:latin typeface="Lexend"/>
               </a:rPr>
-              <a:t>A plan is drawn at 1 in : 3 ft. A real wall is 21 ft long.</a:t>
-            </a:r>
-          </a:p>
-        </p:txBody>
-      </p:sp>
-      <p:sp>
-        <p:nvSpPr>
-          <p:cNvPr id="9" name="TextBox 8"/>
-          <p:cNvSpPr txBox="1"/>
-          <p:nvPr/>
-        </p:nvSpPr>
-        <p:spPr>
-          <a:xfrm>
-            <a:off x="1234440" y="2413618"/>
+              <a:t>A real wall is 21 ft long.</a:t>
+            </a:r>
+          </a:p>
+        </p:txBody>
+      </p:sp>
+      <p:sp>
+        <p:nvSpPr>
+          <p:cNvPr id="12" name="TextBox 11"/>
+          <p:cNvSpPr txBox="1"/>
+          <p:nvPr/>
+        </p:nvSpPr>
+        <p:spPr>
+          <a:xfrm>
+            <a:off x="1234440" y="3026266"/>
             <a:ext cx="10058400" cy="429370"/>
           </a:xfrm>
           <a:prstGeom prst="rect">
@@ -7562,7 +8320,7 @@
       </p:sp>
       <p:sp>
         <p:nvSpPr>
-          <p:cNvPr id="10" name="TextBox 9"/>
+          <p:cNvPr id="13" name="TextBox 12"/>
           <p:cNvSpPr txBox="1"/>
           <p:nvPr/>
         </p:nvSpPr>
@@ -7831,17 +8589,17 @@
         </p:nvSpPr>
         <p:spPr>
           <a:xfrm>
-            <a:off x="1234440" y="1874519"/>
-            <a:ext cx="10058400" cy="429370"/>
-          </a:xfrm>
-          <a:prstGeom prst="rect">
-            <a:avLst/>
-          </a:prstGeom>
-          <a:noFill/>
-        </p:spPr>
-        <p:txBody>
-          <a:bodyPr wrap="square" lIns="45720" rIns="45720" tIns="18288" bIns="18288" anchor="t">
-            <a:spAutoFit/>
+            <a:off x="1234440" y="1851660"/>
+            <a:ext cx="2976011" cy="457200"/>
+          </a:xfrm>
+          <a:prstGeom prst="rect">
+            <a:avLst/>
+          </a:prstGeom>
+          <a:noFill/>
+        </p:spPr>
+        <p:txBody>
+          <a:bodyPr wrap="none" lIns="45720" rIns="45720" tIns="18288" bIns="18288" anchor="ctr">
+            <a:noAutofit/>
           </a:bodyPr>
           <a:lstStyle/>
           <a:p>
@@ -7853,49 +8611,14 @@
                 </a:solidFill>
                 <a:latin typeface="Lexend"/>
               </a:rPr>
-              <a:t>A plan is drawn at 1 in : 3 ft. A real wall is 21 ft long.</a:t>
-            </a:r>
-          </a:p>
-        </p:txBody>
-      </p:sp>
-      <p:sp>
-        <p:nvSpPr>
-          <p:cNvPr id="9" name="TextBox 8"/>
-          <p:cNvSpPr txBox="1"/>
-          <p:nvPr/>
-        </p:nvSpPr>
-        <p:spPr>
-          <a:xfrm>
-            <a:off x="1234440" y="2413618"/>
-            <a:ext cx="10058400" cy="429370"/>
-          </a:xfrm>
-          <a:prstGeom prst="rect">
-            <a:avLst/>
-          </a:prstGeom>
-          <a:noFill/>
-        </p:spPr>
-        <p:txBody>
-          <a:bodyPr wrap="square" lIns="45720" rIns="45720" tIns="18288" bIns="18288" anchor="t">
-            <a:spAutoFit/>
-          </a:bodyPr>
-          <a:lstStyle/>
-          <a:p>
-            <a:pPr algn="l"/>
-            <a:r>
-              <a:rPr sz="2280" b="1" i="0">
-                <a:solidFill>
-                  <a:srgbClr val="1A1A1A"/>
-                </a:solidFill>
-                <a:latin typeface="Lexend"/>
-              </a:rPr>
-              <a:t>How long is it on the plan?</a:t>
+              <a:t>A plan is drawn at </a:t>
             </a:r>
           </a:p>
         </p:txBody>
       </p:sp>
       <p:pic>
         <p:nvPicPr>
-          <p:cNvPr id="10" name="Picture 9" descr="42d22dbd0f417c53.png"/>
+          <p:cNvPr id="9" name="Picture 8" descr="bc94ef922c26df09.png"/>
           <p:cNvPicPr>
             <a:picLocks noChangeAspect="1"/>
           </p:cNvPicPr>
@@ -7909,7 +8632,136 @@
         </p:blipFill>
         <p:spPr>
           <a:xfrm>
-            <a:off x="5446775" y="3150836"/>
+            <a:off x="4073291" y="1956815"/>
+            <a:ext cx="1094232" cy="243840"/>
+          </a:xfrm>
+          <a:prstGeom prst="rect">
+            <a:avLst/>
+          </a:prstGeom>
+        </p:spPr>
+      </p:pic>
+      <p:sp>
+        <p:nvSpPr>
+          <p:cNvPr id="10" name="TextBox 9"/>
+          <p:cNvSpPr txBox="1"/>
+          <p:nvPr/>
+        </p:nvSpPr>
+        <p:spPr>
+          <a:xfrm>
+            <a:off x="5167523" y="1851660"/>
+            <a:ext cx="280301" cy="457200"/>
+          </a:xfrm>
+          <a:prstGeom prst="rect">
+            <a:avLst/>
+          </a:prstGeom>
+          <a:noFill/>
+        </p:spPr>
+        <p:txBody>
+          <a:bodyPr wrap="none" lIns="45720" rIns="45720" tIns="18288" bIns="18288" anchor="ctr">
+            <a:noAutofit/>
+          </a:bodyPr>
+          <a:lstStyle/>
+          <a:p>
+            <a:pPr algn="l"/>
+            <a:r>
+              <a:rPr sz="2280" b="0" i="0">
+                <a:solidFill>
+                  <a:srgbClr val="1A1A1A"/>
+                </a:solidFill>
+                <a:latin typeface="Lexend"/>
+              </a:rPr>
+              <a:t>.</a:t>
+            </a:r>
+          </a:p>
+        </p:txBody>
+      </p:sp>
+      <p:sp>
+        <p:nvSpPr>
+          <p:cNvPr id="11" name="TextBox 10"/>
+          <p:cNvSpPr txBox="1"/>
+          <p:nvPr/>
+        </p:nvSpPr>
+        <p:spPr>
+          <a:xfrm>
+            <a:off x="1234440" y="2487168"/>
+            <a:ext cx="10058400" cy="429370"/>
+          </a:xfrm>
+          <a:prstGeom prst="rect">
+            <a:avLst/>
+          </a:prstGeom>
+          <a:noFill/>
+        </p:spPr>
+        <p:txBody>
+          <a:bodyPr wrap="square" lIns="45720" rIns="45720" tIns="18288" bIns="18288" anchor="t">
+            <a:spAutoFit/>
+          </a:bodyPr>
+          <a:lstStyle/>
+          <a:p>
+            <a:pPr algn="l"/>
+            <a:r>
+              <a:rPr sz="2280" b="0" i="0">
+                <a:solidFill>
+                  <a:srgbClr val="1A1A1A"/>
+                </a:solidFill>
+                <a:latin typeface="Lexend"/>
+              </a:rPr>
+              <a:t>A real wall is 21 ft long.</a:t>
+            </a:r>
+          </a:p>
+        </p:txBody>
+      </p:sp>
+      <p:sp>
+        <p:nvSpPr>
+          <p:cNvPr id="12" name="TextBox 11"/>
+          <p:cNvSpPr txBox="1"/>
+          <p:nvPr/>
+        </p:nvSpPr>
+        <p:spPr>
+          <a:xfrm>
+            <a:off x="1234440" y="3026266"/>
+            <a:ext cx="10058400" cy="429370"/>
+          </a:xfrm>
+          <a:prstGeom prst="rect">
+            <a:avLst/>
+          </a:prstGeom>
+          <a:noFill/>
+        </p:spPr>
+        <p:txBody>
+          <a:bodyPr wrap="square" lIns="45720" rIns="45720" tIns="18288" bIns="18288" anchor="t">
+            <a:spAutoFit/>
+          </a:bodyPr>
+          <a:lstStyle/>
+          <a:p>
+            <a:pPr algn="l"/>
+            <a:r>
+              <a:rPr sz="2280" b="1" i="0">
+                <a:solidFill>
+                  <a:srgbClr val="1A1A1A"/>
+                </a:solidFill>
+                <a:latin typeface="Lexend"/>
+              </a:rPr>
+              <a:t>How long is it on the plan?</a:t>
+            </a:r>
+          </a:p>
+        </p:txBody>
+      </p:sp>
+      <p:pic>
+        <p:nvPicPr>
+          <p:cNvPr id="13" name="Picture 12" descr="42d22dbd0f417c53.png"/>
+          <p:cNvPicPr>
+            <a:picLocks noChangeAspect="1"/>
+          </p:cNvPicPr>
+          <p:nvPr/>
+        </p:nvPicPr>
+        <p:blipFill>
+          <a:blip r:embed="rId3"/>
+          <a:stretch>
+            <a:fillRect/>
+          </a:stretch>
+        </p:blipFill>
+        <p:spPr>
+          <a:xfrm>
+            <a:off x="5446775" y="3781201"/>
             <a:ext cx="1380744" cy="252984"/>
           </a:xfrm>
           <a:prstGeom prst="rect">
@@ -7919,7 +8771,7 @@
       </p:pic>
       <p:sp>
         <p:nvSpPr>
-          <p:cNvPr id="11" name="TextBox 10"/>
+          <p:cNvPr id="14" name="TextBox 13"/>
           <p:cNvSpPr txBox="1"/>
           <p:nvPr/>
         </p:nvSpPr>
@@ -8188,17 +9040,17 @@
         </p:nvSpPr>
         <p:spPr>
           <a:xfrm>
-            <a:off x="1234440" y="1874519"/>
-            <a:ext cx="10058400" cy="429370"/>
-          </a:xfrm>
-          <a:prstGeom prst="rect">
-            <a:avLst/>
-          </a:prstGeom>
-          <a:noFill/>
-        </p:spPr>
-        <p:txBody>
-          <a:bodyPr wrap="square" lIns="45720" rIns="45720" tIns="18288" bIns="18288" anchor="t">
-            <a:spAutoFit/>
+            <a:off x="1234440" y="1851660"/>
+            <a:ext cx="3548714" cy="457200"/>
+          </a:xfrm>
+          <a:prstGeom prst="rect">
+            <a:avLst/>
+          </a:prstGeom>
+          <a:noFill/>
+        </p:spPr>
+        <p:txBody>
+          <a:bodyPr wrap="none" lIns="45720" rIns="45720" tIns="18288" bIns="18288" anchor="ctr">
+            <a:noAutofit/>
           </a:bodyPr>
           <a:lstStyle/>
           <a:p>
@@ -8210,84 +9062,14 @@
                 </a:solidFill>
                 <a:latin typeface="Lexend"/>
               </a:rPr>
-              <a:t>A model car is built at 1 : 50 and is 8 cm long.</a:t>
-            </a:r>
-          </a:p>
-        </p:txBody>
-      </p:sp>
-      <p:sp>
-        <p:nvSpPr>
-          <p:cNvPr id="9" name="TextBox 8"/>
-          <p:cNvSpPr txBox="1"/>
-          <p:nvPr/>
-        </p:nvSpPr>
-        <p:spPr>
-          <a:xfrm>
-            <a:off x="1234440" y="2413618"/>
-            <a:ext cx="10058400" cy="429370"/>
-          </a:xfrm>
-          <a:prstGeom prst="rect">
-            <a:avLst/>
-          </a:prstGeom>
-          <a:noFill/>
-        </p:spPr>
-        <p:txBody>
-          <a:bodyPr wrap="square" lIns="45720" rIns="45720" tIns="18288" bIns="18288" anchor="t">
-            <a:spAutoFit/>
-          </a:bodyPr>
-          <a:lstStyle/>
-          <a:p>
-            <a:pPr algn="l"/>
-            <a:r>
-              <a:rPr sz="2280" b="1" i="0">
-                <a:solidFill>
-                  <a:srgbClr val="1A1A1A"/>
-                </a:solidFill>
-                <a:latin typeface="Lexend"/>
-              </a:rPr>
-              <a:t>How long is the real car?</a:t>
-            </a:r>
-          </a:p>
-        </p:txBody>
-      </p:sp>
-      <p:sp>
-        <p:nvSpPr>
-          <p:cNvPr id="10" name="TextBox 9"/>
-          <p:cNvSpPr txBox="1"/>
-          <p:nvPr/>
-        </p:nvSpPr>
-        <p:spPr>
-          <a:xfrm>
-            <a:off x="1691640" y="3144740"/>
-            <a:ext cx="594360" cy="457200"/>
-          </a:xfrm>
-          <a:prstGeom prst="rect">
-            <a:avLst/>
-          </a:prstGeom>
-          <a:noFill/>
-        </p:spPr>
-        <p:txBody>
-          <a:bodyPr wrap="square" lIns="45720" rIns="45720" tIns="18288" bIns="18288" anchor="t">
-            <a:spAutoFit/>
-          </a:bodyPr>
-          <a:lstStyle/>
-          <a:p>
-            <a:pPr algn="l"/>
-            <a:r>
-              <a:rPr sz="2280" b="1" i="0">
-                <a:solidFill>
-                  <a:srgbClr val="1A1A1A"/>
-                </a:solidFill>
-                <a:latin typeface="Lexend"/>
-              </a:rPr>
-              <a:t>A.</a:t>
+              <a:t>A model car is built at </a:t>
             </a:r>
           </a:p>
         </p:txBody>
       </p:sp>
       <p:pic>
         <p:nvPicPr>
-          <p:cNvPr id="11" name="Picture 10" descr="e6be1afe10003474.png"/>
+          <p:cNvPr id="9" name="Picture 8" descr="bea53fde14d6fb61.png"/>
           <p:cNvPicPr>
             <a:picLocks noChangeAspect="1"/>
           </p:cNvPicPr>
@@ -8301,8 +9083,8 @@
         </p:blipFill>
         <p:spPr>
           <a:xfrm>
-            <a:off x="2258568" y="3159980"/>
-            <a:ext cx="667512" cy="271272"/>
+            <a:off x="4645994" y="1975103"/>
+            <a:ext cx="673608" cy="225552"/>
           </a:xfrm>
           <a:prstGeom prst="rect">
             <a:avLst/>
@@ -8311,13 +9093,83 @@
       </p:pic>
       <p:sp>
         <p:nvSpPr>
+          <p:cNvPr id="10" name="TextBox 9"/>
+          <p:cNvSpPr txBox="1"/>
+          <p:nvPr/>
+        </p:nvSpPr>
+        <p:spPr>
+          <a:xfrm>
+            <a:off x="5319602" y="1851660"/>
+            <a:ext cx="2782979" cy="457200"/>
+          </a:xfrm>
+          <a:prstGeom prst="rect">
+            <a:avLst/>
+          </a:prstGeom>
+          <a:noFill/>
+        </p:spPr>
+        <p:txBody>
+          <a:bodyPr wrap="none" lIns="45720" rIns="45720" tIns="18288" bIns="18288" anchor="ctr">
+            <a:noAutofit/>
+          </a:bodyPr>
+          <a:lstStyle/>
+          <a:p>
+            <a:pPr algn="l"/>
+            <a:r>
+              <a:rPr sz="2280" b="0" i="0">
+                <a:solidFill>
+                  <a:srgbClr val="1A1A1A"/>
+                </a:solidFill>
+                <a:latin typeface="Lexend"/>
+              </a:rPr>
+              <a:t> and is 8 cm long.</a:t>
+            </a:r>
+          </a:p>
+        </p:txBody>
+      </p:sp>
+      <p:sp>
+        <p:nvSpPr>
+          <p:cNvPr id="11" name="TextBox 10"/>
+          <p:cNvSpPr txBox="1"/>
+          <p:nvPr/>
+        </p:nvSpPr>
+        <p:spPr>
+          <a:xfrm>
+            <a:off x="1234440" y="2487168"/>
+            <a:ext cx="10058400" cy="429370"/>
+          </a:xfrm>
+          <a:prstGeom prst="rect">
+            <a:avLst/>
+          </a:prstGeom>
+          <a:noFill/>
+        </p:spPr>
+        <p:txBody>
+          <a:bodyPr wrap="square" lIns="45720" rIns="45720" tIns="18288" bIns="18288" anchor="t">
+            <a:spAutoFit/>
+          </a:bodyPr>
+          <a:lstStyle/>
+          <a:p>
+            <a:pPr algn="l"/>
+            <a:r>
+              <a:rPr sz="2280" b="1" i="0">
+                <a:solidFill>
+                  <a:srgbClr val="1A1A1A"/>
+                </a:solidFill>
+                <a:latin typeface="Lexend"/>
+              </a:rPr>
+              <a:t>How long is the real car?</a:t>
+            </a:r>
+          </a:p>
+        </p:txBody>
+      </p:sp>
+      <p:sp>
+        <p:nvSpPr>
           <p:cNvPr id="12" name="TextBox 11"/>
           <p:cNvSpPr txBox="1"/>
           <p:nvPr/>
         </p:nvSpPr>
         <p:spPr>
           <a:xfrm>
-            <a:off x="6537959" y="3144740"/>
+            <a:off x="1691640" y="3218290"/>
             <a:ext cx="594360" cy="457200"/>
           </a:xfrm>
           <a:prstGeom prst="rect">
@@ -8339,14 +9191,14 @@
                 </a:solidFill>
                 <a:latin typeface="Lexend"/>
               </a:rPr>
-              <a:t>B.</a:t>
+              <a:t>A.</a:t>
             </a:r>
           </a:p>
         </p:txBody>
       </p:sp>
       <p:pic>
         <p:nvPicPr>
-          <p:cNvPr id="13" name="Picture 12" descr="d1c869ae9d4258c0.png"/>
+          <p:cNvPr id="13" name="Picture 12" descr="e6be1afe10003474.png"/>
           <p:cNvPicPr>
             <a:picLocks noChangeAspect="1"/>
           </p:cNvPicPr>
@@ -8360,8 +9212,8 @@
         </p:blipFill>
         <p:spPr>
           <a:xfrm>
-            <a:off x="7104888" y="3155408"/>
-            <a:ext cx="1155192" cy="280416"/>
+            <a:off x="2258568" y="3212194"/>
+            <a:ext cx="667512" cy="271272"/>
           </a:xfrm>
           <a:prstGeom prst="rect">
             <a:avLst/>
@@ -8376,7 +9228,7 @@
         </p:nvSpPr>
         <p:spPr>
           <a:xfrm>
-            <a:off x="1691640" y="3757388"/>
+            <a:off x="6537959" y="3218290"/>
             <a:ext cx="594360" cy="457200"/>
           </a:xfrm>
           <a:prstGeom prst="rect">
@@ -8398,14 +9250,14 @@
                 </a:solidFill>
                 <a:latin typeface="Lexend"/>
               </a:rPr>
-              <a:t>C.</a:t>
+              <a:t>B.</a:t>
             </a:r>
           </a:p>
         </p:txBody>
       </p:sp>
       <p:pic>
         <p:nvPicPr>
-          <p:cNvPr id="15" name="Picture 14" descr="f9480b526a91aca5.png"/>
+          <p:cNvPr id="15" name="Picture 14" descr="d1c869ae9d4258c0.png"/>
           <p:cNvPicPr>
             <a:picLocks noChangeAspect="1"/>
           </p:cNvPicPr>
@@ -8419,8 +9271,8 @@
         </p:blipFill>
         <p:spPr>
           <a:xfrm>
-            <a:off x="2258568" y="3769580"/>
-            <a:ext cx="1136904" cy="277368"/>
+            <a:off x="7104888" y="3209146"/>
+            <a:ext cx="1155192" cy="280416"/>
           </a:xfrm>
           <a:prstGeom prst="rect">
             <a:avLst/>
@@ -8435,7 +9287,7 @@
         </p:nvSpPr>
         <p:spPr>
           <a:xfrm>
-            <a:off x="6537959" y="3757388"/>
+            <a:off x="1691640" y="3830938"/>
             <a:ext cx="594360" cy="457200"/>
           </a:xfrm>
           <a:prstGeom prst="rect">
@@ -8457,14 +9309,14 @@
                 </a:solidFill>
                 <a:latin typeface="Lexend"/>
               </a:rPr>
-              <a:t>D.</a:t>
+              <a:t>C.</a:t>
             </a:r>
           </a:p>
         </p:txBody>
       </p:sp>
       <p:pic>
         <p:nvPicPr>
-          <p:cNvPr id="17" name="Picture 16" descr="f6b889ed3e969be0.png"/>
+          <p:cNvPr id="17" name="Picture 16" descr="f9480b526a91aca5.png"/>
           <p:cNvPicPr>
             <a:picLocks noChangeAspect="1"/>
           </p:cNvPicPr>
@@ -8478,7 +9330,66 @@
         </p:blipFill>
         <p:spPr>
           <a:xfrm>
-            <a:off x="7104888" y="3771104"/>
+            <a:off x="2258568" y="3824842"/>
+            <a:ext cx="1136904" cy="277368"/>
+          </a:xfrm>
+          <a:prstGeom prst="rect">
+            <a:avLst/>
+          </a:prstGeom>
+        </p:spPr>
+      </p:pic>
+      <p:sp>
+        <p:nvSpPr>
+          <p:cNvPr id="18" name="TextBox 17"/>
+          <p:cNvSpPr txBox="1"/>
+          <p:nvPr/>
+        </p:nvSpPr>
+        <p:spPr>
+          <a:xfrm>
+            <a:off x="6537959" y="3830938"/>
+            <a:ext cx="594360" cy="457200"/>
+          </a:xfrm>
+          <a:prstGeom prst="rect">
+            <a:avLst/>
+          </a:prstGeom>
+          <a:noFill/>
+        </p:spPr>
+        <p:txBody>
+          <a:bodyPr wrap="square" lIns="45720" rIns="45720" tIns="18288" bIns="18288" anchor="t">
+            <a:spAutoFit/>
+          </a:bodyPr>
+          <a:lstStyle/>
+          <a:p>
+            <a:pPr algn="l"/>
+            <a:r>
+              <a:rPr sz="2280" b="1" i="0">
+                <a:solidFill>
+                  <a:srgbClr val="1A1A1A"/>
+                </a:solidFill>
+                <a:latin typeface="Lexend"/>
+              </a:rPr>
+              <a:t>D.</a:t>
+            </a:r>
+          </a:p>
+        </p:txBody>
+      </p:sp>
+      <p:pic>
+        <p:nvPicPr>
+          <p:cNvPr id="19" name="Picture 18" descr="f6b889ed3e969be0.png"/>
+          <p:cNvPicPr>
+            <a:picLocks noChangeAspect="1"/>
+          </p:cNvPicPr>
+          <p:nvPr/>
+        </p:nvPicPr>
+        <p:blipFill>
+          <a:blip r:embed="rId6"/>
+          <a:stretch>
+            <a:fillRect/>
+          </a:stretch>
+        </p:blipFill>
+        <p:spPr>
+          <a:xfrm>
+            <a:off x="7104888" y="3827890"/>
             <a:ext cx="1075944" cy="274320"/>
           </a:xfrm>
           <a:prstGeom prst="rect">
@@ -8488,13 +9399,13 @@
       </p:pic>
       <p:sp>
         <p:nvSpPr>
-          <p:cNvPr id="18" name="TextBox 17"/>
-          <p:cNvSpPr txBox="1"/>
-          <p:nvPr/>
-        </p:nvSpPr>
-        <p:spPr>
-          <a:xfrm>
-            <a:off x="777240" y="4434044"/>
+          <p:cNvPr id="20" name="TextBox 19"/>
+          <p:cNvSpPr txBox="1"/>
+          <p:nvPr/>
+        </p:nvSpPr>
+        <p:spPr>
+          <a:xfrm>
+            <a:off x="777240" y="4507594"/>
             <a:ext cx="10607040" cy="457200"/>
           </a:xfrm>
           <a:prstGeom prst="rect">
@@ -8757,17 +9668,17 @@
         </p:nvSpPr>
         <p:spPr>
           <a:xfrm>
-            <a:off x="1234440" y="1874519"/>
-            <a:ext cx="10058400" cy="429370"/>
-          </a:xfrm>
-          <a:prstGeom prst="rect">
-            <a:avLst/>
-          </a:prstGeom>
-          <a:noFill/>
-        </p:spPr>
-        <p:txBody>
-          <a:bodyPr wrap="square" lIns="45720" rIns="45720" tIns="18288" bIns="18288" anchor="t">
-            <a:spAutoFit/>
+            <a:off x="1234440" y="1851660"/>
+            <a:ext cx="3548714" cy="457200"/>
+          </a:xfrm>
+          <a:prstGeom prst="rect">
+            <a:avLst/>
+          </a:prstGeom>
+          <a:noFill/>
+        </p:spPr>
+        <p:txBody>
+          <a:bodyPr wrap="none" lIns="45720" rIns="45720" tIns="18288" bIns="18288" anchor="ctr">
+            <a:noAutofit/>
           </a:bodyPr>
           <a:lstStyle/>
           <a:p>
@@ -8779,49 +9690,14 @@
                 </a:solidFill>
                 <a:latin typeface="Lexend"/>
               </a:rPr>
-              <a:t>A model car is built at 1 : 50 and is 8 cm long.</a:t>
-            </a:r>
-          </a:p>
-        </p:txBody>
-      </p:sp>
-      <p:sp>
-        <p:nvSpPr>
-          <p:cNvPr id="9" name="TextBox 8"/>
-          <p:cNvSpPr txBox="1"/>
-          <p:nvPr/>
-        </p:nvSpPr>
-        <p:spPr>
-          <a:xfrm>
-            <a:off x="1234440" y="2413618"/>
-            <a:ext cx="10058400" cy="429370"/>
-          </a:xfrm>
-          <a:prstGeom prst="rect">
-            <a:avLst/>
-          </a:prstGeom>
-          <a:noFill/>
-        </p:spPr>
-        <p:txBody>
-          <a:bodyPr wrap="square" lIns="45720" rIns="45720" tIns="18288" bIns="18288" anchor="t">
-            <a:spAutoFit/>
-          </a:bodyPr>
-          <a:lstStyle/>
-          <a:p>
-            <a:pPr algn="l"/>
-            <a:r>
-              <a:rPr sz="2280" b="1" i="0">
-                <a:solidFill>
-                  <a:srgbClr val="1A1A1A"/>
-                </a:solidFill>
-                <a:latin typeface="Lexend"/>
-              </a:rPr>
-              <a:t>How long is the real car?</a:t>
+              <a:t>A model car is built at </a:t>
             </a:r>
           </a:p>
         </p:txBody>
       </p:sp>
       <p:pic>
         <p:nvPicPr>
-          <p:cNvPr id="10" name="Picture 9" descr="4fc1d381e1a99bac.png"/>
+          <p:cNvPr id="9" name="Picture 8" descr="bea53fde14d6fb61.png"/>
           <p:cNvPicPr>
             <a:picLocks noChangeAspect="1"/>
           </p:cNvPicPr>
@@ -8835,8 +9711,8 @@
         </p:blipFill>
         <p:spPr>
           <a:xfrm>
-            <a:off x="4826280" y="3150836"/>
-            <a:ext cx="1847088" cy="252984"/>
+            <a:off x="4645994" y="1975103"/>
+            <a:ext cx="673608" cy="225552"/>
           </a:xfrm>
           <a:prstGeom prst="rect">
             <a:avLst/>
@@ -8845,14 +9721,14 @@
       </p:pic>
       <p:sp>
         <p:nvSpPr>
-          <p:cNvPr id="11" name="TextBox 10"/>
-          <p:cNvSpPr txBox="1"/>
-          <p:nvPr/>
-        </p:nvSpPr>
-        <p:spPr>
-          <a:xfrm>
-            <a:off x="6673368" y="3048728"/>
-            <a:ext cx="854203" cy="457200"/>
+          <p:cNvPr id="10" name="TextBox 9"/>
+          <p:cNvSpPr txBox="1"/>
+          <p:nvPr/>
+        </p:nvSpPr>
+        <p:spPr>
+          <a:xfrm>
+            <a:off x="5319602" y="1851660"/>
+            <a:ext cx="2782979" cy="457200"/>
           </a:xfrm>
           <a:prstGeom prst="rect">
             <a:avLst/>
@@ -8867,20 +9743,55 @@
           <a:p>
             <a:pPr algn="l"/>
             <a:r>
-              <a:rPr sz="2750" b="0" i="0">
+              <a:rPr sz="2280" b="0" i="0">
                 <a:solidFill>
                   <a:srgbClr val="1A1A1A"/>
                 </a:solidFill>
                 <a:latin typeface="Lexend"/>
               </a:rPr>
-              <a:t> cm</a:t>
+              <a:t> and is 8 cm long.</a:t>
+            </a:r>
+          </a:p>
+        </p:txBody>
+      </p:sp>
+      <p:sp>
+        <p:nvSpPr>
+          <p:cNvPr id="11" name="TextBox 10"/>
+          <p:cNvSpPr txBox="1"/>
+          <p:nvPr/>
+        </p:nvSpPr>
+        <p:spPr>
+          <a:xfrm>
+            <a:off x="1234440" y="2487168"/>
+            <a:ext cx="10058400" cy="429370"/>
+          </a:xfrm>
+          <a:prstGeom prst="rect">
+            <a:avLst/>
+          </a:prstGeom>
+          <a:noFill/>
+        </p:spPr>
+        <p:txBody>
+          <a:bodyPr wrap="square" lIns="45720" rIns="45720" tIns="18288" bIns="18288" anchor="t">
+            <a:spAutoFit/>
+          </a:bodyPr>
+          <a:lstStyle/>
+          <a:p>
+            <a:pPr algn="l"/>
+            <a:r>
+              <a:rPr sz="2280" b="1" i="0">
+                <a:solidFill>
+                  <a:srgbClr val="1A1A1A"/>
+                </a:solidFill>
+                <a:latin typeface="Lexend"/>
+              </a:rPr>
+              <a:t>How long is the real car?</a:t>
             </a:r>
           </a:p>
         </p:txBody>
       </p:sp>
       <p:pic>
         <p:nvPicPr>
-          <p:cNvPr id="12" name="Picture 11" descr="19d037a982db9caa.png"/>
+          <p:cNvPr id="12" name="Picture 11" descr="4fc1d381e1a99bac.png"/>
           <p:cNvPicPr>
             <a:picLocks noChangeAspect="1"/>
           </p:cNvPicPr>
@@ -8894,8 +9805,8 @@
         </p:blipFill>
         <p:spPr>
           <a:xfrm>
-            <a:off x="4826280" y="3690332"/>
-            <a:ext cx="2103120" cy="252984"/>
+            <a:off x="4826280" y="3242102"/>
+            <a:ext cx="1847088" cy="252984"/>
           </a:xfrm>
           <a:prstGeom prst="rect">
             <a:avLst/>
@@ -8910,8 +9821,8 @@
         </p:nvSpPr>
         <p:spPr>
           <a:xfrm>
-            <a:off x="6929400" y="3588224"/>
-            <a:ext cx="655775" cy="457200"/>
+            <a:off x="6673368" y="3122278"/>
+            <a:ext cx="854203" cy="457200"/>
           </a:xfrm>
           <a:prstGeom prst="rect">
             <a:avLst/>
@@ -8932,6 +9843,65 @@
                 </a:solidFill>
                 <a:latin typeface="Lexend"/>
               </a:rPr>
+              <a:t> cm</a:t>
+            </a:r>
+          </a:p>
+        </p:txBody>
+      </p:sp>
+      <p:pic>
+        <p:nvPicPr>
+          <p:cNvPr id="14" name="Picture 13" descr="19d037a982db9caa.png"/>
+          <p:cNvPicPr>
+            <a:picLocks noChangeAspect="1"/>
+          </p:cNvPicPr>
+          <p:nvPr/>
+        </p:nvPicPr>
+        <p:blipFill>
+          <a:blip r:embed="rId4"/>
+          <a:stretch>
+            <a:fillRect/>
+          </a:stretch>
+        </p:blipFill>
+        <p:spPr>
+          <a:xfrm>
+            <a:off x="4826280" y="3781598"/>
+            <a:ext cx="2103120" cy="252984"/>
+          </a:xfrm>
+          <a:prstGeom prst="rect">
+            <a:avLst/>
+          </a:prstGeom>
+        </p:spPr>
+      </p:pic>
+      <p:sp>
+        <p:nvSpPr>
+          <p:cNvPr id="15" name="TextBox 14"/>
+          <p:cNvSpPr txBox="1"/>
+          <p:nvPr/>
+        </p:nvSpPr>
+        <p:spPr>
+          <a:xfrm>
+            <a:off x="6929400" y="3661774"/>
+            <a:ext cx="655775" cy="457200"/>
+          </a:xfrm>
+          <a:prstGeom prst="rect">
+            <a:avLst/>
+          </a:prstGeom>
+          <a:noFill/>
+        </p:spPr>
+        <p:txBody>
+          <a:bodyPr wrap="none" lIns="45720" rIns="45720" tIns="18288" bIns="18288" anchor="ctr">
+            <a:noAutofit/>
+          </a:bodyPr>
+          <a:lstStyle/>
+          <a:p>
+            <a:pPr algn="l"/>
+            <a:r>
+              <a:rPr sz="2750" b="0" i="0">
+                <a:solidFill>
+                  <a:srgbClr val="1A1A1A"/>
+                </a:solidFill>
+                <a:latin typeface="Lexend"/>
+              </a:rPr>
               <a:t> m</a:t>
             </a:r>
           </a:p>
@@ -8939,7 +9909,7 @@
       </p:sp>
       <p:sp>
         <p:nvSpPr>
-          <p:cNvPr id="14" name="TextBox 13"/>
+          <p:cNvPr id="16" name="TextBox 15"/>
           <p:cNvSpPr txBox="1"/>
           <p:nvPr/>
         </p:nvSpPr>
@@ -9208,7 +10178,101 @@
         </p:nvSpPr>
         <p:spPr>
           <a:xfrm>
-            <a:off x="1234440" y="1874519"/>
+            <a:off x="1234440" y="1915667"/>
+            <a:ext cx="2976011" cy="457200"/>
+          </a:xfrm>
+          <a:prstGeom prst="rect">
+            <a:avLst/>
+          </a:prstGeom>
+          <a:noFill/>
+        </p:spPr>
+        <p:txBody>
+          <a:bodyPr wrap="none" lIns="45720" rIns="45720" tIns="18288" bIns="18288" anchor="ctr">
+            <a:noAutofit/>
+          </a:bodyPr>
+          <a:lstStyle/>
+          <a:p>
+            <a:pPr algn="l"/>
+            <a:r>
+              <a:rPr sz="2280" b="0" i="0">
+                <a:solidFill>
+                  <a:srgbClr val="1A1A1A"/>
+                </a:solidFill>
+                <a:latin typeface="Lexend"/>
+              </a:rPr>
+              <a:t>A plan is drawn at </a:t>
+            </a:r>
+          </a:p>
+        </p:txBody>
+      </p:sp>
+      <p:pic>
+        <p:nvPicPr>
+          <p:cNvPr id="9" name="Picture 8" descr="9ca189c78b28bad0.png"/>
+          <p:cNvPicPr>
+            <a:picLocks noChangeAspect="1"/>
+          </p:cNvPicPr>
+          <p:nvPr/>
+        </p:nvPicPr>
+        <p:blipFill>
+          <a:blip r:embed="rId2"/>
+          <a:stretch>
+            <a:fillRect/>
+          </a:stretch>
+        </p:blipFill>
+        <p:spPr>
+          <a:xfrm>
+            <a:off x="4073291" y="1874519"/>
+            <a:ext cx="1185672" cy="539496"/>
+          </a:xfrm>
+          <a:prstGeom prst="rect">
+            <a:avLst/>
+          </a:prstGeom>
+        </p:spPr>
+      </p:pic>
+      <p:sp>
+        <p:nvSpPr>
+          <p:cNvPr id="10" name="TextBox 9"/>
+          <p:cNvSpPr txBox="1"/>
+          <p:nvPr/>
+        </p:nvSpPr>
+        <p:spPr>
+          <a:xfrm>
+            <a:off x="5258963" y="1915667"/>
+            <a:ext cx="280301" cy="457200"/>
+          </a:xfrm>
+          <a:prstGeom prst="rect">
+            <a:avLst/>
+          </a:prstGeom>
+          <a:noFill/>
+        </p:spPr>
+        <p:txBody>
+          <a:bodyPr wrap="none" lIns="45720" rIns="45720" tIns="18288" bIns="18288" anchor="ctr">
+            <a:noAutofit/>
+          </a:bodyPr>
+          <a:lstStyle/>
+          <a:p>
+            <a:pPr algn="l"/>
+            <a:r>
+              <a:rPr sz="2280" b="0" i="0">
+                <a:solidFill>
+                  <a:srgbClr val="1A1A1A"/>
+                </a:solidFill>
+                <a:latin typeface="Lexend"/>
+              </a:rPr>
+              <a:t>.</a:t>
+            </a:r>
+          </a:p>
+        </p:txBody>
+      </p:sp>
+      <p:sp>
+        <p:nvSpPr>
+          <p:cNvPr id="11" name="TextBox 10"/>
+          <p:cNvSpPr txBox="1"/>
+          <p:nvPr/>
+        </p:nvSpPr>
+        <p:spPr>
+          <a:xfrm>
+            <a:off x="1234440" y="2615184"/>
             <a:ext cx="10058400" cy="429370"/>
           </a:xfrm>
           <a:prstGeom prst="rect">
@@ -9230,20 +10294,20 @@
                 </a:solidFill>
                 <a:latin typeface="Lexend"/>
               </a:rPr>
-              <a:t>A plan is drawn at ¼ in : 1 ft. A real wall is 15 ft long.</a:t>
-            </a:r>
-          </a:p>
-        </p:txBody>
-      </p:sp>
-      <p:sp>
-        <p:nvSpPr>
-          <p:cNvPr id="9" name="TextBox 8"/>
-          <p:cNvSpPr txBox="1"/>
-          <p:nvPr/>
-        </p:nvSpPr>
-        <p:spPr>
-          <a:xfrm>
-            <a:off x="1234440" y="2413618"/>
+              <a:t>A real wall is 15 ft long.</a:t>
+            </a:r>
+          </a:p>
+        </p:txBody>
+      </p:sp>
+      <p:sp>
+        <p:nvSpPr>
+          <p:cNvPr id="12" name="TextBox 11"/>
+          <p:cNvSpPr txBox="1"/>
+          <p:nvPr/>
+        </p:nvSpPr>
+        <p:spPr>
+          <a:xfrm>
+            <a:off x="1234440" y="3154282"/>
             <a:ext cx="10058400" cy="429370"/>
           </a:xfrm>
           <a:prstGeom prst="rect">
@@ -9272,7 +10336,7 @@
       </p:sp>
       <p:sp>
         <p:nvSpPr>
-          <p:cNvPr id="10" name="TextBox 9"/>
+          <p:cNvPr id="13" name="TextBox 12"/>
           <p:cNvSpPr txBox="1"/>
           <p:nvPr/>
         </p:nvSpPr>
@@ -9541,17 +10605,17 @@
         </p:nvSpPr>
         <p:spPr>
           <a:xfrm>
-            <a:off x="1234440" y="1874519"/>
-            <a:ext cx="10058400" cy="429370"/>
-          </a:xfrm>
-          <a:prstGeom prst="rect">
-            <a:avLst/>
-          </a:prstGeom>
-          <a:noFill/>
-        </p:spPr>
-        <p:txBody>
-          <a:bodyPr wrap="square" lIns="45720" rIns="45720" tIns="18288" bIns="18288" anchor="t">
-            <a:spAutoFit/>
+            <a:off x="1234440" y="1915667"/>
+            <a:ext cx="2976011" cy="457200"/>
+          </a:xfrm>
+          <a:prstGeom prst="rect">
+            <a:avLst/>
+          </a:prstGeom>
+          <a:noFill/>
+        </p:spPr>
+        <p:txBody>
+          <a:bodyPr wrap="none" lIns="45720" rIns="45720" tIns="18288" bIns="18288" anchor="ctr">
+            <a:noAutofit/>
           </a:bodyPr>
           <a:lstStyle/>
           <a:p>
@@ -9563,49 +10627,14 @@
                 </a:solidFill>
                 <a:latin typeface="Lexend"/>
               </a:rPr>
-              <a:t>A plan is drawn at ¼ in : 1 ft. A real wall is 15 ft long.</a:t>
-            </a:r>
-          </a:p>
-        </p:txBody>
-      </p:sp>
-      <p:sp>
-        <p:nvSpPr>
-          <p:cNvPr id="9" name="TextBox 8"/>
-          <p:cNvSpPr txBox="1"/>
-          <p:nvPr/>
-        </p:nvSpPr>
-        <p:spPr>
-          <a:xfrm>
-            <a:off x="1234440" y="2413618"/>
-            <a:ext cx="10058400" cy="429370"/>
-          </a:xfrm>
-          <a:prstGeom prst="rect">
-            <a:avLst/>
-          </a:prstGeom>
-          <a:noFill/>
-        </p:spPr>
-        <p:txBody>
-          <a:bodyPr wrap="square" lIns="45720" rIns="45720" tIns="18288" bIns="18288" anchor="t">
-            <a:spAutoFit/>
-          </a:bodyPr>
-          <a:lstStyle/>
-          <a:p>
-            <a:pPr algn="l"/>
-            <a:r>
-              <a:rPr sz="2280" b="1" i="0">
-                <a:solidFill>
-                  <a:srgbClr val="1A1A1A"/>
-                </a:solidFill>
-                <a:latin typeface="Lexend"/>
-              </a:rPr>
-              <a:t>How long is it on the plan?</a:t>
+              <a:t>A plan is drawn at </a:t>
             </a:r>
           </a:p>
         </p:txBody>
       </p:sp>
       <p:pic>
         <p:nvPicPr>
-          <p:cNvPr id="10" name="Picture 9" descr="e9e378358122466d.png"/>
+          <p:cNvPr id="9" name="Picture 8" descr="9141fd4a1e45fcc5.png"/>
           <p:cNvPicPr>
             <a:picLocks noChangeAspect="1"/>
           </p:cNvPicPr>
@@ -9619,7 +10648,136 @@
         </p:blipFill>
         <p:spPr>
           <a:xfrm>
-            <a:off x="4197095" y="3140168"/>
+            <a:off x="4073291" y="1874519"/>
+            <a:ext cx="1188720" cy="539496"/>
+          </a:xfrm>
+          <a:prstGeom prst="rect">
+            <a:avLst/>
+          </a:prstGeom>
+        </p:spPr>
+      </p:pic>
+      <p:sp>
+        <p:nvSpPr>
+          <p:cNvPr id="10" name="TextBox 9"/>
+          <p:cNvSpPr txBox="1"/>
+          <p:nvPr/>
+        </p:nvSpPr>
+        <p:spPr>
+          <a:xfrm>
+            <a:off x="5262011" y="1915667"/>
+            <a:ext cx="280301" cy="457200"/>
+          </a:xfrm>
+          <a:prstGeom prst="rect">
+            <a:avLst/>
+          </a:prstGeom>
+          <a:noFill/>
+        </p:spPr>
+        <p:txBody>
+          <a:bodyPr wrap="none" lIns="45720" rIns="45720" tIns="18288" bIns="18288" anchor="ctr">
+            <a:noAutofit/>
+          </a:bodyPr>
+          <a:lstStyle/>
+          <a:p>
+            <a:pPr algn="l"/>
+            <a:r>
+              <a:rPr sz="2280" b="0" i="0">
+                <a:solidFill>
+                  <a:srgbClr val="1A1A1A"/>
+                </a:solidFill>
+                <a:latin typeface="Lexend"/>
+              </a:rPr>
+              <a:t>.</a:t>
+            </a:r>
+          </a:p>
+        </p:txBody>
+      </p:sp>
+      <p:sp>
+        <p:nvSpPr>
+          <p:cNvPr id="11" name="TextBox 10"/>
+          <p:cNvSpPr txBox="1"/>
+          <p:nvPr/>
+        </p:nvSpPr>
+        <p:spPr>
+          <a:xfrm>
+            <a:off x="1234440" y="2615184"/>
+            <a:ext cx="10058400" cy="429370"/>
+          </a:xfrm>
+          <a:prstGeom prst="rect">
+            <a:avLst/>
+          </a:prstGeom>
+          <a:noFill/>
+        </p:spPr>
+        <p:txBody>
+          <a:bodyPr wrap="square" lIns="45720" rIns="45720" tIns="18288" bIns="18288" anchor="t">
+            <a:spAutoFit/>
+          </a:bodyPr>
+          <a:lstStyle/>
+          <a:p>
+            <a:pPr algn="l"/>
+            <a:r>
+              <a:rPr sz="2280" b="0" i="0">
+                <a:solidFill>
+                  <a:srgbClr val="1A1A1A"/>
+                </a:solidFill>
+                <a:latin typeface="Lexend"/>
+              </a:rPr>
+              <a:t>A real wall is 15 ft long.</a:t>
+            </a:r>
+          </a:p>
+        </p:txBody>
+      </p:sp>
+      <p:sp>
+        <p:nvSpPr>
+          <p:cNvPr id="12" name="TextBox 11"/>
+          <p:cNvSpPr txBox="1"/>
+          <p:nvPr/>
+        </p:nvSpPr>
+        <p:spPr>
+          <a:xfrm>
+            <a:off x="1234440" y="3154282"/>
+            <a:ext cx="10058400" cy="429370"/>
+          </a:xfrm>
+          <a:prstGeom prst="rect">
+            <a:avLst/>
+          </a:prstGeom>
+          <a:noFill/>
+        </p:spPr>
+        <p:txBody>
+          <a:bodyPr wrap="square" lIns="45720" rIns="45720" tIns="18288" bIns="18288" anchor="t">
+            <a:spAutoFit/>
+          </a:bodyPr>
+          <a:lstStyle/>
+          <a:p>
+            <a:pPr algn="l"/>
+            <a:r>
+              <a:rPr sz="2280" b="1" i="0">
+                <a:solidFill>
+                  <a:srgbClr val="1A1A1A"/>
+                </a:solidFill>
+                <a:latin typeface="Lexend"/>
+              </a:rPr>
+              <a:t>How long is it on the plan?</a:t>
+            </a:r>
+          </a:p>
+        </p:txBody>
+      </p:sp>
+      <p:pic>
+        <p:nvPicPr>
+          <p:cNvPr id="13" name="Picture 12" descr="e9e378358122466d.png"/>
+          <p:cNvPicPr>
+            <a:picLocks noChangeAspect="1"/>
+          </p:cNvPicPr>
+          <p:nvPr/>
+        </p:nvPicPr>
+        <p:blipFill>
+          <a:blip r:embed="rId3"/>
+          <a:stretch>
+            <a:fillRect/>
+          </a:stretch>
+        </p:blipFill>
+        <p:spPr>
+          <a:xfrm>
+            <a:off x="4197095" y="3887881"/>
             <a:ext cx="3877056" cy="274320"/>
           </a:xfrm>
           <a:prstGeom prst="rect">
@@ -9629,7 +10787,7 @@
       </p:pic>
       <p:sp>
         <p:nvSpPr>
-          <p:cNvPr id="11" name="TextBox 10"/>
+          <p:cNvPr id="14" name="TextBox 13"/>
           <p:cNvSpPr txBox="1"/>
           <p:nvPr/>
         </p:nvSpPr>
@@ -9898,17 +11056,17 @@
         </p:nvSpPr>
         <p:spPr>
           <a:xfrm>
-            <a:off x="1234440" y="1874519"/>
-            <a:ext cx="10058400" cy="429370"/>
-          </a:xfrm>
-          <a:prstGeom prst="rect">
-            <a:avLst/>
-          </a:prstGeom>
-          <a:noFill/>
-        </p:spPr>
-        <p:txBody>
-          <a:bodyPr wrap="square" lIns="45720" rIns="45720" tIns="18288" bIns="18288" anchor="t">
-            <a:spAutoFit/>
+            <a:off x="1234440" y="1851660"/>
+            <a:ext cx="2976011" cy="457200"/>
+          </a:xfrm>
+          <a:prstGeom prst="rect">
+            <a:avLst/>
+          </a:prstGeom>
+          <a:noFill/>
+        </p:spPr>
+        <p:txBody>
+          <a:bodyPr wrap="none" lIns="45720" rIns="45720" tIns="18288" bIns="18288" anchor="ctr">
+            <a:noAutofit/>
           </a:bodyPr>
           <a:lstStyle/>
           <a:p>
@@ -9920,84 +11078,14 @@
                 </a:solidFill>
                 <a:latin typeface="Lexend"/>
               </a:rPr>
-              <a:t>A plan is drawn at 1 in : 4 ft. A room is 2 in by 3 in on it.</a:t>
-            </a:r>
-          </a:p>
-        </p:txBody>
-      </p:sp>
-      <p:sp>
-        <p:nvSpPr>
-          <p:cNvPr id="9" name="TextBox 8"/>
-          <p:cNvSpPr txBox="1"/>
-          <p:nvPr/>
-        </p:nvSpPr>
-        <p:spPr>
-          <a:xfrm>
-            <a:off x="1234440" y="2413618"/>
-            <a:ext cx="10058400" cy="429370"/>
-          </a:xfrm>
-          <a:prstGeom prst="rect">
-            <a:avLst/>
-          </a:prstGeom>
-          <a:noFill/>
-        </p:spPr>
-        <p:txBody>
-          <a:bodyPr wrap="square" lIns="45720" rIns="45720" tIns="18288" bIns="18288" anchor="t">
-            <a:spAutoFit/>
-          </a:bodyPr>
-          <a:lstStyle/>
-          <a:p>
-            <a:pPr algn="l"/>
-            <a:r>
-              <a:rPr sz="2280" b="1" i="0">
-                <a:solidFill>
-                  <a:srgbClr val="1A1A1A"/>
-                </a:solidFill>
-                <a:latin typeface="Lexend"/>
-              </a:rPr>
-              <a:t>What is the room's real area?</a:t>
-            </a:r>
-          </a:p>
-        </p:txBody>
-      </p:sp>
-      <p:sp>
-        <p:nvSpPr>
-          <p:cNvPr id="10" name="TextBox 9"/>
-          <p:cNvSpPr txBox="1"/>
-          <p:nvPr/>
-        </p:nvSpPr>
-        <p:spPr>
-          <a:xfrm>
-            <a:off x="1691640" y="3144740"/>
-            <a:ext cx="594360" cy="457200"/>
-          </a:xfrm>
-          <a:prstGeom prst="rect">
-            <a:avLst/>
-          </a:prstGeom>
-          <a:noFill/>
-        </p:spPr>
-        <p:txBody>
-          <a:bodyPr wrap="square" lIns="45720" rIns="45720" tIns="18288" bIns="18288" anchor="t">
-            <a:spAutoFit/>
-          </a:bodyPr>
-          <a:lstStyle/>
-          <a:p>
-            <a:pPr algn="l"/>
-            <a:r>
-              <a:rPr sz="2280" b="1" i="0">
-                <a:solidFill>
-                  <a:srgbClr val="1A1A1A"/>
-                </a:solidFill>
-                <a:latin typeface="Lexend"/>
-              </a:rPr>
-              <a:t>A.</a:t>
+              <a:t>A plan is drawn at </a:t>
             </a:r>
           </a:p>
         </p:txBody>
       </p:sp>
       <p:pic>
         <p:nvPicPr>
-          <p:cNvPr id="11" name="Picture 10" descr="cec3ecd6d985b83c.png"/>
+          <p:cNvPr id="9" name="Picture 8" descr="69da27b14c874025.png"/>
           <p:cNvPicPr>
             <a:picLocks noChangeAspect="1"/>
           </p:cNvPicPr>
@@ -10011,8 +11099,8 @@
         </p:blipFill>
         <p:spPr>
           <a:xfrm>
-            <a:off x="2258568" y="3124928"/>
-            <a:ext cx="981455" cy="341376"/>
+            <a:off x="4073291" y="1956815"/>
+            <a:ext cx="1121664" cy="243840"/>
           </a:xfrm>
           <a:prstGeom prst="rect">
             <a:avLst/>
@@ -10021,13 +11109,118 @@
       </p:pic>
       <p:sp>
         <p:nvSpPr>
+          <p:cNvPr id="10" name="TextBox 9"/>
+          <p:cNvSpPr txBox="1"/>
+          <p:nvPr/>
+        </p:nvSpPr>
+        <p:spPr>
+          <a:xfrm>
+            <a:off x="5194955" y="1851660"/>
+            <a:ext cx="280301" cy="457200"/>
+          </a:xfrm>
+          <a:prstGeom prst="rect">
+            <a:avLst/>
+          </a:prstGeom>
+          <a:noFill/>
+        </p:spPr>
+        <p:txBody>
+          <a:bodyPr wrap="none" lIns="45720" rIns="45720" tIns="18288" bIns="18288" anchor="ctr">
+            <a:noAutofit/>
+          </a:bodyPr>
+          <a:lstStyle/>
+          <a:p>
+            <a:pPr algn="l"/>
+            <a:r>
+              <a:rPr sz="2280" b="0" i="0">
+                <a:solidFill>
+                  <a:srgbClr val="1A1A1A"/>
+                </a:solidFill>
+                <a:latin typeface="Lexend"/>
+              </a:rPr>
+              <a:t>.</a:t>
+            </a:r>
+          </a:p>
+        </p:txBody>
+      </p:sp>
+      <p:sp>
+        <p:nvSpPr>
+          <p:cNvPr id="11" name="TextBox 10"/>
+          <p:cNvSpPr txBox="1"/>
+          <p:nvPr/>
+        </p:nvSpPr>
+        <p:spPr>
+          <a:xfrm>
+            <a:off x="1234440" y="2487168"/>
+            <a:ext cx="10058400" cy="429370"/>
+          </a:xfrm>
+          <a:prstGeom prst="rect">
+            <a:avLst/>
+          </a:prstGeom>
+          <a:noFill/>
+        </p:spPr>
+        <p:txBody>
+          <a:bodyPr wrap="square" lIns="45720" rIns="45720" tIns="18288" bIns="18288" anchor="t">
+            <a:spAutoFit/>
+          </a:bodyPr>
+          <a:lstStyle/>
+          <a:p>
+            <a:pPr algn="l"/>
+            <a:r>
+              <a:rPr sz="2280" b="0" i="0">
+                <a:solidFill>
+                  <a:srgbClr val="1A1A1A"/>
+                </a:solidFill>
+                <a:latin typeface="Lexend"/>
+              </a:rPr>
+              <a:t>A room is 2 in by 3 in on it.</a:t>
+            </a:r>
+          </a:p>
+        </p:txBody>
+      </p:sp>
+      <p:sp>
+        <p:nvSpPr>
           <p:cNvPr id="12" name="TextBox 11"/>
           <p:cNvSpPr txBox="1"/>
           <p:nvPr/>
         </p:nvSpPr>
         <p:spPr>
           <a:xfrm>
-            <a:off x="6537959" y="3144740"/>
+            <a:off x="1234440" y="3026266"/>
+            <a:ext cx="10058400" cy="429370"/>
+          </a:xfrm>
+          <a:prstGeom prst="rect">
+            <a:avLst/>
+          </a:prstGeom>
+          <a:noFill/>
+        </p:spPr>
+        <p:txBody>
+          <a:bodyPr wrap="square" lIns="45720" rIns="45720" tIns="18288" bIns="18288" anchor="t">
+            <a:spAutoFit/>
+          </a:bodyPr>
+          <a:lstStyle/>
+          <a:p>
+            <a:pPr algn="l"/>
+            <a:r>
+              <a:rPr sz="2280" b="1" i="0">
+                <a:solidFill>
+                  <a:srgbClr val="1A1A1A"/>
+                </a:solidFill>
+                <a:latin typeface="Lexend"/>
+              </a:rPr>
+              <a:t>What is the room's real area?</a:t>
+            </a:r>
+          </a:p>
+        </p:txBody>
+      </p:sp>
+      <p:sp>
+        <p:nvSpPr>
+          <p:cNvPr id="13" name="TextBox 12"/>
+          <p:cNvSpPr txBox="1"/>
+          <p:nvPr/>
+        </p:nvSpPr>
+        <p:spPr>
+          <a:xfrm>
+            <a:off x="1691640" y="3757388"/>
             <a:ext cx="594360" cy="457200"/>
           </a:xfrm>
           <a:prstGeom prst="rect">
@@ -10049,14 +11242,14 @@
                 </a:solidFill>
                 <a:latin typeface="Lexend"/>
               </a:rPr>
-              <a:t>B.</a:t>
+              <a:t>A.</a:t>
             </a:r>
           </a:p>
         </p:txBody>
       </p:sp>
       <p:pic>
         <p:nvPicPr>
-          <p:cNvPr id="13" name="Picture 12" descr="48cdba4a3e3447a3.png"/>
+          <p:cNvPr id="14" name="Picture 13" descr="cec3ecd6d985b83c.png"/>
           <p:cNvPicPr>
             <a:picLocks noChangeAspect="1"/>
           </p:cNvPicPr>
@@ -10070,8 +11263,8 @@
         </p:blipFill>
         <p:spPr>
           <a:xfrm>
-            <a:off x="7104888" y="3124928"/>
-            <a:ext cx="969264" cy="341376"/>
+            <a:off x="2258568" y="3702524"/>
+            <a:ext cx="981455" cy="341376"/>
           </a:xfrm>
           <a:prstGeom prst="rect">
             <a:avLst/>
@@ -10080,13 +11273,13 @@
       </p:pic>
       <p:sp>
         <p:nvSpPr>
-          <p:cNvPr id="14" name="TextBox 13"/>
-          <p:cNvSpPr txBox="1"/>
-          <p:nvPr/>
-        </p:nvSpPr>
-        <p:spPr>
-          <a:xfrm>
-            <a:off x="1691640" y="3757388"/>
+          <p:cNvPr id="15" name="TextBox 14"/>
+          <p:cNvSpPr txBox="1"/>
+          <p:nvPr/>
+        </p:nvSpPr>
+        <p:spPr>
+          <a:xfrm>
+            <a:off x="6537959" y="3757388"/>
             <a:ext cx="594360" cy="457200"/>
           </a:xfrm>
           <a:prstGeom prst="rect">
@@ -10108,14 +11301,14 @@
                 </a:solidFill>
                 <a:latin typeface="Lexend"/>
               </a:rPr>
-              <a:t>C.</a:t>
+              <a:t>B.</a:t>
             </a:r>
           </a:p>
         </p:txBody>
       </p:sp>
       <p:pic>
         <p:nvPicPr>
-          <p:cNvPr id="15" name="Picture 14" descr="096426823913f684.png"/>
+          <p:cNvPr id="16" name="Picture 15" descr="48cdba4a3e3447a3.png"/>
           <p:cNvPicPr>
             <a:picLocks noChangeAspect="1"/>
           </p:cNvPicPr>
@@ -10129,8 +11322,8 @@
         </p:blipFill>
         <p:spPr>
           <a:xfrm>
-            <a:off x="2258568" y="3737576"/>
-            <a:ext cx="1014984" cy="341376"/>
+            <a:off x="7104888" y="3702524"/>
+            <a:ext cx="969264" cy="341376"/>
           </a:xfrm>
           <a:prstGeom prst="rect">
             <a:avLst/>
@@ -10139,13 +11332,13 @@
       </p:pic>
       <p:sp>
         <p:nvSpPr>
-          <p:cNvPr id="16" name="TextBox 15"/>
-          <p:cNvSpPr txBox="1"/>
-          <p:nvPr/>
-        </p:nvSpPr>
-        <p:spPr>
-          <a:xfrm>
-            <a:off x="6537959" y="3757388"/>
+          <p:cNvPr id="17" name="TextBox 16"/>
+          <p:cNvSpPr txBox="1"/>
+          <p:nvPr/>
+        </p:nvSpPr>
+        <p:spPr>
+          <a:xfrm>
+            <a:off x="1691640" y="4370036"/>
             <a:ext cx="594360" cy="457200"/>
           </a:xfrm>
           <a:prstGeom prst="rect">
@@ -10167,14 +11360,14 @@
                 </a:solidFill>
                 <a:latin typeface="Lexend"/>
               </a:rPr>
-              <a:t>D.</a:t>
+              <a:t>C.</a:t>
             </a:r>
           </a:p>
         </p:txBody>
       </p:sp>
       <p:pic>
         <p:nvPicPr>
-          <p:cNvPr id="17" name="Picture 16" descr="ac80d7fa9b4da392.png"/>
+          <p:cNvPr id="18" name="Picture 17" descr="096426823913f684.png"/>
           <p:cNvPicPr>
             <a:picLocks noChangeAspect="1"/>
           </p:cNvPicPr>
@@ -10188,7 +11381,66 @@
         </p:blipFill>
         <p:spPr>
           <a:xfrm>
-            <a:off x="7104888" y="3737576"/>
+            <a:off x="2258568" y="4315172"/>
+            <a:ext cx="1014984" cy="341376"/>
+          </a:xfrm>
+          <a:prstGeom prst="rect">
+            <a:avLst/>
+          </a:prstGeom>
+        </p:spPr>
+      </p:pic>
+      <p:sp>
+        <p:nvSpPr>
+          <p:cNvPr id="19" name="TextBox 18"/>
+          <p:cNvSpPr txBox="1"/>
+          <p:nvPr/>
+        </p:nvSpPr>
+        <p:spPr>
+          <a:xfrm>
+            <a:off x="6537959" y="4370036"/>
+            <a:ext cx="594360" cy="457200"/>
+          </a:xfrm>
+          <a:prstGeom prst="rect">
+            <a:avLst/>
+          </a:prstGeom>
+          <a:noFill/>
+        </p:spPr>
+        <p:txBody>
+          <a:bodyPr wrap="square" lIns="45720" rIns="45720" tIns="18288" bIns="18288" anchor="t">
+            <a:spAutoFit/>
+          </a:bodyPr>
+          <a:lstStyle/>
+          <a:p>
+            <a:pPr algn="l"/>
+            <a:r>
+              <a:rPr sz="2280" b="1" i="0">
+                <a:solidFill>
+                  <a:srgbClr val="1A1A1A"/>
+                </a:solidFill>
+                <a:latin typeface="Lexend"/>
+              </a:rPr>
+              <a:t>D.</a:t>
+            </a:r>
+          </a:p>
+        </p:txBody>
+      </p:sp>
+      <p:pic>
+        <p:nvPicPr>
+          <p:cNvPr id="20" name="Picture 19" descr="ac80d7fa9b4da392.png"/>
+          <p:cNvPicPr>
+            <a:picLocks noChangeAspect="1"/>
+          </p:cNvPicPr>
+          <p:nvPr/>
+        </p:nvPicPr>
+        <p:blipFill>
+          <a:blip r:embed="rId6"/>
+          <a:stretch>
+            <a:fillRect/>
+          </a:stretch>
+        </p:blipFill>
+        <p:spPr>
+          <a:xfrm>
+            <a:off x="7104888" y="4315172"/>
             <a:ext cx="978408" cy="341376"/>
           </a:xfrm>
           <a:prstGeom prst="rect">
@@ -10198,13 +11450,13 @@
       </p:pic>
       <p:sp>
         <p:nvSpPr>
-          <p:cNvPr id="18" name="TextBox 17"/>
-          <p:cNvSpPr txBox="1"/>
-          <p:nvPr/>
-        </p:nvSpPr>
-        <p:spPr>
-          <a:xfrm>
-            <a:off x="777240" y="4434044"/>
+          <p:cNvPr id="21" name="TextBox 20"/>
+          <p:cNvSpPr txBox="1"/>
+          <p:nvPr/>
+        </p:nvSpPr>
+        <p:spPr>
+          <a:xfrm>
+            <a:off x="777240" y="5046692"/>
             <a:ext cx="10607040" cy="457200"/>
           </a:xfrm>
           <a:prstGeom prst="rect">
@@ -10467,17 +11719,17 @@
         </p:nvSpPr>
         <p:spPr>
           <a:xfrm>
-            <a:off x="1234440" y="1874519"/>
-            <a:ext cx="10058400" cy="429370"/>
-          </a:xfrm>
-          <a:prstGeom prst="rect">
-            <a:avLst/>
-          </a:prstGeom>
-          <a:noFill/>
-        </p:spPr>
-        <p:txBody>
-          <a:bodyPr wrap="square" lIns="45720" rIns="45720" tIns="18288" bIns="18288" anchor="t">
-            <a:spAutoFit/>
+            <a:off x="1234440" y="1851660"/>
+            <a:ext cx="2976011" cy="457200"/>
+          </a:xfrm>
+          <a:prstGeom prst="rect">
+            <a:avLst/>
+          </a:prstGeom>
+          <a:noFill/>
+        </p:spPr>
+        <p:txBody>
+          <a:bodyPr wrap="none" lIns="45720" rIns="45720" tIns="18288" bIns="18288" anchor="ctr">
+            <a:noAutofit/>
           </a:bodyPr>
           <a:lstStyle/>
           <a:p>
@@ -10489,49 +11741,14 @@
                 </a:solidFill>
                 <a:latin typeface="Lexend"/>
               </a:rPr>
-              <a:t>A plan is drawn at 1 in : 4 ft. A room is 2 in by 3 in on it.</a:t>
-            </a:r>
-          </a:p>
-        </p:txBody>
-      </p:sp>
-      <p:sp>
-        <p:nvSpPr>
-          <p:cNvPr id="9" name="TextBox 8"/>
-          <p:cNvSpPr txBox="1"/>
-          <p:nvPr/>
-        </p:nvSpPr>
-        <p:spPr>
-          <a:xfrm>
-            <a:off x="1234440" y="2413618"/>
-            <a:ext cx="10058400" cy="429370"/>
-          </a:xfrm>
-          <a:prstGeom prst="rect">
-            <a:avLst/>
-          </a:prstGeom>
-          <a:noFill/>
-        </p:spPr>
-        <p:txBody>
-          <a:bodyPr wrap="square" lIns="45720" rIns="45720" tIns="18288" bIns="18288" anchor="t">
-            <a:spAutoFit/>
-          </a:bodyPr>
-          <a:lstStyle/>
-          <a:p>
-            <a:pPr algn="l"/>
-            <a:r>
-              <a:rPr sz="2280" b="1" i="0">
-                <a:solidFill>
-                  <a:srgbClr val="1A1A1A"/>
-                </a:solidFill>
-                <a:latin typeface="Lexend"/>
-              </a:rPr>
-              <a:t>What is the room's real area?</a:t>
+              <a:t>A plan is drawn at </a:t>
             </a:r>
           </a:p>
         </p:txBody>
       </p:sp>
       <p:pic>
         <p:nvPicPr>
-          <p:cNvPr id="10" name="Picture 9" descr="a2754109ea50ef14.png"/>
+          <p:cNvPr id="9" name="Picture 8" descr="0108e640f9a5d2fa.png"/>
           <p:cNvPicPr>
             <a:picLocks noChangeAspect="1"/>
           </p:cNvPicPr>
@@ -10545,17 +11762,122 @@
         </p:blipFill>
         <p:spPr>
           <a:xfrm>
-            <a:off x="4511039" y="3150836"/>
-            <a:ext cx="3249168" cy="252984"/>
+            <a:off x="4073291" y="1956815"/>
+            <a:ext cx="1121664" cy="243840"/>
           </a:xfrm>
           <a:prstGeom prst="rect">
             <a:avLst/>
           </a:prstGeom>
         </p:spPr>
       </p:pic>
+      <p:sp>
+        <p:nvSpPr>
+          <p:cNvPr id="10" name="TextBox 9"/>
+          <p:cNvSpPr txBox="1"/>
+          <p:nvPr/>
+        </p:nvSpPr>
+        <p:spPr>
+          <a:xfrm>
+            <a:off x="5194955" y="1851660"/>
+            <a:ext cx="280301" cy="457200"/>
+          </a:xfrm>
+          <a:prstGeom prst="rect">
+            <a:avLst/>
+          </a:prstGeom>
+          <a:noFill/>
+        </p:spPr>
+        <p:txBody>
+          <a:bodyPr wrap="none" lIns="45720" rIns="45720" tIns="18288" bIns="18288" anchor="ctr">
+            <a:noAutofit/>
+          </a:bodyPr>
+          <a:lstStyle/>
+          <a:p>
+            <a:pPr algn="l"/>
+            <a:r>
+              <a:rPr sz="2280" b="0" i="0">
+                <a:solidFill>
+                  <a:srgbClr val="1A1A1A"/>
+                </a:solidFill>
+                <a:latin typeface="Lexend"/>
+              </a:rPr>
+              <a:t>.</a:t>
+            </a:r>
+          </a:p>
+        </p:txBody>
+      </p:sp>
+      <p:sp>
+        <p:nvSpPr>
+          <p:cNvPr id="11" name="TextBox 10"/>
+          <p:cNvSpPr txBox="1"/>
+          <p:nvPr/>
+        </p:nvSpPr>
+        <p:spPr>
+          <a:xfrm>
+            <a:off x="1234440" y="2487168"/>
+            <a:ext cx="10058400" cy="429370"/>
+          </a:xfrm>
+          <a:prstGeom prst="rect">
+            <a:avLst/>
+          </a:prstGeom>
+          <a:noFill/>
+        </p:spPr>
+        <p:txBody>
+          <a:bodyPr wrap="square" lIns="45720" rIns="45720" tIns="18288" bIns="18288" anchor="t">
+            <a:spAutoFit/>
+          </a:bodyPr>
+          <a:lstStyle/>
+          <a:p>
+            <a:pPr algn="l"/>
+            <a:r>
+              <a:rPr sz="2280" b="0" i="0">
+                <a:solidFill>
+                  <a:srgbClr val="1A1A1A"/>
+                </a:solidFill>
+                <a:latin typeface="Lexend"/>
+              </a:rPr>
+              <a:t>A room is 2 in by 3 in on it.</a:t>
+            </a:r>
+          </a:p>
+        </p:txBody>
+      </p:sp>
+      <p:sp>
+        <p:nvSpPr>
+          <p:cNvPr id="12" name="TextBox 11"/>
+          <p:cNvSpPr txBox="1"/>
+          <p:nvPr/>
+        </p:nvSpPr>
+        <p:spPr>
+          <a:xfrm>
+            <a:off x="1234440" y="3026266"/>
+            <a:ext cx="10058400" cy="429370"/>
+          </a:xfrm>
+          <a:prstGeom prst="rect">
+            <a:avLst/>
+          </a:prstGeom>
+          <a:noFill/>
+        </p:spPr>
+        <p:txBody>
+          <a:bodyPr wrap="square" lIns="45720" rIns="45720" tIns="18288" bIns="18288" anchor="t">
+            <a:spAutoFit/>
+          </a:bodyPr>
+          <a:lstStyle/>
+          <a:p>
+            <a:pPr algn="l"/>
+            <a:r>
+              <a:rPr sz="2280" b="1" i="0">
+                <a:solidFill>
+                  <a:srgbClr val="1A1A1A"/>
+                </a:solidFill>
+                <a:latin typeface="Lexend"/>
+              </a:rPr>
+              <a:t>What is the room's real area?</a:t>
+            </a:r>
+          </a:p>
+        </p:txBody>
+      </p:sp>
       <p:pic>
         <p:nvPicPr>
-          <p:cNvPr id="11" name="Picture 10" descr="cb9cc937a98fdc8b.png"/>
+          <p:cNvPr id="13" name="Picture 12" descr="a2754109ea50ef14.png"/>
           <p:cNvPicPr>
             <a:picLocks noChangeAspect="1"/>
           </p:cNvPicPr>
@@ -10569,7 +11891,31 @@
         </p:blipFill>
         <p:spPr>
           <a:xfrm>
-            <a:off x="4511039" y="3690332"/>
+            <a:off x="4511039" y="3781201"/>
+            <a:ext cx="3249168" cy="252984"/>
+          </a:xfrm>
+          <a:prstGeom prst="rect">
+            <a:avLst/>
+          </a:prstGeom>
+        </p:spPr>
+      </p:pic>
+      <p:pic>
+        <p:nvPicPr>
+          <p:cNvPr id="14" name="Picture 13" descr="cb9cc937a98fdc8b.png"/>
+          <p:cNvPicPr>
+            <a:picLocks noChangeAspect="1"/>
+          </p:cNvPicPr>
+          <p:nvPr/>
+        </p:nvPicPr>
+        <p:blipFill>
+          <a:blip r:embed="rId4"/>
+          <a:stretch>
+            <a:fillRect/>
+          </a:stretch>
+        </p:blipFill>
+        <p:spPr>
+          <a:xfrm>
+            <a:off x="4511039" y="4317649"/>
             <a:ext cx="1554480" cy="252984"/>
           </a:xfrm>
           <a:prstGeom prst="rect">
@@ -10579,13 +11925,13 @@
       </p:pic>
       <p:sp>
         <p:nvSpPr>
-          <p:cNvPr id="12" name="TextBox 11"/>
-          <p:cNvSpPr txBox="1"/>
-          <p:nvPr/>
-        </p:nvSpPr>
-        <p:spPr>
-          <a:xfrm>
-            <a:off x="777240" y="4663440"/>
+          <p:cNvPr id="15" name="TextBox 14"/>
+          <p:cNvSpPr txBox="1"/>
+          <p:nvPr/>
+        </p:nvSpPr>
+        <p:spPr>
+          <a:xfrm>
+            <a:off x="777240" y="4772372"/>
             <a:ext cx="10607040" cy="548640"/>
           </a:xfrm>
           <a:prstGeom prst="rect">
@@ -10858,7 +12204,7 @@
         <p:spPr>
           <a:xfrm>
             <a:off x="1234440" y="1874519"/>
-            <a:ext cx="10058400" cy="858740"/>
+            <a:ext cx="10058400" cy="429370"/>
           </a:xfrm>
           <a:prstGeom prst="rect">
             <a:avLst/>
@@ -10879,7 +12225,7 @@
                 </a:solidFill>
                 <a:latin typeface="Lexend"/>
               </a:rPr>
-              <a:t>A plane is 36 ft long. One model of it is built at 1 : 48, another at 1 : 72.</a:t>
+              <a:t>A plane is 36 ft long.</a:t>
             </a:r>
           </a:p>
         </p:txBody>
@@ -10892,7 +12238,160 @@
         </p:nvSpPr>
         <p:spPr>
           <a:xfrm>
-            <a:off x="1234440" y="2842988"/>
+            <a:off x="1234440" y="2390758"/>
+            <a:ext cx="4046582" cy="457200"/>
+          </a:xfrm>
+          <a:prstGeom prst="rect">
+            <a:avLst/>
+          </a:prstGeom>
+          <a:noFill/>
+        </p:spPr>
+        <p:txBody>
+          <a:bodyPr wrap="none" lIns="45720" rIns="45720" tIns="18288" bIns="18288" anchor="ctr">
+            <a:noAutofit/>
+          </a:bodyPr>
+          <a:lstStyle/>
+          <a:p>
+            <a:pPr algn="l"/>
+            <a:r>
+              <a:rPr sz="2280" b="0" i="0">
+                <a:solidFill>
+                  <a:srgbClr val="1A1A1A"/>
+                </a:solidFill>
+                <a:latin typeface="Lexend"/>
+              </a:rPr>
+              <a:t>One model of it is built at </a:t>
+            </a:r>
+          </a:p>
+        </p:txBody>
+      </p:sp>
+      <p:pic>
+        <p:nvPicPr>
+          <p:cNvPr id="10" name="Picture 9" descr="556f5c83e30f33be.png"/>
+          <p:cNvPicPr>
+            <a:picLocks noChangeAspect="1"/>
+          </p:cNvPicPr>
+          <p:nvPr/>
+        </p:nvPicPr>
+        <p:blipFill>
+          <a:blip r:embed="rId2"/>
+          <a:stretch>
+            <a:fillRect/>
+          </a:stretch>
+        </p:blipFill>
+        <p:spPr>
+          <a:xfrm>
+            <a:off x="5143862" y="2514202"/>
+            <a:ext cx="679704" cy="225552"/>
+          </a:xfrm>
+          <a:prstGeom prst="rect">
+            <a:avLst/>
+          </a:prstGeom>
+        </p:spPr>
+      </p:pic>
+      <p:sp>
+        <p:nvSpPr>
+          <p:cNvPr id="11" name="TextBox 10"/>
+          <p:cNvSpPr txBox="1"/>
+          <p:nvPr/>
+        </p:nvSpPr>
+        <p:spPr>
+          <a:xfrm>
+            <a:off x="5823566" y="2390758"/>
+            <a:ext cx="2031880" cy="457200"/>
+          </a:xfrm>
+          <a:prstGeom prst="rect">
+            <a:avLst/>
+          </a:prstGeom>
+          <a:noFill/>
+        </p:spPr>
+        <p:txBody>
+          <a:bodyPr wrap="none" lIns="45720" rIns="45720" tIns="18288" bIns="18288" anchor="ctr">
+            <a:noAutofit/>
+          </a:bodyPr>
+          <a:lstStyle/>
+          <a:p>
+            <a:pPr algn="l"/>
+            <a:r>
+              <a:rPr sz="2280" b="0" i="0">
+                <a:solidFill>
+                  <a:srgbClr val="1A1A1A"/>
+                </a:solidFill>
+                <a:latin typeface="Lexend"/>
+              </a:rPr>
+              <a:t>, another at </a:t>
+            </a:r>
+          </a:p>
+        </p:txBody>
+      </p:sp>
+      <p:pic>
+        <p:nvPicPr>
+          <p:cNvPr id="12" name="Picture 11" descr="3e9707db2572cbc9.png"/>
+          <p:cNvPicPr>
+            <a:picLocks noChangeAspect="1"/>
+          </p:cNvPicPr>
+          <p:nvPr/>
+        </p:nvPicPr>
+        <p:blipFill>
+          <a:blip r:embed="rId3"/>
+          <a:stretch>
+            <a:fillRect/>
+          </a:stretch>
+        </p:blipFill>
+        <p:spPr>
+          <a:xfrm>
+            <a:off x="7718287" y="2514202"/>
+            <a:ext cx="652272" cy="225552"/>
+          </a:xfrm>
+          <a:prstGeom prst="rect">
+            <a:avLst/>
+          </a:prstGeom>
+        </p:spPr>
+      </p:pic>
+      <p:sp>
+        <p:nvSpPr>
+          <p:cNvPr id="13" name="TextBox 12"/>
+          <p:cNvSpPr txBox="1"/>
+          <p:nvPr/>
+        </p:nvSpPr>
+        <p:spPr>
+          <a:xfrm>
+            <a:off x="8370559" y="2390758"/>
+            <a:ext cx="280301" cy="457200"/>
+          </a:xfrm>
+          <a:prstGeom prst="rect">
+            <a:avLst/>
+          </a:prstGeom>
+          <a:noFill/>
+        </p:spPr>
+        <p:txBody>
+          <a:bodyPr wrap="none" lIns="45720" rIns="45720" tIns="18288" bIns="18288" anchor="ctr">
+            <a:noAutofit/>
+          </a:bodyPr>
+          <a:lstStyle/>
+          <a:p>
+            <a:pPr algn="l"/>
+            <a:r>
+              <a:rPr sz="2280" b="0" i="0">
+                <a:solidFill>
+                  <a:srgbClr val="1A1A1A"/>
+                </a:solidFill>
+                <a:latin typeface="Lexend"/>
+              </a:rPr>
+              <a:t>.</a:t>
+            </a:r>
+          </a:p>
+        </p:txBody>
+      </p:sp>
+      <p:sp>
+        <p:nvSpPr>
+          <p:cNvPr id="14" name="TextBox 13"/>
+          <p:cNvSpPr txBox="1"/>
+          <p:nvPr/>
+        </p:nvSpPr>
+        <p:spPr>
+          <a:xfrm>
+            <a:off x="1234440" y="3026266"/>
             <a:ext cx="10058400" cy="429370"/>
           </a:xfrm>
           <a:prstGeom prst="rect">
@@ -10921,7 +12420,7 @@
       </p:sp>
       <p:sp>
         <p:nvSpPr>
-          <p:cNvPr id="10" name="TextBox 9"/>
+          <p:cNvPr id="15" name="TextBox 14"/>
           <p:cNvSpPr txBox="1"/>
           <p:nvPr/>
         </p:nvSpPr>
@@ -11191,7 +12690,7 @@
         <p:spPr>
           <a:xfrm>
             <a:off x="1234440" y="1874519"/>
-            <a:ext cx="10058400" cy="858740"/>
+            <a:ext cx="10058400" cy="429370"/>
           </a:xfrm>
           <a:prstGeom prst="rect">
             <a:avLst/>
@@ -11212,7 +12711,7 @@
                 </a:solidFill>
                 <a:latin typeface="Lexend"/>
               </a:rPr>
-              <a:t>A plane is 36 ft long. One model of it is built at 1 : 48, another at 1 : 72.</a:t>
+              <a:t>A plane is 36 ft long.</a:t>
             </a:r>
           </a:p>
         </p:txBody>
@@ -11225,36 +12724,36 @@
         </p:nvSpPr>
         <p:spPr>
           <a:xfrm>
-            <a:off x="1234440" y="2842988"/>
-            <a:ext cx="10058400" cy="429370"/>
-          </a:xfrm>
-          <a:prstGeom prst="rect">
-            <a:avLst/>
-          </a:prstGeom>
-          <a:noFill/>
-        </p:spPr>
-        <p:txBody>
-          <a:bodyPr wrap="square" lIns="45720" rIns="45720" tIns="18288" bIns="18288" anchor="t">
-            <a:spAutoFit/>
-          </a:bodyPr>
-          <a:lstStyle/>
-          <a:p>
-            <a:pPr algn="l"/>
-            <a:r>
-              <a:rPr sz="2280" b="1" i="0">
+            <a:off x="1234440" y="2390758"/>
+            <a:ext cx="4046582" cy="457200"/>
+          </a:xfrm>
+          <a:prstGeom prst="rect">
+            <a:avLst/>
+          </a:prstGeom>
+          <a:noFill/>
+        </p:spPr>
+        <p:txBody>
+          <a:bodyPr wrap="none" lIns="45720" rIns="45720" tIns="18288" bIns="18288" anchor="ctr">
+            <a:noAutofit/>
+          </a:bodyPr>
+          <a:lstStyle/>
+          <a:p>
+            <a:pPr algn="l"/>
+            <a:r>
+              <a:rPr sz="2280" b="0" i="0">
                 <a:solidFill>
                   <a:srgbClr val="1A1A1A"/>
                 </a:solidFill>
                 <a:latin typeface="Lexend"/>
               </a:rPr>
-              <a:t>Which model is longer, and by how much?</a:t>
+              <a:t>One model of it is built at </a:t>
             </a:r>
           </a:p>
         </p:txBody>
       </p:sp>
       <p:pic>
         <p:nvPicPr>
-          <p:cNvPr id="10" name="Picture 9" descr="5542fd061f65cd2d.png"/>
+          <p:cNvPr id="10" name="Picture 9" descr="556f5c83e30f33be.png"/>
           <p:cNvPicPr>
             <a:picLocks noChangeAspect="1"/>
           </p:cNvPicPr>
@@ -11268,8 +12767,8 @@
         </p:blipFill>
         <p:spPr>
           <a:xfrm>
-            <a:off x="3973067" y="3578683"/>
-            <a:ext cx="1953768" cy="256032"/>
+            <a:off x="5143862" y="2514202"/>
+            <a:ext cx="679704" cy="225552"/>
           </a:xfrm>
           <a:prstGeom prst="rect">
             <a:avLst/>
@@ -11284,8 +12783,8 @@
         </p:nvSpPr>
         <p:spPr>
           <a:xfrm>
-            <a:off x="5926835" y="3478099"/>
-            <a:ext cx="637940" cy="457200"/>
+            <a:off x="5823566" y="2390758"/>
+            <a:ext cx="2031880" cy="457200"/>
           </a:xfrm>
           <a:prstGeom prst="rect">
             <a:avLst/>
@@ -11300,20 +12799,20 @@
           <a:p>
             <a:pPr algn="l"/>
             <a:r>
-              <a:rPr sz="2750" b="0" i="0">
+              <a:rPr sz="2280" b="0" i="0">
                 <a:solidFill>
                   <a:srgbClr val="1A1A1A"/>
                 </a:solidFill>
                 <a:latin typeface="Lexend"/>
               </a:rPr>
-              <a:t> in</a:t>
+              <a:t>, another at </a:t>
             </a:r>
           </a:p>
         </p:txBody>
       </p:sp>
       <p:pic>
         <p:nvPicPr>
-          <p:cNvPr id="12" name="Picture 11" descr="5f9988afdad05b27.png"/>
+          <p:cNvPr id="12" name="Picture 11" descr="3e9707db2572cbc9.png"/>
           <p:cNvPicPr>
             <a:picLocks noChangeAspect="1"/>
           </p:cNvPicPr>
@@ -11327,7 +12826,160 @@
         </p:blipFill>
         <p:spPr>
           <a:xfrm>
-            <a:off x="3973067" y="4118179"/>
+            <a:off x="7718287" y="2514202"/>
+            <a:ext cx="652272" cy="225552"/>
+          </a:xfrm>
+          <a:prstGeom prst="rect">
+            <a:avLst/>
+          </a:prstGeom>
+        </p:spPr>
+      </p:pic>
+      <p:sp>
+        <p:nvSpPr>
+          <p:cNvPr id="13" name="TextBox 12"/>
+          <p:cNvSpPr txBox="1"/>
+          <p:nvPr/>
+        </p:nvSpPr>
+        <p:spPr>
+          <a:xfrm>
+            <a:off x="8370559" y="2390758"/>
+            <a:ext cx="280301" cy="457200"/>
+          </a:xfrm>
+          <a:prstGeom prst="rect">
+            <a:avLst/>
+          </a:prstGeom>
+          <a:noFill/>
+        </p:spPr>
+        <p:txBody>
+          <a:bodyPr wrap="none" lIns="45720" rIns="45720" tIns="18288" bIns="18288" anchor="ctr">
+            <a:noAutofit/>
+          </a:bodyPr>
+          <a:lstStyle/>
+          <a:p>
+            <a:pPr algn="l"/>
+            <a:r>
+              <a:rPr sz="2280" b="0" i="0">
+                <a:solidFill>
+                  <a:srgbClr val="1A1A1A"/>
+                </a:solidFill>
+                <a:latin typeface="Lexend"/>
+              </a:rPr>
+              <a:t>.</a:t>
+            </a:r>
+          </a:p>
+        </p:txBody>
+      </p:sp>
+      <p:sp>
+        <p:nvSpPr>
+          <p:cNvPr id="14" name="TextBox 13"/>
+          <p:cNvSpPr txBox="1"/>
+          <p:nvPr/>
+        </p:nvSpPr>
+        <p:spPr>
+          <a:xfrm>
+            <a:off x="1234440" y="3026266"/>
+            <a:ext cx="10058400" cy="429370"/>
+          </a:xfrm>
+          <a:prstGeom prst="rect">
+            <a:avLst/>
+          </a:prstGeom>
+          <a:noFill/>
+        </p:spPr>
+        <p:txBody>
+          <a:bodyPr wrap="square" lIns="45720" rIns="45720" tIns="18288" bIns="18288" anchor="t">
+            <a:spAutoFit/>
+          </a:bodyPr>
+          <a:lstStyle/>
+          <a:p>
+            <a:pPr algn="l"/>
+            <a:r>
+              <a:rPr sz="2280" b="1" i="0">
+                <a:solidFill>
+                  <a:srgbClr val="1A1A1A"/>
+                </a:solidFill>
+                <a:latin typeface="Lexend"/>
+              </a:rPr>
+              <a:t>Which model is longer, and by how much?</a:t>
+            </a:r>
+          </a:p>
+        </p:txBody>
+      </p:sp>
+      <p:pic>
+        <p:nvPicPr>
+          <p:cNvPr id="15" name="Picture 14" descr="5542fd061f65cd2d.png"/>
+          <p:cNvPicPr>
+            <a:picLocks noChangeAspect="1"/>
+          </p:cNvPicPr>
+          <p:nvPr/>
+        </p:nvPicPr>
+        <p:blipFill>
+          <a:blip r:embed="rId4"/>
+          <a:stretch>
+            <a:fillRect/>
+          </a:stretch>
+        </p:blipFill>
+        <p:spPr>
+          <a:xfrm>
+            <a:off x="3973067" y="3778153"/>
+            <a:ext cx="1953768" cy="256032"/>
+          </a:xfrm>
+          <a:prstGeom prst="rect">
+            <a:avLst/>
+          </a:prstGeom>
+        </p:spPr>
+      </p:pic>
+      <p:sp>
+        <p:nvSpPr>
+          <p:cNvPr id="16" name="TextBox 15"/>
+          <p:cNvSpPr txBox="1"/>
+          <p:nvPr/>
+        </p:nvSpPr>
+        <p:spPr>
+          <a:xfrm>
+            <a:off x="5926835" y="3661376"/>
+            <a:ext cx="637940" cy="457200"/>
+          </a:xfrm>
+          <a:prstGeom prst="rect">
+            <a:avLst/>
+          </a:prstGeom>
+          <a:noFill/>
+        </p:spPr>
+        <p:txBody>
+          <a:bodyPr wrap="none" lIns="45720" rIns="45720" tIns="18288" bIns="18288" anchor="ctr">
+            <a:noAutofit/>
+          </a:bodyPr>
+          <a:lstStyle/>
+          <a:p>
+            <a:pPr algn="l"/>
+            <a:r>
+              <a:rPr sz="2750" b="0" i="0">
+                <a:solidFill>
+                  <a:srgbClr val="1A1A1A"/>
+                </a:solidFill>
+                <a:latin typeface="Lexend"/>
+              </a:rPr>
+              <a:t> in</a:t>
+            </a:r>
+          </a:p>
+        </p:txBody>
+      </p:sp>
+      <p:pic>
+        <p:nvPicPr>
+          <p:cNvPr id="17" name="Picture 16" descr="5f9988afdad05b27.png"/>
+          <p:cNvPicPr>
+            <a:picLocks noChangeAspect="1"/>
+          </p:cNvPicPr>
+          <p:nvPr/>
+        </p:nvPicPr>
+        <p:blipFill>
+          <a:blip r:embed="rId5"/>
+          <a:stretch>
+            <a:fillRect/>
+          </a:stretch>
+        </p:blipFill>
+        <p:spPr>
+          <a:xfrm>
+            <a:off x="3973067" y="4317649"/>
             <a:ext cx="4328160" cy="256032"/>
           </a:xfrm>
           <a:prstGeom prst="rect">
@@ -11337,13 +12989,13 @@
       </p:pic>
       <p:sp>
         <p:nvSpPr>
-          <p:cNvPr id="13" name="TextBox 12"/>
-          <p:cNvSpPr txBox="1"/>
-          <p:nvPr/>
-        </p:nvSpPr>
-        <p:spPr>
-          <a:xfrm>
-            <a:off x="777240" y="4663440"/>
+          <p:cNvPr id="18" name="TextBox 17"/>
+          <p:cNvSpPr txBox="1"/>
+          <p:nvPr/>
+        </p:nvSpPr>
+        <p:spPr>
+          <a:xfrm>
+            <a:off x="777240" y="4772372"/>
             <a:ext cx="10607040" cy="1072896"/>
           </a:xfrm>
           <a:prstGeom prst="rect">
@@ -11607,7 +13259,7 @@
         <p:spPr>
           <a:xfrm>
             <a:off x="1874519" y="1440180"/>
-            <a:ext cx="9658761" cy="457200"/>
+            <a:ext cx="3002638" cy="457200"/>
           </a:xfrm>
           <a:prstGeom prst="rect">
             <a:avLst/>
@@ -11628,181 +13280,14 @@
                 </a:solidFill>
                 <a:latin typeface="Lexend"/>
               </a:rPr>
-              <a:t>1.   A figure with area 9 cm</a:t>
-            </a:r>
-            <a:r>
-              <a:rPr sz="2180" b="0" i="0" baseline="30000">
-                <a:solidFill>
-                  <a:srgbClr val="1A1A1A"/>
-                </a:solidFill>
-                <a:latin typeface="Lexend"/>
-              </a:rPr>
-              <a:t>2</a:t>
-            </a:r>
-            <a:r>
-              <a:rPr sz="2180" b="0" i="0">
-                <a:solidFill>
-                  <a:srgbClr val="1A1A1A"/>
-                </a:solidFill>
-                <a:latin typeface="Lexend"/>
-              </a:rPr>
-              <a:t> is scaled by k = 2. Find the copy's area.</a:t>
-            </a:r>
-          </a:p>
-        </p:txBody>
-      </p:sp>
-      <p:sp>
-        <p:nvSpPr>
-          <p:cNvPr id="9" name="TextBox 8"/>
-          <p:cNvSpPr txBox="1"/>
-          <p:nvPr/>
-        </p:nvSpPr>
-        <p:spPr>
-          <a:xfrm>
-            <a:off x="2606040" y="1897380"/>
-            <a:ext cx="1198903" cy="457200"/>
-          </a:xfrm>
-          <a:prstGeom prst="rect">
-            <a:avLst/>
-          </a:prstGeom>
-          <a:noFill/>
-        </p:spPr>
-        <p:txBody>
-          <a:bodyPr wrap="none" lIns="45720" rIns="45720" tIns="18288" bIns="18288" anchor="ctr">
-            <a:noAutofit/>
-          </a:bodyPr>
-          <a:lstStyle/>
-          <a:p>
-            <a:pPr algn="l"/>
-            <a:r>
-              <a:rPr sz="2180" b="1" i="0">
-                <a:solidFill>
-                  <a:srgbClr val="9E1B32"/>
-                </a:solidFill>
-                <a:latin typeface="Lexend"/>
-              </a:rPr>
-              <a:t>36 cm</a:t>
-            </a:r>
-            <a:r>
-              <a:rPr sz="2180" b="1" i="0" baseline="30000">
-                <a:solidFill>
-                  <a:srgbClr val="9E1B32"/>
-                </a:solidFill>
-                <a:latin typeface="Lexend"/>
-              </a:rPr>
-              <a:t>2</a:t>
-            </a:r>
-          </a:p>
-        </p:txBody>
-      </p:sp>
-      <p:sp>
-        <p:nvSpPr>
-          <p:cNvPr id="10" name="TextBox 9"/>
-          <p:cNvSpPr txBox="1"/>
-          <p:nvPr/>
-        </p:nvSpPr>
-        <p:spPr>
-          <a:xfrm>
-            <a:off x="1874519" y="2510028"/>
-            <a:ext cx="9170535" cy="457200"/>
-          </a:xfrm>
-          <a:prstGeom prst="rect">
-            <a:avLst/>
-          </a:prstGeom>
-          <a:noFill/>
-        </p:spPr>
-        <p:txBody>
-          <a:bodyPr wrap="none" lIns="45720" rIns="45720" tIns="18288" bIns="18288" anchor="ctr">
-            <a:noAutofit/>
-          </a:bodyPr>
-          <a:lstStyle/>
-          <a:p>
-            <a:pPr algn="l"/>
-            <a:r>
-              <a:rPr sz="2180" b="0" i="0">
-                <a:solidFill>
-                  <a:srgbClr val="1A1A1A"/>
-                </a:solidFill>
-                <a:latin typeface="Lexend"/>
-              </a:rPr>
-              <a:t>2.   A 5 cm side becomes 3 cm in the copy. Find the scale factor.</a:t>
-            </a:r>
-          </a:p>
-        </p:txBody>
-      </p:sp>
-      <p:sp>
-        <p:nvSpPr>
-          <p:cNvPr id="11" name="TextBox 10"/>
-          <p:cNvSpPr txBox="1"/>
-          <p:nvPr/>
-        </p:nvSpPr>
-        <p:spPr>
-          <a:xfrm>
-            <a:off x="2606040" y="2967228"/>
-            <a:ext cx="1210344" cy="457200"/>
-          </a:xfrm>
-          <a:prstGeom prst="rect">
-            <a:avLst/>
-          </a:prstGeom>
-          <a:noFill/>
-        </p:spPr>
-        <p:txBody>
-          <a:bodyPr wrap="none" lIns="45720" rIns="45720" tIns="18288" bIns="18288" anchor="ctr">
-            <a:noAutofit/>
-          </a:bodyPr>
-          <a:lstStyle/>
-          <a:p>
-            <a:pPr algn="l"/>
-            <a:r>
-              <a:rPr sz="2180" b="1" i="0">
-                <a:solidFill>
-                  <a:srgbClr val="9E1B32"/>
-                </a:solidFill>
-                <a:latin typeface="Lexend"/>
-              </a:rPr>
-              <a:t>k = 0.6</a:t>
-            </a:r>
-          </a:p>
-        </p:txBody>
-      </p:sp>
-      <p:sp>
-        <p:nvSpPr>
-          <p:cNvPr id="12" name="TextBox 11"/>
-          <p:cNvSpPr txBox="1"/>
-          <p:nvPr/>
-        </p:nvSpPr>
-        <p:spPr>
-          <a:xfrm>
-            <a:off x="1874519" y="3579876"/>
-            <a:ext cx="3275301" cy="457200"/>
-          </a:xfrm>
-          <a:prstGeom prst="rect">
-            <a:avLst/>
-          </a:prstGeom>
-          <a:noFill/>
-        </p:spPr>
-        <p:txBody>
-          <a:bodyPr wrap="none" lIns="45720" rIns="45720" tIns="18288" bIns="18288" anchor="ctr">
-            <a:noAutofit/>
-          </a:bodyPr>
-          <a:lstStyle/>
-          <a:p>
-            <a:pPr algn="l"/>
-            <a:r>
-              <a:rPr sz="2180" b="0" i="0">
-                <a:solidFill>
-                  <a:srgbClr val="1A1A1A"/>
-                </a:solidFill>
-                <a:latin typeface="Lexend"/>
-              </a:rPr>
-              <a:t>3.   Find the product:  </a:t>
+              <a:t>1.   A figure of area </a:t>
             </a:r>
           </a:p>
         </p:txBody>
       </p:sp>
       <p:pic>
         <p:nvPicPr>
-          <p:cNvPr id="13" name="Picture 12" descr="7ec5cb8616fd94f3.png"/>
+          <p:cNvPr id="9" name="Picture 8" descr="edb32a36259546d5.png"/>
           <p:cNvPicPr>
             <a:picLocks noChangeAspect="1"/>
           </p:cNvPicPr>
@@ -11816,7 +13301,274 @@
         </p:blipFill>
         <p:spPr>
           <a:xfrm>
-            <a:off x="5012661" y="3695700"/>
+            <a:off x="4739998" y="1507045"/>
+            <a:ext cx="786384" cy="277368"/>
+          </a:xfrm>
+          <a:prstGeom prst="rect">
+            <a:avLst/>
+          </a:prstGeom>
+        </p:spPr>
+      </p:pic>
+      <p:sp>
+        <p:nvSpPr>
+          <p:cNvPr id="10" name="TextBox 9"/>
+          <p:cNvSpPr txBox="1"/>
+          <p:nvPr/>
+        </p:nvSpPr>
+        <p:spPr>
+          <a:xfrm>
+            <a:off x="5526382" y="1440180"/>
+            <a:ext cx="2026935" cy="457200"/>
+          </a:xfrm>
+          <a:prstGeom prst="rect">
+            <a:avLst/>
+          </a:prstGeom>
+          <a:noFill/>
+        </p:spPr>
+        <p:txBody>
+          <a:bodyPr wrap="none" lIns="45720" rIns="45720" tIns="18288" bIns="18288" anchor="ctr">
+            <a:noAutofit/>
+          </a:bodyPr>
+          <a:lstStyle/>
+          <a:p>
+            <a:pPr algn="l"/>
+            <a:r>
+              <a:rPr sz="2180" b="0" i="0">
+                <a:solidFill>
+                  <a:srgbClr val="1A1A1A"/>
+                </a:solidFill>
+                <a:latin typeface="Lexend"/>
+              </a:rPr>
+              <a:t> is scaled by </a:t>
+            </a:r>
+          </a:p>
+        </p:txBody>
+      </p:sp>
+      <p:pic>
+        <p:nvPicPr>
+          <p:cNvPr id="11" name="Picture 10" descr="365db93adf7efc23.png"/>
+          <p:cNvPicPr>
+            <a:picLocks noChangeAspect="1"/>
+          </p:cNvPicPr>
+          <p:nvPr/>
+        </p:nvPicPr>
+        <p:blipFill>
+          <a:blip r:embed="rId3"/>
+          <a:stretch>
+            <a:fillRect/>
+          </a:stretch>
+        </p:blipFill>
+        <p:spPr>
+          <a:xfrm>
+            <a:off x="7416157" y="1546669"/>
+            <a:ext cx="612648" cy="231648"/>
+          </a:xfrm>
+          <a:prstGeom prst="rect">
+            <a:avLst/>
+          </a:prstGeom>
+        </p:spPr>
+      </p:pic>
+      <p:sp>
+        <p:nvSpPr>
+          <p:cNvPr id="12" name="TextBox 11"/>
+          <p:cNvSpPr txBox="1"/>
+          <p:nvPr/>
+        </p:nvSpPr>
+        <p:spPr>
+          <a:xfrm>
+            <a:off x="8028805" y="1440180"/>
+            <a:ext cx="2738367" cy="457200"/>
+          </a:xfrm>
+          <a:prstGeom prst="rect">
+            <a:avLst/>
+          </a:prstGeom>
+          <a:noFill/>
+        </p:spPr>
+        <p:txBody>
+          <a:bodyPr wrap="none" lIns="45720" rIns="45720" tIns="18288" bIns="18288" anchor="ctr">
+            <a:noAutofit/>
+          </a:bodyPr>
+          <a:lstStyle/>
+          <a:p>
+            <a:pPr algn="l"/>
+            <a:r>
+              <a:rPr sz="2180" b="0" i="0">
+                <a:solidFill>
+                  <a:srgbClr val="1A1A1A"/>
+                </a:solidFill>
+                <a:latin typeface="Lexend"/>
+              </a:rPr>
+              <a:t>. The copy's area?</a:t>
+            </a:r>
+          </a:p>
+        </p:txBody>
+      </p:sp>
+      <p:sp>
+        <p:nvSpPr>
+          <p:cNvPr id="13" name="TextBox 12"/>
+          <p:cNvSpPr txBox="1"/>
+          <p:nvPr/>
+        </p:nvSpPr>
+        <p:spPr>
+          <a:xfrm>
+            <a:off x="2606040" y="1897380"/>
+            <a:ext cx="1198903" cy="457200"/>
+          </a:xfrm>
+          <a:prstGeom prst="rect">
+            <a:avLst/>
+          </a:prstGeom>
+          <a:noFill/>
+        </p:spPr>
+        <p:txBody>
+          <a:bodyPr wrap="none" lIns="45720" rIns="45720" tIns="18288" bIns="18288" anchor="ctr">
+            <a:noAutofit/>
+          </a:bodyPr>
+          <a:lstStyle/>
+          <a:p>
+            <a:pPr algn="l"/>
+            <a:r>
+              <a:rPr sz="2180" b="1" i="0">
+                <a:solidFill>
+                  <a:srgbClr val="9E1B32"/>
+                </a:solidFill>
+                <a:latin typeface="Lexend"/>
+              </a:rPr>
+              <a:t>36 cm</a:t>
+            </a:r>
+            <a:r>
+              <a:rPr sz="2180" b="1" i="0" baseline="30000">
+                <a:solidFill>
+                  <a:srgbClr val="9E1B32"/>
+                </a:solidFill>
+                <a:latin typeface="Lexend"/>
+              </a:rPr>
+              <a:t>2</a:t>
+            </a:r>
+          </a:p>
+        </p:txBody>
+      </p:sp>
+      <p:sp>
+        <p:nvSpPr>
+          <p:cNvPr id="14" name="TextBox 13"/>
+          <p:cNvSpPr txBox="1"/>
+          <p:nvPr/>
+        </p:nvSpPr>
+        <p:spPr>
+          <a:xfrm>
+            <a:off x="1874519" y="2510028"/>
+            <a:ext cx="9170535" cy="457200"/>
+          </a:xfrm>
+          <a:prstGeom prst="rect">
+            <a:avLst/>
+          </a:prstGeom>
+          <a:noFill/>
+        </p:spPr>
+        <p:txBody>
+          <a:bodyPr wrap="none" lIns="45720" rIns="45720" tIns="18288" bIns="18288" anchor="ctr">
+            <a:noAutofit/>
+          </a:bodyPr>
+          <a:lstStyle/>
+          <a:p>
+            <a:pPr algn="l"/>
+            <a:r>
+              <a:rPr sz="2180" b="0" i="0">
+                <a:solidFill>
+                  <a:srgbClr val="1A1A1A"/>
+                </a:solidFill>
+                <a:latin typeface="Lexend"/>
+              </a:rPr>
+              <a:t>2.   A 5 cm side becomes 3 cm in the copy. Find the scale factor.</a:t>
+            </a:r>
+          </a:p>
+        </p:txBody>
+      </p:sp>
+      <p:sp>
+        <p:nvSpPr>
+          <p:cNvPr id="15" name="TextBox 14"/>
+          <p:cNvSpPr txBox="1"/>
+          <p:nvPr/>
+        </p:nvSpPr>
+        <p:spPr>
+          <a:xfrm>
+            <a:off x="2606040" y="2967228"/>
+            <a:ext cx="1210344" cy="457200"/>
+          </a:xfrm>
+          <a:prstGeom prst="rect">
+            <a:avLst/>
+          </a:prstGeom>
+          <a:noFill/>
+        </p:spPr>
+        <p:txBody>
+          <a:bodyPr wrap="none" lIns="45720" rIns="45720" tIns="18288" bIns="18288" anchor="ctr">
+            <a:noAutofit/>
+          </a:bodyPr>
+          <a:lstStyle/>
+          <a:p>
+            <a:pPr algn="l"/>
+            <a:r>
+              <a:rPr sz="2180" b="1" i="0">
+                <a:solidFill>
+                  <a:srgbClr val="9E1B32"/>
+                </a:solidFill>
+                <a:latin typeface="Lexend"/>
+              </a:rPr>
+              <a:t>k = 0.6</a:t>
+            </a:r>
+          </a:p>
+        </p:txBody>
+      </p:sp>
+      <p:sp>
+        <p:nvSpPr>
+          <p:cNvPr id="16" name="TextBox 15"/>
+          <p:cNvSpPr txBox="1"/>
+          <p:nvPr/>
+        </p:nvSpPr>
+        <p:spPr>
+          <a:xfrm>
+            <a:off x="1874519" y="3579876"/>
+            <a:ext cx="3275301" cy="457200"/>
+          </a:xfrm>
+          <a:prstGeom prst="rect">
+            <a:avLst/>
+          </a:prstGeom>
+          <a:noFill/>
+        </p:spPr>
+        <p:txBody>
+          <a:bodyPr wrap="none" lIns="45720" rIns="45720" tIns="18288" bIns="18288" anchor="ctr">
+            <a:noAutofit/>
+          </a:bodyPr>
+          <a:lstStyle/>
+          <a:p>
+            <a:pPr algn="l"/>
+            <a:r>
+              <a:rPr sz="2180" b="0" i="0">
+                <a:solidFill>
+                  <a:srgbClr val="1A1A1A"/>
+                </a:solidFill>
+                <a:latin typeface="Lexend"/>
+              </a:rPr>
+              <a:t>3.   Find the product:  </a:t>
+            </a:r>
+          </a:p>
+        </p:txBody>
+      </p:sp>
+      <p:pic>
+        <p:nvPicPr>
+          <p:cNvPr id="17" name="Picture 16" descr="7ec5cb8616fd94f3.png"/>
+          <p:cNvPicPr>
+            <a:picLocks noChangeAspect="1"/>
+          </p:cNvPicPr>
+          <p:nvPr/>
+        </p:nvPicPr>
+        <p:blipFill>
+          <a:blip r:embed="rId4"/>
+          <a:stretch>
+            <a:fillRect/>
+          </a:stretch>
+        </p:blipFill>
+        <p:spPr>
+          <a:xfrm>
+            <a:off x="5012661" y="3698557"/>
             <a:ext cx="1072896" cy="225552"/>
           </a:xfrm>
           <a:prstGeom prst="rect">
@@ -11826,7 +13578,7 @@
       </p:pic>
       <p:sp>
         <p:nvSpPr>
-          <p:cNvPr id="14" name="TextBox 13"/>
+          <p:cNvPr id="18" name="TextBox 17"/>
           <p:cNvSpPr txBox="1"/>
           <p:nvPr/>
         </p:nvSpPr>
@@ -11861,7 +13613,7 @@
       </p:sp>
       <p:sp>
         <p:nvSpPr>
-          <p:cNvPr id="15" name="TextBox 14"/>
+          <p:cNvPr id="19" name="TextBox 18"/>
           <p:cNvSpPr txBox="1"/>
           <p:nvPr/>
         </p:nvSpPr>
@@ -11896,7 +13648,7 @@
       </p:sp>
       <p:sp>
         <p:nvSpPr>
-          <p:cNvPr id="16" name="TextBox 15"/>
+          <p:cNvPr id="20" name="TextBox 19"/>
           <p:cNvSpPr txBox="1"/>
           <p:nvPr/>
         </p:nvSpPr>
@@ -12166,7 +13918,7 @@
         <p:spPr>
           <a:xfrm>
             <a:off x="1234440" y="1874519"/>
-            <a:ext cx="10058400" cy="858740"/>
+            <a:ext cx="10058400" cy="429370"/>
           </a:xfrm>
           <a:prstGeom prst="rect">
             <a:avLst/>
@@ -12187,7 +13939,7 @@
                 </a:solidFill>
                 <a:latin typeface="Lexend"/>
               </a:rPr>
-              <a:t>Mia, who is 13, enlarges her 9 in by 12 in poster into a mural at 1 in : 2 ft.</a:t>
+              <a:t>Mia, who is 13, enlarges her 9 in by 12 in poster into a mural.</a:t>
             </a:r>
           </a:p>
         </p:txBody>
@@ -12200,7 +13952,101 @@
         </p:nvSpPr>
         <p:spPr>
           <a:xfrm>
-            <a:off x="1234440" y="2842988"/>
+            <a:off x="1234440" y="2390758"/>
+            <a:ext cx="3151609" cy="457200"/>
+          </a:xfrm>
+          <a:prstGeom prst="rect">
+            <a:avLst/>
+          </a:prstGeom>
+          <a:noFill/>
+        </p:spPr>
+        <p:txBody>
+          <a:bodyPr wrap="none" lIns="45720" rIns="45720" tIns="18288" bIns="18288" anchor="ctr">
+            <a:noAutofit/>
+          </a:bodyPr>
+          <a:lstStyle/>
+          <a:p>
+            <a:pPr algn="l"/>
+            <a:r>
+              <a:rPr sz="2280" b="0" i="0">
+                <a:solidFill>
+                  <a:srgbClr val="1A1A1A"/>
+                </a:solidFill>
+                <a:latin typeface="Lexend"/>
+              </a:rPr>
+              <a:t>The mural's scale is </a:t>
+            </a:r>
+          </a:p>
+        </p:txBody>
+      </p:sp>
+      <p:pic>
+        <p:nvPicPr>
+          <p:cNvPr id="10" name="Picture 9" descr="799b2639d3e366c8.png"/>
+          <p:cNvPicPr>
+            <a:picLocks noChangeAspect="1"/>
+          </p:cNvPicPr>
+          <p:nvPr/>
+        </p:nvPicPr>
+        <p:blipFill>
+          <a:blip r:embed="rId2"/>
+          <a:stretch>
+            <a:fillRect/>
+          </a:stretch>
+        </p:blipFill>
+        <p:spPr>
+          <a:xfrm>
+            <a:off x="4248889" y="2495914"/>
+            <a:ext cx="1097280" cy="243840"/>
+          </a:xfrm>
+          <a:prstGeom prst="rect">
+            <a:avLst/>
+          </a:prstGeom>
+        </p:spPr>
+      </p:pic>
+      <p:sp>
+        <p:nvSpPr>
+          <p:cNvPr id="11" name="TextBox 10"/>
+          <p:cNvSpPr txBox="1"/>
+          <p:nvPr/>
+        </p:nvSpPr>
+        <p:spPr>
+          <a:xfrm>
+            <a:off x="5346169" y="2390758"/>
+            <a:ext cx="280301" cy="457200"/>
+          </a:xfrm>
+          <a:prstGeom prst="rect">
+            <a:avLst/>
+          </a:prstGeom>
+          <a:noFill/>
+        </p:spPr>
+        <p:txBody>
+          <a:bodyPr wrap="none" lIns="45720" rIns="45720" tIns="18288" bIns="18288" anchor="ctr">
+            <a:noAutofit/>
+          </a:bodyPr>
+          <a:lstStyle/>
+          <a:p>
+            <a:pPr algn="l"/>
+            <a:r>
+              <a:rPr sz="2280" b="0" i="0">
+                <a:solidFill>
+                  <a:srgbClr val="1A1A1A"/>
+                </a:solidFill>
+                <a:latin typeface="Lexend"/>
+              </a:rPr>
+              <a:t>.</a:t>
+            </a:r>
+          </a:p>
+        </p:txBody>
+      </p:sp>
+      <p:sp>
+        <p:nvSpPr>
+          <p:cNvPr id="12" name="TextBox 11"/>
+          <p:cNvSpPr txBox="1"/>
+          <p:nvPr/>
+        </p:nvSpPr>
+        <p:spPr>
+          <a:xfrm>
+            <a:off x="1234440" y="3026266"/>
             <a:ext cx="10058400" cy="429370"/>
           </a:xfrm>
           <a:prstGeom prst="rect">
@@ -12229,7 +14075,7 @@
       </p:sp>
       <p:sp>
         <p:nvSpPr>
-          <p:cNvPr id="10" name="TextBox 9"/>
+          <p:cNvPr id="13" name="TextBox 12"/>
           <p:cNvSpPr txBox="1"/>
           <p:nvPr/>
         </p:nvSpPr>
@@ -12499,7 +14345,7 @@
         <p:spPr>
           <a:xfrm>
             <a:off x="1234440" y="1874519"/>
-            <a:ext cx="10058400" cy="858740"/>
+            <a:ext cx="10058400" cy="429370"/>
           </a:xfrm>
           <a:prstGeom prst="rect">
             <a:avLst/>
@@ -12520,7 +14366,7 @@
                 </a:solidFill>
                 <a:latin typeface="Lexend"/>
               </a:rPr>
-              <a:t>Mia, who is 13, enlarges her 9 in by 12 in poster into a mural at 1 in : 2 ft.</a:t>
+              <a:t>Mia, who is 13, enlarges her 9 in by 12 in poster into a mural.</a:t>
             </a:r>
           </a:p>
         </p:txBody>
@@ -12533,36 +14379,36 @@
         </p:nvSpPr>
         <p:spPr>
           <a:xfrm>
-            <a:off x="1234440" y="2842988"/>
-            <a:ext cx="10058400" cy="429370"/>
-          </a:xfrm>
-          <a:prstGeom prst="rect">
-            <a:avLst/>
-          </a:prstGeom>
-          <a:noFill/>
-        </p:spPr>
-        <p:txBody>
-          <a:bodyPr wrap="square" lIns="45720" rIns="45720" tIns="18288" bIns="18288" anchor="t">
-            <a:spAutoFit/>
-          </a:bodyPr>
-          <a:lstStyle/>
-          <a:p>
-            <a:pPr algn="l"/>
-            <a:r>
-              <a:rPr sz="2280" b="1" i="0">
+            <a:off x="1234440" y="2390758"/>
+            <a:ext cx="3151609" cy="457200"/>
+          </a:xfrm>
+          <a:prstGeom prst="rect">
+            <a:avLst/>
+          </a:prstGeom>
+          <a:noFill/>
+        </p:spPr>
+        <p:txBody>
+          <a:bodyPr wrap="none" lIns="45720" rIns="45720" tIns="18288" bIns="18288" anchor="ctr">
+            <a:noAutofit/>
+          </a:bodyPr>
+          <a:lstStyle/>
+          <a:p>
+            <a:pPr algn="l"/>
+            <a:r>
+              <a:rPr sz="2280" b="0" i="0">
                 <a:solidFill>
                   <a:srgbClr val="1A1A1A"/>
                 </a:solidFill>
                 <a:latin typeface="Lexend"/>
               </a:rPr>
-              <a:t>What are the mural's dimensions?</a:t>
+              <a:t>The mural's scale is </a:t>
             </a:r>
           </a:p>
         </p:txBody>
       </p:sp>
       <p:pic>
         <p:nvPicPr>
-          <p:cNvPr id="10" name="Picture 9" descr="12be65d33c7344c3.png"/>
+          <p:cNvPr id="10" name="Picture 9" descr="4cffcd08a805c9ef.png"/>
           <p:cNvPicPr>
             <a:picLocks noChangeAspect="1"/>
           </p:cNvPicPr>
@@ -12576,7 +14422,101 @@
         </p:blipFill>
         <p:spPr>
           <a:xfrm>
-            <a:off x="4335780" y="3581731"/>
+            <a:off x="4248889" y="2495914"/>
+            <a:ext cx="1100328" cy="243840"/>
+          </a:xfrm>
+          <a:prstGeom prst="rect">
+            <a:avLst/>
+          </a:prstGeom>
+        </p:spPr>
+      </p:pic>
+      <p:sp>
+        <p:nvSpPr>
+          <p:cNvPr id="11" name="TextBox 10"/>
+          <p:cNvSpPr txBox="1"/>
+          <p:nvPr/>
+        </p:nvSpPr>
+        <p:spPr>
+          <a:xfrm>
+            <a:off x="5349217" y="2390758"/>
+            <a:ext cx="280301" cy="457200"/>
+          </a:xfrm>
+          <a:prstGeom prst="rect">
+            <a:avLst/>
+          </a:prstGeom>
+          <a:noFill/>
+        </p:spPr>
+        <p:txBody>
+          <a:bodyPr wrap="none" lIns="45720" rIns="45720" tIns="18288" bIns="18288" anchor="ctr">
+            <a:noAutofit/>
+          </a:bodyPr>
+          <a:lstStyle/>
+          <a:p>
+            <a:pPr algn="l"/>
+            <a:r>
+              <a:rPr sz="2280" b="0" i="0">
+                <a:solidFill>
+                  <a:srgbClr val="1A1A1A"/>
+                </a:solidFill>
+                <a:latin typeface="Lexend"/>
+              </a:rPr>
+              <a:t>.</a:t>
+            </a:r>
+          </a:p>
+        </p:txBody>
+      </p:sp>
+      <p:sp>
+        <p:nvSpPr>
+          <p:cNvPr id="12" name="TextBox 11"/>
+          <p:cNvSpPr txBox="1"/>
+          <p:nvPr/>
+        </p:nvSpPr>
+        <p:spPr>
+          <a:xfrm>
+            <a:off x="1234440" y="3026266"/>
+            <a:ext cx="10058400" cy="429370"/>
+          </a:xfrm>
+          <a:prstGeom prst="rect">
+            <a:avLst/>
+          </a:prstGeom>
+          <a:noFill/>
+        </p:spPr>
+        <p:txBody>
+          <a:bodyPr wrap="square" lIns="45720" rIns="45720" tIns="18288" bIns="18288" anchor="t">
+            <a:spAutoFit/>
+          </a:bodyPr>
+          <a:lstStyle/>
+          <a:p>
+            <a:pPr algn="l"/>
+            <a:r>
+              <a:rPr sz="2280" b="1" i="0">
+                <a:solidFill>
+                  <a:srgbClr val="1A1A1A"/>
+                </a:solidFill>
+                <a:latin typeface="Lexend"/>
+              </a:rPr>
+              <a:t>What are the mural's dimensions?</a:t>
+            </a:r>
+          </a:p>
+        </p:txBody>
+      </p:sp>
+      <p:pic>
+        <p:nvPicPr>
+          <p:cNvPr id="13" name="Picture 12" descr="12be65d33c7344c3.png"/>
+          <p:cNvPicPr>
+            <a:picLocks noChangeAspect="1"/>
+          </p:cNvPicPr>
+          <p:nvPr/>
+        </p:nvPicPr>
+        <p:blipFill>
+          <a:blip r:embed="rId3"/>
+          <a:stretch>
+            <a:fillRect/>
+          </a:stretch>
+        </p:blipFill>
+        <p:spPr>
+          <a:xfrm>
+            <a:off x="4335780" y="3781201"/>
             <a:ext cx="3599688" cy="249935"/>
           </a:xfrm>
           <a:prstGeom prst="rect">
@@ -12586,7 +14526,7 @@
       </p:pic>
       <p:sp>
         <p:nvSpPr>
-          <p:cNvPr id="11" name="TextBox 10"/>
+          <p:cNvPr id="14" name="TextBox 13"/>
           <p:cNvSpPr txBox="1"/>
           <p:nvPr/>
         </p:nvSpPr>
@@ -13266,7 +15206,7 @@
         </p:blipFill>
         <p:spPr>
           <a:xfrm>
-            <a:off x="3029712" y="3962333"/>
+            <a:off x="3029712" y="3994337"/>
             <a:ext cx="6208776" cy="347472"/>
           </a:xfrm>
           <a:prstGeom prst="rect">
@@ -13290,7 +15230,7 @@
         </p:blipFill>
         <p:spPr>
           <a:xfrm>
-            <a:off x="3029712" y="4547549"/>
+            <a:off x="3029712" y="4563742"/>
             <a:ext cx="2703576" cy="256032"/>
           </a:xfrm>
           <a:prstGeom prst="rect">
@@ -13587,23 +15527,23 @@
         </p:nvSpPr>
         <p:spPr>
           <a:xfrm>
-            <a:off x="960120" y="1572768"/>
-            <a:ext cx="548640" cy="356616"/>
-          </a:xfrm>
-          <a:prstGeom prst="rect">
-            <a:avLst/>
-          </a:prstGeom>
-          <a:noFill/>
-        </p:spPr>
-        <p:txBody>
-          <a:bodyPr wrap="square" lIns="45720" rIns="45720" tIns="18288" bIns="18288" anchor="t">
-            <a:spAutoFit/>
-          </a:bodyPr>
-          <a:lstStyle/>
-          <a:p>
-            <a:pPr algn="l"/>
-            <a:r>
-              <a:rPr sz="1710" b="1" i="0">
+            <a:off x="960120" y="1553154"/>
+            <a:ext cx="548640" cy="377686"/>
+          </a:xfrm>
+          <a:prstGeom prst="rect">
+            <a:avLst/>
+          </a:prstGeom>
+          <a:noFill/>
+        </p:spPr>
+        <p:txBody>
+          <a:bodyPr wrap="square" lIns="45720" rIns="45720" tIns="18288" bIns="18288" anchor="ctr">
+            <a:spAutoFit/>
+          </a:bodyPr>
+          <a:lstStyle/>
+          <a:p>
+            <a:pPr algn="l"/>
+            <a:r>
+              <a:rPr sz="1810" b="1" i="0">
                 <a:solidFill>
                   <a:srgbClr val="0B5394"/>
                 </a:solidFill>
@@ -13622,58 +15562,117 @@
         </p:nvSpPr>
         <p:spPr>
           <a:xfrm>
-            <a:off x="1554480" y="1572768"/>
-            <a:ext cx="9829800" cy="411480"/>
-          </a:xfrm>
-          <a:prstGeom prst="rect">
-            <a:avLst/>
-          </a:prstGeom>
-          <a:noFill/>
-        </p:spPr>
-        <p:txBody>
-          <a:bodyPr wrap="square" lIns="45720" rIns="45720" tIns="18288" bIns="18288" anchor="t">
-            <a:spAutoFit/>
-          </a:bodyPr>
-          <a:lstStyle/>
-          <a:p>
-            <a:pPr algn="l"/>
-            <a:r>
-              <a:rPr sz="1710" b="0" i="0">
+            <a:off x="1554480" y="1553154"/>
+            <a:ext cx="2399911" cy="377686"/>
+          </a:xfrm>
+          <a:prstGeom prst="rect">
+            <a:avLst/>
+          </a:prstGeom>
+          <a:noFill/>
+        </p:spPr>
+        <p:txBody>
+          <a:bodyPr wrap="none" lIns="45720" rIns="45720" tIns="18288" bIns="18288" anchor="ctr">
+            <a:noAutofit/>
+          </a:bodyPr>
+          <a:lstStyle/>
+          <a:p>
+            <a:pPr algn="l"/>
+            <a:r>
+              <a:rPr sz="1810" b="0" i="0">
                 <a:solidFill>
                   <a:srgbClr val="1A1A1A"/>
                 </a:solidFill>
                 <a:latin typeface="Lexend"/>
               </a:rPr>
-              <a:t>A plan is drawn at ½ in : 1 ft. A wall is 6 in long on it. Find the real length.</a:t>
-            </a:r>
-          </a:p>
-        </p:txBody>
-      </p:sp>
-      <p:sp>
-        <p:nvSpPr>
-          <p:cNvPr id="10" name="TextBox 9"/>
-          <p:cNvSpPr txBox="1"/>
-          <p:nvPr/>
-        </p:nvSpPr>
-        <p:spPr>
-          <a:xfrm>
-            <a:off x="960120" y="2057400"/>
-            <a:ext cx="548640" cy="356616"/>
-          </a:xfrm>
-          <a:prstGeom prst="rect">
-            <a:avLst/>
-          </a:prstGeom>
-          <a:noFill/>
-        </p:spPr>
-        <p:txBody>
-          <a:bodyPr wrap="square" lIns="45720" rIns="45720" tIns="18288" bIns="18288" anchor="t">
-            <a:spAutoFit/>
-          </a:bodyPr>
-          <a:lstStyle/>
-          <a:p>
-            <a:pPr algn="l"/>
-            <a:r>
-              <a:rPr sz="1710" b="1" i="0">
+              <a:t>A plan is drawn at </a:t>
+            </a:r>
+          </a:p>
+        </p:txBody>
+      </p:sp>
+      <p:pic>
+        <p:nvPicPr>
+          <p:cNvPr id="10" name="Picture 9" descr="e7b684faf8832363.png"/>
+          <p:cNvPicPr>
+            <a:picLocks noChangeAspect="1"/>
+          </p:cNvPicPr>
+          <p:nvPr/>
+        </p:nvPicPr>
+        <p:blipFill>
+          <a:blip r:embed="rId2"/>
+          <a:stretch>
+            <a:fillRect/>
+          </a:stretch>
+        </p:blipFill>
+        <p:spPr>
+          <a:xfrm>
+            <a:off x="3817231" y="1517904"/>
+            <a:ext cx="959324" cy="448188"/>
+          </a:xfrm>
+          <a:prstGeom prst="rect">
+            <a:avLst/>
+          </a:prstGeom>
+        </p:spPr>
+      </p:pic>
+      <p:sp>
+        <p:nvSpPr>
+          <p:cNvPr id="11" name="TextBox 10"/>
+          <p:cNvSpPr txBox="1"/>
+          <p:nvPr/>
+        </p:nvSpPr>
+        <p:spPr>
+          <a:xfrm>
+            <a:off x="4776556" y="1553154"/>
+            <a:ext cx="5409749" cy="377686"/>
+          </a:xfrm>
+          <a:prstGeom prst="rect">
+            <a:avLst/>
+          </a:prstGeom>
+          <a:noFill/>
+        </p:spPr>
+        <p:txBody>
+          <a:bodyPr wrap="none" lIns="45720" rIns="45720" tIns="18288" bIns="18288" anchor="ctr">
+            <a:noAutofit/>
+          </a:bodyPr>
+          <a:lstStyle/>
+          <a:p>
+            <a:pPr algn="l"/>
+            <a:r>
+              <a:rPr sz="1810" b="0" i="0">
+                <a:solidFill>
+                  <a:srgbClr val="1A1A1A"/>
+                </a:solidFill>
+                <a:latin typeface="Lexend"/>
+              </a:rPr>
+              <a:t>. A wall is 6 in long on it. Find the real length.</a:t>
+            </a:r>
+          </a:p>
+        </p:txBody>
+      </p:sp>
+      <p:sp>
+        <p:nvSpPr>
+          <p:cNvPr id="12" name="TextBox 11"/>
+          <p:cNvSpPr txBox="1"/>
+          <p:nvPr/>
+        </p:nvSpPr>
+        <p:spPr>
+          <a:xfrm>
+            <a:off x="960120" y="2075224"/>
+            <a:ext cx="548640" cy="377686"/>
+          </a:xfrm>
+          <a:prstGeom prst="rect">
+            <a:avLst/>
+          </a:prstGeom>
+          <a:noFill/>
+        </p:spPr>
+        <p:txBody>
+          <a:bodyPr wrap="square" lIns="45720" rIns="45720" tIns="18288" bIns="18288" anchor="ctr">
+            <a:spAutoFit/>
+          </a:bodyPr>
+          <a:lstStyle/>
+          <a:p>
+            <a:pPr algn="l"/>
+            <a:r>
+              <a:rPr sz="1810" b="1" i="0">
                 <a:solidFill>
                   <a:srgbClr val="0B5394"/>
                 </a:solidFill>
@@ -13686,64 +15685,123 @@
       </p:sp>
       <p:sp>
         <p:nvSpPr>
-          <p:cNvPr id="11" name="TextBox 10"/>
-          <p:cNvSpPr txBox="1"/>
-          <p:nvPr/>
-        </p:nvSpPr>
-        <p:spPr>
-          <a:xfrm>
-            <a:off x="1554480" y="2057400"/>
-            <a:ext cx="9829800" cy="411480"/>
-          </a:xfrm>
-          <a:prstGeom prst="rect">
-            <a:avLst/>
-          </a:prstGeom>
-          <a:noFill/>
-        </p:spPr>
-        <p:txBody>
-          <a:bodyPr wrap="square" lIns="45720" rIns="45720" tIns="18288" bIns="18288" anchor="t">
-            <a:spAutoFit/>
-          </a:bodyPr>
-          <a:lstStyle/>
-          <a:p>
-            <a:pPr algn="l"/>
-            <a:r>
-              <a:rPr sz="1710" b="0" i="0">
+          <p:cNvPr id="13" name="TextBox 12"/>
+          <p:cNvSpPr txBox="1"/>
+          <p:nvPr/>
+        </p:nvSpPr>
+        <p:spPr>
+          <a:xfrm>
+            <a:off x="1554480" y="2075224"/>
+            <a:ext cx="2399911" cy="377686"/>
+          </a:xfrm>
+          <a:prstGeom prst="rect">
+            <a:avLst/>
+          </a:prstGeom>
+          <a:noFill/>
+        </p:spPr>
+        <p:txBody>
+          <a:bodyPr wrap="none" lIns="45720" rIns="45720" tIns="18288" bIns="18288" anchor="ctr">
+            <a:noAutofit/>
+          </a:bodyPr>
+          <a:lstStyle/>
+          <a:p>
+            <a:pPr algn="l"/>
+            <a:r>
+              <a:rPr sz="1810" b="0" i="0">
                 <a:solidFill>
                   <a:srgbClr val="1A1A1A"/>
                 </a:solidFill>
                 <a:latin typeface="Lexend"/>
               </a:rPr>
-              <a:t>A plan is drawn at 1 in : 5 ft. A room is 3.2 in long on it. Find the real length.</a:t>
-            </a:r>
-          </a:p>
-        </p:txBody>
-      </p:sp>
-      <p:sp>
-        <p:nvSpPr>
-          <p:cNvPr id="12" name="TextBox 11"/>
-          <p:cNvSpPr txBox="1"/>
-          <p:nvPr/>
-        </p:nvSpPr>
-        <p:spPr>
-          <a:xfrm>
-            <a:off x="960120" y="2542032"/>
-            <a:ext cx="548640" cy="356616"/>
-          </a:xfrm>
-          <a:prstGeom prst="rect">
-            <a:avLst/>
-          </a:prstGeom>
-          <a:noFill/>
-        </p:spPr>
-        <p:txBody>
-          <a:bodyPr wrap="square" lIns="45720" rIns="45720" tIns="18288" bIns="18288" anchor="t">
-            <a:spAutoFit/>
-          </a:bodyPr>
-          <a:lstStyle/>
-          <a:p>
-            <a:pPr algn="l"/>
-            <a:r>
-              <a:rPr sz="1710" b="1" i="0">
+              <a:t>A plan is drawn at </a:t>
+            </a:r>
+          </a:p>
+        </p:txBody>
+      </p:sp>
+      <p:pic>
+        <p:nvPicPr>
+          <p:cNvPr id="14" name="Picture 13" descr="42aab0cb6b1598e0.png"/>
+          <p:cNvPicPr>
+            <a:picLocks noChangeAspect="1"/>
+          </p:cNvPicPr>
+          <p:nvPr/>
+        </p:nvPicPr>
+        <p:blipFill>
+          <a:blip r:embed="rId3"/>
+          <a:stretch>
+            <a:fillRect/>
+          </a:stretch>
+        </p:blipFill>
+        <p:spPr>
+          <a:xfrm>
+            <a:off x="3817231" y="2163351"/>
+            <a:ext cx="914002" cy="201433"/>
+          </a:xfrm>
+          <a:prstGeom prst="rect">
+            <a:avLst/>
+          </a:prstGeom>
+        </p:spPr>
+      </p:pic>
+      <p:sp>
+        <p:nvSpPr>
+          <p:cNvPr id="15" name="TextBox 14"/>
+          <p:cNvSpPr txBox="1"/>
+          <p:nvPr/>
+        </p:nvSpPr>
+        <p:spPr>
+          <a:xfrm>
+            <a:off x="4731233" y="2075224"/>
+            <a:ext cx="5740162" cy="377686"/>
+          </a:xfrm>
+          <a:prstGeom prst="rect">
+            <a:avLst/>
+          </a:prstGeom>
+          <a:noFill/>
+        </p:spPr>
+        <p:txBody>
+          <a:bodyPr wrap="none" lIns="45720" rIns="45720" tIns="18288" bIns="18288" anchor="ctr">
+            <a:noAutofit/>
+          </a:bodyPr>
+          <a:lstStyle/>
+          <a:p>
+            <a:pPr algn="l"/>
+            <a:r>
+              <a:rPr sz="1810" b="0" i="0">
+                <a:solidFill>
+                  <a:srgbClr val="1A1A1A"/>
+                </a:solidFill>
+                <a:latin typeface="Lexend"/>
+              </a:rPr>
+              <a:t>. A room is 3.2 in long on it. Find the real length.</a:t>
+            </a:r>
+          </a:p>
+        </p:txBody>
+      </p:sp>
+      <p:sp>
+        <p:nvSpPr>
+          <p:cNvPr id="16" name="TextBox 15"/>
+          <p:cNvSpPr txBox="1"/>
+          <p:nvPr/>
+        </p:nvSpPr>
+        <p:spPr>
+          <a:xfrm>
+            <a:off x="960120" y="2543158"/>
+            <a:ext cx="548640" cy="377686"/>
+          </a:xfrm>
+          <a:prstGeom prst="rect">
+            <a:avLst/>
+          </a:prstGeom>
+          <a:noFill/>
+        </p:spPr>
+        <p:txBody>
+          <a:bodyPr wrap="square" lIns="45720" rIns="45720" tIns="18288" bIns="18288" anchor="ctr">
+            <a:spAutoFit/>
+          </a:bodyPr>
+          <a:lstStyle/>
+          <a:p>
+            <a:pPr algn="l"/>
+            <a:r>
+              <a:rPr sz="1810" b="1" i="0">
                 <a:solidFill>
                   <a:srgbClr val="0B5394"/>
                 </a:solidFill>
@@ -13756,64 +15814,123 @@
       </p:sp>
       <p:sp>
         <p:nvSpPr>
-          <p:cNvPr id="13" name="TextBox 12"/>
-          <p:cNvSpPr txBox="1"/>
-          <p:nvPr/>
-        </p:nvSpPr>
-        <p:spPr>
-          <a:xfrm>
-            <a:off x="1554480" y="2542032"/>
-            <a:ext cx="9829800" cy="768096"/>
-          </a:xfrm>
-          <a:prstGeom prst="rect">
-            <a:avLst/>
-          </a:prstGeom>
-          <a:noFill/>
-        </p:spPr>
-        <p:txBody>
-          <a:bodyPr wrap="square" lIns="45720" rIns="45720" tIns="18288" bIns="18288" anchor="t">
-            <a:spAutoFit/>
-          </a:bodyPr>
-          <a:lstStyle/>
-          <a:p>
-            <a:pPr algn="l"/>
-            <a:r>
-              <a:rPr sz="1710" b="0" i="0">
+          <p:cNvPr id="17" name="TextBox 16"/>
+          <p:cNvSpPr txBox="1"/>
+          <p:nvPr/>
+        </p:nvSpPr>
+        <p:spPr>
+          <a:xfrm>
+            <a:off x="1554480" y="2543158"/>
+            <a:ext cx="2399911" cy="377686"/>
+          </a:xfrm>
+          <a:prstGeom prst="rect">
+            <a:avLst/>
+          </a:prstGeom>
+          <a:noFill/>
+        </p:spPr>
+        <p:txBody>
+          <a:bodyPr wrap="none" lIns="45720" rIns="45720" tIns="18288" bIns="18288" anchor="ctr">
+            <a:noAutofit/>
+          </a:bodyPr>
+          <a:lstStyle/>
+          <a:p>
+            <a:pPr algn="l"/>
+            <a:r>
+              <a:rPr sz="1810" b="0" i="0">
                 <a:solidFill>
                   <a:srgbClr val="1A1A1A"/>
                 </a:solidFill>
                 <a:latin typeface="Lexend"/>
               </a:rPr>
-              <a:t>A plan is drawn at 1 in : 5 ft. A real wall is 22 ft long. Find its length on the plan.</a:t>
-            </a:r>
-          </a:p>
-        </p:txBody>
-      </p:sp>
-      <p:sp>
-        <p:nvSpPr>
-          <p:cNvPr id="14" name="TextBox 13"/>
-          <p:cNvSpPr txBox="1"/>
-          <p:nvPr/>
-        </p:nvSpPr>
-        <p:spPr>
-          <a:xfrm>
-            <a:off x="960120" y="3383280"/>
-            <a:ext cx="548640" cy="356616"/>
-          </a:xfrm>
-          <a:prstGeom prst="rect">
-            <a:avLst/>
-          </a:prstGeom>
-          <a:noFill/>
-        </p:spPr>
-        <p:txBody>
-          <a:bodyPr wrap="square" lIns="45720" rIns="45720" tIns="18288" bIns="18288" anchor="t">
-            <a:spAutoFit/>
-          </a:bodyPr>
-          <a:lstStyle/>
-          <a:p>
-            <a:pPr algn="l"/>
-            <a:r>
-              <a:rPr sz="1710" b="1" i="0">
+              <a:t>A plan is drawn at </a:t>
+            </a:r>
+          </a:p>
+        </p:txBody>
+      </p:sp>
+      <p:pic>
+        <p:nvPicPr>
+          <p:cNvPr id="18" name="Picture 17" descr="42aab0cb6b1598e0.png"/>
+          <p:cNvPicPr>
+            <a:picLocks noChangeAspect="1"/>
+          </p:cNvPicPr>
+          <p:nvPr/>
+        </p:nvPicPr>
+        <p:blipFill>
+          <a:blip r:embed="rId3"/>
+          <a:stretch>
+            <a:fillRect/>
+          </a:stretch>
+        </p:blipFill>
+        <p:spPr>
+          <a:xfrm>
+            <a:off x="3817231" y="2631285"/>
+            <a:ext cx="914002" cy="201433"/>
+          </a:xfrm>
+          <a:prstGeom prst="rect">
+            <a:avLst/>
+          </a:prstGeom>
+        </p:spPr>
+      </p:pic>
+      <p:sp>
+        <p:nvSpPr>
+          <p:cNvPr id="19" name="TextBox 18"/>
+          <p:cNvSpPr txBox="1"/>
+          <p:nvPr/>
+        </p:nvSpPr>
+        <p:spPr>
+          <a:xfrm>
+            <a:off x="4731233" y="2543158"/>
+            <a:ext cx="6217697" cy="377686"/>
+          </a:xfrm>
+          <a:prstGeom prst="rect">
+            <a:avLst/>
+          </a:prstGeom>
+          <a:noFill/>
+        </p:spPr>
+        <p:txBody>
+          <a:bodyPr wrap="none" lIns="45720" rIns="45720" tIns="18288" bIns="18288" anchor="ctr">
+            <a:noAutofit/>
+          </a:bodyPr>
+          <a:lstStyle/>
+          <a:p>
+            <a:pPr algn="l"/>
+            <a:r>
+              <a:rPr sz="1810" b="0" i="0">
+                <a:solidFill>
+                  <a:srgbClr val="1A1A1A"/>
+                </a:solidFill>
+                <a:latin typeface="Lexend"/>
+              </a:rPr>
+              <a:t>. A real wall is 22 ft long. Find its length on the plan.</a:t>
+            </a:r>
+          </a:p>
+        </p:txBody>
+      </p:sp>
+      <p:sp>
+        <p:nvSpPr>
+          <p:cNvPr id="20" name="TextBox 19"/>
+          <p:cNvSpPr txBox="1"/>
+          <p:nvPr/>
+        </p:nvSpPr>
+        <p:spPr>
+          <a:xfrm>
+            <a:off x="960120" y="3063968"/>
+            <a:ext cx="548640" cy="377686"/>
+          </a:xfrm>
+          <a:prstGeom prst="rect">
+            <a:avLst/>
+          </a:prstGeom>
+          <a:noFill/>
+        </p:spPr>
+        <p:txBody>
+          <a:bodyPr wrap="square" lIns="45720" rIns="45720" tIns="18288" bIns="18288" anchor="ctr">
+            <a:spAutoFit/>
+          </a:bodyPr>
+          <a:lstStyle/>
+          <a:p>
+            <a:pPr algn="l"/>
+            <a:r>
+              <a:rPr sz="1810" b="1" i="0">
                 <a:solidFill>
                   <a:srgbClr val="0B5394"/>
                 </a:solidFill>
@@ -13826,64 +15943,158 @@
       </p:sp>
       <p:sp>
         <p:nvSpPr>
-          <p:cNvPr id="15" name="TextBox 14"/>
-          <p:cNvSpPr txBox="1"/>
-          <p:nvPr/>
-        </p:nvSpPr>
-        <p:spPr>
-          <a:xfrm>
-            <a:off x="1554480" y="3383280"/>
-            <a:ext cx="9829800" cy="768096"/>
-          </a:xfrm>
-          <a:prstGeom prst="rect">
-            <a:avLst/>
-          </a:prstGeom>
-          <a:noFill/>
-        </p:spPr>
-        <p:txBody>
-          <a:bodyPr wrap="square" lIns="45720" rIns="45720" tIns="18288" bIns="18288" anchor="t">
-            <a:spAutoFit/>
-          </a:bodyPr>
-          <a:lstStyle/>
-          <a:p>
-            <a:pPr algn="l"/>
-            <a:r>
-              <a:rPr sz="1710" b="0" i="0">
+          <p:cNvPr id="21" name="TextBox 20"/>
+          <p:cNvSpPr txBox="1"/>
+          <p:nvPr/>
+        </p:nvSpPr>
+        <p:spPr>
+          <a:xfrm>
+            <a:off x="1554480" y="3063968"/>
+            <a:ext cx="2399911" cy="377686"/>
+          </a:xfrm>
+          <a:prstGeom prst="rect">
+            <a:avLst/>
+          </a:prstGeom>
+          <a:noFill/>
+        </p:spPr>
+        <p:txBody>
+          <a:bodyPr wrap="none" lIns="45720" rIns="45720" tIns="18288" bIns="18288" anchor="ctr">
+            <a:noAutofit/>
+          </a:bodyPr>
+          <a:lstStyle/>
+          <a:p>
+            <a:pPr algn="l"/>
+            <a:r>
+              <a:rPr sz="1810" b="0" i="0">
                 <a:solidFill>
                   <a:srgbClr val="1A1A1A"/>
                 </a:solidFill>
                 <a:latin typeface="Lexend"/>
               </a:rPr>
-              <a:t>A plan is drawn at ¼ in : 1 ft. A room is 2 in by 3.5 in on it. Find the real dimensions and area.</a:t>
-            </a:r>
-          </a:p>
-        </p:txBody>
-      </p:sp>
-      <p:sp>
-        <p:nvSpPr>
-          <p:cNvPr id="16" name="TextBox 15"/>
-          <p:cNvSpPr txBox="1"/>
-          <p:nvPr/>
-        </p:nvSpPr>
-        <p:spPr>
-          <a:xfrm>
-            <a:off x="960120" y="4224528"/>
-            <a:ext cx="548640" cy="356616"/>
-          </a:xfrm>
-          <a:prstGeom prst="rect">
-            <a:avLst/>
-          </a:prstGeom>
-          <a:noFill/>
-        </p:spPr>
-        <p:txBody>
-          <a:bodyPr wrap="square" lIns="45720" rIns="45720" tIns="18288" bIns="18288" anchor="t">
-            <a:spAutoFit/>
-          </a:bodyPr>
-          <a:lstStyle/>
-          <a:p>
-            <a:pPr algn="l"/>
-            <a:r>
-              <a:rPr sz="1710" b="1" i="0">
+              <a:t>A plan is drawn at </a:t>
+            </a:r>
+          </a:p>
+        </p:txBody>
+      </p:sp>
+      <p:pic>
+        <p:nvPicPr>
+          <p:cNvPr id="22" name="Picture 21" descr="9ca189c78b28bad0.png"/>
+          <p:cNvPicPr>
+            <a:picLocks noChangeAspect="1"/>
+          </p:cNvPicPr>
+          <p:nvPr/>
+        </p:nvPicPr>
+        <p:blipFill>
+          <a:blip r:embed="rId4"/>
+          <a:stretch>
+            <a:fillRect/>
+          </a:stretch>
+        </p:blipFill>
+        <p:spPr>
+          <a:xfrm>
+            <a:off x="3817231" y="3029977"/>
+            <a:ext cx="979468" cy="445670"/>
+          </a:xfrm>
+          <a:prstGeom prst="rect">
+            <a:avLst/>
+          </a:prstGeom>
+        </p:spPr>
+      </p:pic>
+      <p:sp>
+        <p:nvSpPr>
+          <p:cNvPr id="23" name="TextBox 22"/>
+          <p:cNvSpPr txBox="1"/>
+          <p:nvPr/>
+        </p:nvSpPr>
+        <p:spPr>
+          <a:xfrm>
+            <a:off x="4796699" y="3063968"/>
+            <a:ext cx="6603762" cy="377686"/>
+          </a:xfrm>
+          <a:prstGeom prst="rect">
+            <a:avLst/>
+          </a:prstGeom>
+          <a:noFill/>
+        </p:spPr>
+        <p:txBody>
+          <a:bodyPr wrap="none" lIns="45720" rIns="45720" tIns="18288" bIns="18288" anchor="ctr">
+            <a:noAutofit/>
+          </a:bodyPr>
+          <a:lstStyle/>
+          <a:p>
+            <a:pPr algn="l"/>
+            <a:r>
+              <a:rPr sz="1810" b="0" i="0">
+                <a:solidFill>
+                  <a:srgbClr val="1A1A1A"/>
+                </a:solidFill>
+                <a:latin typeface="Lexend"/>
+              </a:rPr>
+              <a:t>. A room is 2 in by 3.5 in on it. Find the real dimensions </a:t>
+            </a:r>
+          </a:p>
+        </p:txBody>
+      </p:sp>
+      <p:sp>
+        <p:nvSpPr>
+          <p:cNvPr id="24" name="TextBox 23"/>
+          <p:cNvSpPr txBox="1"/>
+          <p:nvPr/>
+        </p:nvSpPr>
+        <p:spPr>
+          <a:xfrm>
+            <a:off x="1554480" y="3484195"/>
+            <a:ext cx="1328791" cy="377686"/>
+          </a:xfrm>
+          <a:prstGeom prst="rect">
+            <a:avLst/>
+          </a:prstGeom>
+          <a:noFill/>
+        </p:spPr>
+        <p:txBody>
+          <a:bodyPr wrap="none" lIns="45720" rIns="45720" tIns="18288" bIns="18288" anchor="ctr">
+            <a:noAutofit/>
+          </a:bodyPr>
+          <a:lstStyle/>
+          <a:p>
+            <a:pPr algn="l"/>
+            <a:r>
+              <a:rPr sz="1810" b="0" i="0">
+                <a:solidFill>
+                  <a:srgbClr val="1A1A1A"/>
+                </a:solidFill>
+                <a:latin typeface="Lexend"/>
+              </a:rPr>
+              <a:t>and area.</a:t>
+            </a:r>
+          </a:p>
+        </p:txBody>
+      </p:sp>
+      <p:sp>
+        <p:nvSpPr>
+          <p:cNvPr id="25" name="TextBox 24"/>
+          <p:cNvSpPr txBox="1"/>
+          <p:nvPr/>
+        </p:nvSpPr>
+        <p:spPr>
+          <a:xfrm>
+            <a:off x="960120" y="3952129"/>
+            <a:ext cx="548640" cy="377686"/>
+          </a:xfrm>
+          <a:prstGeom prst="rect">
+            <a:avLst/>
+          </a:prstGeom>
+          <a:noFill/>
+        </p:spPr>
+        <p:txBody>
+          <a:bodyPr wrap="square" lIns="45720" rIns="45720" tIns="18288" bIns="18288" anchor="ctr">
+            <a:spAutoFit/>
+          </a:bodyPr>
+          <a:lstStyle/>
+          <a:p>
+            <a:pPr algn="l"/>
+            <a:r>
+              <a:rPr sz="1810" b="1" i="0">
                 <a:solidFill>
                   <a:srgbClr val="0B5394"/>
                 </a:solidFill>
@@ -13896,64 +16107,158 @@
       </p:sp>
       <p:sp>
         <p:nvSpPr>
-          <p:cNvPr id="17" name="TextBox 16"/>
-          <p:cNvSpPr txBox="1"/>
-          <p:nvPr/>
-        </p:nvSpPr>
-        <p:spPr>
-          <a:xfrm>
-            <a:off x="1554480" y="4224528"/>
-            <a:ext cx="9829800" cy="768096"/>
-          </a:xfrm>
-          <a:prstGeom prst="rect">
-            <a:avLst/>
-          </a:prstGeom>
-          <a:noFill/>
-        </p:spPr>
-        <p:txBody>
-          <a:bodyPr wrap="square" lIns="45720" rIns="45720" tIns="18288" bIns="18288" anchor="t">
-            <a:spAutoFit/>
-          </a:bodyPr>
-          <a:lstStyle/>
-          <a:p>
-            <a:pPr algn="l"/>
-            <a:r>
-              <a:rPr sz="1710" b="0" i="0">
+          <p:cNvPr id="26" name="TextBox 25"/>
+          <p:cNvSpPr txBox="1"/>
+          <p:nvPr/>
+        </p:nvSpPr>
+        <p:spPr>
+          <a:xfrm>
+            <a:off x="1554480" y="3952129"/>
+            <a:ext cx="3021222" cy="377686"/>
+          </a:xfrm>
+          <a:prstGeom prst="rect">
+            <a:avLst/>
+          </a:prstGeom>
+          <a:noFill/>
+        </p:spPr>
+        <p:txBody>
+          <a:bodyPr wrap="none" lIns="45720" rIns="45720" tIns="18288" bIns="18288" anchor="ctr">
+            <a:noAutofit/>
+          </a:bodyPr>
+          <a:lstStyle/>
+          <a:p>
+            <a:pPr algn="l"/>
+            <a:r>
+              <a:rPr sz="1810" b="0" i="0">
                 <a:solidFill>
                   <a:srgbClr val="1A1A1A"/>
                 </a:solidFill>
                 <a:latin typeface="Lexend"/>
               </a:rPr>
-              <a:t>A model boat is built at 1 : 40 and is 15 cm long. Find the real boat's length in meters.</a:t>
-            </a:r>
-          </a:p>
-        </p:txBody>
-      </p:sp>
-      <p:sp>
-        <p:nvSpPr>
-          <p:cNvPr id="18" name="TextBox 17"/>
-          <p:cNvSpPr txBox="1"/>
-          <p:nvPr/>
-        </p:nvSpPr>
-        <p:spPr>
-          <a:xfrm>
-            <a:off x="960120" y="5065776"/>
-            <a:ext cx="548640" cy="356616"/>
-          </a:xfrm>
-          <a:prstGeom prst="rect">
-            <a:avLst/>
-          </a:prstGeom>
-          <a:noFill/>
-        </p:spPr>
-        <p:txBody>
-          <a:bodyPr wrap="square" lIns="45720" rIns="45720" tIns="18288" bIns="18288" anchor="t">
-            <a:spAutoFit/>
-          </a:bodyPr>
-          <a:lstStyle/>
-          <a:p>
-            <a:pPr algn="l"/>
-            <a:r>
-              <a:rPr sz="1710" b="1" i="0">
+              <a:t>A model boat is built at </a:t>
+            </a:r>
+          </a:p>
+        </p:txBody>
+      </p:sp>
+      <p:pic>
+        <p:nvPicPr>
+          <p:cNvPr id="27" name="Picture 26" descr="701ad704adc58a0d.png"/>
+          <p:cNvPicPr>
+            <a:picLocks noChangeAspect="1"/>
+          </p:cNvPicPr>
+          <p:nvPr/>
+        </p:nvPicPr>
+        <p:blipFill>
+          <a:blip r:embed="rId5"/>
+          <a:stretch>
+            <a:fillRect/>
+          </a:stretch>
+        </p:blipFill>
+        <p:spPr>
+          <a:xfrm>
+            <a:off x="4438542" y="4047810"/>
+            <a:ext cx="569048" cy="186325"/>
+          </a:xfrm>
+          <a:prstGeom prst="rect">
+            <a:avLst/>
+          </a:prstGeom>
+        </p:spPr>
+      </p:pic>
+      <p:sp>
+        <p:nvSpPr>
+          <p:cNvPr id="28" name="TextBox 27"/>
+          <p:cNvSpPr txBox="1"/>
+          <p:nvPr/>
+        </p:nvSpPr>
+        <p:spPr>
+          <a:xfrm>
+            <a:off x="5007590" y="3952129"/>
+            <a:ext cx="5853713" cy="377686"/>
+          </a:xfrm>
+          <a:prstGeom prst="rect">
+            <a:avLst/>
+          </a:prstGeom>
+          <a:noFill/>
+        </p:spPr>
+        <p:txBody>
+          <a:bodyPr wrap="none" lIns="45720" rIns="45720" tIns="18288" bIns="18288" anchor="ctr">
+            <a:noAutofit/>
+          </a:bodyPr>
+          <a:lstStyle/>
+          <a:p>
+            <a:pPr algn="l"/>
+            <a:r>
+              <a:rPr sz="1810" b="0" i="0">
+                <a:solidFill>
+                  <a:srgbClr val="1A1A1A"/>
+                </a:solidFill>
+                <a:latin typeface="Lexend"/>
+              </a:rPr>
+              <a:t> and is 15 cm long. Find the real boat's length in </a:t>
+            </a:r>
+          </a:p>
+        </p:txBody>
+      </p:sp>
+      <p:sp>
+        <p:nvSpPr>
+          <p:cNvPr id="29" name="TextBox 28"/>
+          <p:cNvSpPr txBox="1"/>
+          <p:nvPr/>
+        </p:nvSpPr>
+        <p:spPr>
+          <a:xfrm>
+            <a:off x="1554480" y="4319479"/>
+            <a:ext cx="1080706" cy="377686"/>
+          </a:xfrm>
+          <a:prstGeom prst="rect">
+            <a:avLst/>
+          </a:prstGeom>
+          <a:noFill/>
+        </p:spPr>
+        <p:txBody>
+          <a:bodyPr wrap="none" lIns="45720" rIns="45720" tIns="18288" bIns="18288" anchor="ctr">
+            <a:noAutofit/>
+          </a:bodyPr>
+          <a:lstStyle/>
+          <a:p>
+            <a:pPr algn="l"/>
+            <a:r>
+              <a:rPr sz="1810" b="0" i="0">
+                <a:solidFill>
+                  <a:srgbClr val="1A1A1A"/>
+                </a:solidFill>
+                <a:latin typeface="Lexend"/>
+              </a:rPr>
+              <a:t>meters.</a:t>
+            </a:r>
+          </a:p>
+        </p:txBody>
+      </p:sp>
+      <p:sp>
+        <p:nvSpPr>
+          <p:cNvPr id="30" name="TextBox 29"/>
+          <p:cNvSpPr txBox="1"/>
+          <p:nvPr/>
+        </p:nvSpPr>
+        <p:spPr>
+          <a:xfrm>
+            <a:off x="960120" y="4787414"/>
+            <a:ext cx="548640" cy="377686"/>
+          </a:xfrm>
+          <a:prstGeom prst="rect">
+            <a:avLst/>
+          </a:prstGeom>
+          <a:noFill/>
+        </p:spPr>
+        <p:txBody>
+          <a:bodyPr wrap="square" lIns="45720" rIns="45720" tIns="18288" bIns="18288" anchor="ctr">
+            <a:spAutoFit/>
+          </a:bodyPr>
+          <a:lstStyle/>
+          <a:p>
+            <a:pPr algn="l"/>
+            <a:r>
+              <a:rPr sz="1810" b="1" i="0">
                 <a:solidFill>
                   <a:srgbClr val="0B5394"/>
                 </a:solidFill>
@@ -13966,35 +16271,70 @@
       </p:sp>
       <p:sp>
         <p:nvSpPr>
-          <p:cNvPr id="19" name="TextBox 18"/>
-          <p:cNvSpPr txBox="1"/>
-          <p:nvPr/>
-        </p:nvSpPr>
-        <p:spPr>
-          <a:xfrm>
-            <a:off x="1554480" y="5065776"/>
-            <a:ext cx="9829800" cy="768096"/>
-          </a:xfrm>
-          <a:prstGeom prst="rect">
-            <a:avLst/>
-          </a:prstGeom>
-          <a:noFill/>
-        </p:spPr>
-        <p:txBody>
-          <a:bodyPr wrap="square" lIns="45720" rIns="45720" tIns="18288" bIns="18288" anchor="t">
-            <a:spAutoFit/>
-          </a:bodyPr>
-          <a:lstStyle/>
-          <a:p>
-            <a:pPr algn="l"/>
-            <a:r>
-              <a:rPr sz="1710" b="0" i="0">
+          <p:cNvPr id="31" name="TextBox 30"/>
+          <p:cNvSpPr txBox="1"/>
+          <p:nvPr/>
+        </p:nvSpPr>
+        <p:spPr>
+          <a:xfrm>
+            <a:off x="1554480" y="4787414"/>
+            <a:ext cx="9800638" cy="377686"/>
+          </a:xfrm>
+          <a:prstGeom prst="rect">
+            <a:avLst/>
+          </a:prstGeom>
+          <a:noFill/>
+        </p:spPr>
+        <p:txBody>
+          <a:bodyPr wrap="none" lIns="45720" rIns="45720" tIns="18288" bIns="18288" anchor="ctr">
+            <a:noAutofit/>
+          </a:bodyPr>
+          <a:lstStyle/>
+          <a:p>
+            <a:pPr algn="l"/>
+            <a:r>
+              <a:rPr sz="1810" b="0" i="0">
                 <a:solidFill>
                   <a:srgbClr val="1A1A1A"/>
                 </a:solidFill>
                 <a:latin typeface="Lexend"/>
               </a:rPr>
-              <a:t>On a drawing a wall is 3 in long; the real wall is 16.5 ft. Another wall is 5 in long on the drawing. How long is it really?</a:t>
+              <a:t>On a drawing a wall is 3 in long; the real wall is 16.5 ft. Another wall is 5 in long on </a:t>
+            </a:r>
+          </a:p>
+        </p:txBody>
+      </p:sp>
+      <p:sp>
+        <p:nvSpPr>
+          <p:cNvPr id="32" name="TextBox 31"/>
+          <p:cNvSpPr txBox="1"/>
+          <p:nvPr/>
+        </p:nvSpPr>
+        <p:spPr>
+          <a:xfrm>
+            <a:off x="1554480" y="5154764"/>
+            <a:ext cx="4168876" cy="377686"/>
+          </a:xfrm>
+          <a:prstGeom prst="rect">
+            <a:avLst/>
+          </a:prstGeom>
+          <a:noFill/>
+        </p:spPr>
+        <p:txBody>
+          <a:bodyPr wrap="none" lIns="45720" rIns="45720" tIns="18288" bIns="18288" anchor="ctr">
+            <a:noAutofit/>
+          </a:bodyPr>
+          <a:lstStyle/>
+          <a:p>
+            <a:pPr algn="l"/>
+            <a:r>
+              <a:rPr sz="1810" b="0" i="0">
+                <a:solidFill>
+                  <a:srgbClr val="1A1A1A"/>
+                </a:solidFill>
+                <a:latin typeface="Lexend"/>
+              </a:rPr>
+              <a:t>the drawing. How long is it really?</a:t>
             </a:r>
           </a:p>
         </p:txBody>
@@ -14779,22 +17119,22 @@
         <p:spPr>
           <a:xfrm>
             <a:off x="777240" y="1463040"/>
-            <a:ext cx="10607040" cy="393589"/>
-          </a:xfrm>
-          <a:prstGeom prst="rect">
-            <a:avLst/>
-          </a:prstGeom>
-          <a:noFill/>
-        </p:spPr>
-        <p:txBody>
-          <a:bodyPr wrap="square" lIns="45720" rIns="45720" tIns="18288" bIns="18288" anchor="t">
-            <a:spAutoFit/>
-          </a:bodyPr>
-          <a:lstStyle/>
-          <a:p>
-            <a:pPr algn="l"/>
-            <a:r>
-              <a:rPr sz="2090" b="1" i="0">
+            <a:ext cx="10607040" cy="357808"/>
+          </a:xfrm>
+          <a:prstGeom prst="rect">
+            <a:avLst/>
+          </a:prstGeom>
+          <a:noFill/>
+        </p:spPr>
+        <p:txBody>
+          <a:bodyPr wrap="square" lIns="45720" rIns="45720" tIns="18288" bIns="18288" anchor="t">
+            <a:spAutoFit/>
+          </a:bodyPr>
+          <a:lstStyle/>
+          <a:p>
+            <a:pPr algn="l"/>
+            <a:r>
+              <a:rPr sz="1900" b="1" i="0">
                 <a:solidFill>
                   <a:srgbClr val="0B5394"/>
                 </a:solidFill>
@@ -14813,23 +17153,23 @@
         </p:nvSpPr>
         <p:spPr>
           <a:xfrm>
-            <a:off x="1143000" y="1856629"/>
-            <a:ext cx="10241280" cy="357808"/>
-          </a:xfrm>
-          <a:prstGeom prst="rect">
-            <a:avLst/>
-          </a:prstGeom>
-          <a:noFill/>
-        </p:spPr>
-        <p:txBody>
-          <a:bodyPr wrap="square" lIns="45720" rIns="45720" tIns="18288" bIns="18288" anchor="t">
-            <a:spAutoFit/>
-          </a:bodyPr>
-          <a:lstStyle/>
-          <a:p>
-            <a:pPr algn="l"/>
-            <a:r>
-              <a:rPr sz="1900" b="0" i="0">
+            <a:off x="1143000" y="1820848"/>
+            <a:ext cx="10241280" cy="322027"/>
+          </a:xfrm>
+          <a:prstGeom prst="rect">
+            <a:avLst/>
+          </a:prstGeom>
+          <a:noFill/>
+        </p:spPr>
+        <p:txBody>
+          <a:bodyPr wrap="square" lIns="45720" rIns="45720" tIns="18288" bIns="18288" anchor="t">
+            <a:spAutoFit/>
+          </a:bodyPr>
+          <a:lstStyle/>
+          <a:p>
+            <a:pPr algn="l"/>
+            <a:r>
+              <a:rPr sz="1710" b="0" i="0">
                 <a:solidFill>
                   <a:srgbClr val="1A1A1A"/>
                 </a:solidFill>
@@ -14848,23 +17188,23 @@
         </p:nvSpPr>
         <p:spPr>
           <a:xfrm>
-            <a:off x="777240" y="2452182"/>
-            <a:ext cx="10607040" cy="393589"/>
-          </a:xfrm>
-          <a:prstGeom prst="rect">
-            <a:avLst/>
-          </a:prstGeom>
-          <a:noFill/>
-        </p:spPr>
-        <p:txBody>
-          <a:bodyPr wrap="square" lIns="45720" rIns="45720" tIns="18288" bIns="18288" anchor="t">
-            <a:spAutoFit/>
-          </a:bodyPr>
-          <a:lstStyle/>
-          <a:p>
-            <a:pPr algn="l"/>
-            <a:r>
-              <a:rPr sz="2090" b="1" i="0">
+            <a:off x="777240" y="2380620"/>
+            <a:ext cx="10607040" cy="357808"/>
+          </a:xfrm>
+          <a:prstGeom prst="rect">
+            <a:avLst/>
+          </a:prstGeom>
+          <a:noFill/>
+        </p:spPr>
+        <p:txBody>
+          <a:bodyPr wrap="square" lIns="45720" rIns="45720" tIns="18288" bIns="18288" anchor="t">
+            <a:spAutoFit/>
+          </a:bodyPr>
+          <a:lstStyle/>
+          <a:p>
+            <a:pPr algn="l"/>
+            <a:r>
+              <a:rPr sz="1900" b="1" i="0">
                 <a:solidFill>
                   <a:srgbClr val="0B5394"/>
                 </a:solidFill>
@@ -14883,58 +17223,117 @@
         </p:nvSpPr>
         <p:spPr>
           <a:xfrm>
-            <a:off x="1143000" y="2845771"/>
-            <a:ext cx="10241280" cy="357808"/>
-          </a:xfrm>
-          <a:prstGeom prst="rect">
-            <a:avLst/>
-          </a:prstGeom>
-          <a:noFill/>
-        </p:spPr>
-        <p:txBody>
-          <a:bodyPr wrap="square" lIns="45720" rIns="45720" tIns="18288" bIns="18288" anchor="t">
-            <a:spAutoFit/>
-          </a:bodyPr>
-          <a:lstStyle/>
-          <a:p>
-            <a:pPr algn="l"/>
-            <a:r>
-              <a:rPr sz="1900" b="0" i="0">
+            <a:off x="1143000" y="2842061"/>
+            <a:ext cx="1906839" cy="457200"/>
+          </a:xfrm>
+          <a:prstGeom prst="rect">
+            <a:avLst/>
+          </a:prstGeom>
+          <a:noFill/>
+        </p:spPr>
+        <p:txBody>
+          <a:bodyPr wrap="none" lIns="45720" rIns="45720" tIns="18288" bIns="18288" anchor="ctr">
+            <a:noAutofit/>
+          </a:bodyPr>
+          <a:lstStyle/>
+          <a:p>
+            <a:pPr algn="l"/>
+            <a:r>
+              <a:rPr sz="1710" b="0" i="0">
                 <a:solidFill>
                   <a:srgbClr val="1A1A1A"/>
                 </a:solidFill>
                 <a:latin typeface="Lexend"/>
               </a:rPr>
-              <a:t>a ratio such as ¼ in : 1 ft — a drawing length and the real length it stands for</a:t>
-            </a:r>
-          </a:p>
-        </p:txBody>
-      </p:sp>
-      <p:sp>
-        <p:nvSpPr>
-          <p:cNvPr id="12" name="TextBox 11"/>
-          <p:cNvSpPr txBox="1"/>
-          <p:nvPr/>
-        </p:nvSpPr>
-        <p:spPr>
-          <a:xfrm>
-            <a:off x="777240" y="3441324"/>
-            <a:ext cx="10607040" cy="393589"/>
-          </a:xfrm>
-          <a:prstGeom prst="rect">
-            <a:avLst/>
-          </a:prstGeom>
-          <a:noFill/>
-        </p:spPr>
-        <p:txBody>
-          <a:bodyPr wrap="square" lIns="45720" rIns="45720" tIns="18288" bIns="18288" anchor="t">
-            <a:spAutoFit/>
-          </a:bodyPr>
-          <a:lstStyle/>
-          <a:p>
-            <a:pPr algn="l"/>
-            <a:r>
-              <a:rPr sz="2090" b="1" i="0">
+              <a:t>a ratio such as </a:t>
+            </a:r>
+          </a:p>
+        </p:txBody>
+      </p:sp>
+      <p:pic>
+        <p:nvPicPr>
+          <p:cNvPr id="12" name="Picture 11" descr="992378efc32c8a4e.png"/>
+          <p:cNvPicPr>
+            <a:picLocks noChangeAspect="1"/>
+          </p:cNvPicPr>
+          <p:nvPr/>
+        </p:nvPicPr>
+        <p:blipFill>
+          <a:blip r:embed="rId2"/>
+          <a:stretch>
+            <a:fillRect/>
+          </a:stretch>
+        </p:blipFill>
+        <p:spPr>
+          <a:xfrm>
+            <a:off x="2912679" y="2738429"/>
+            <a:ext cx="1456944" cy="664464"/>
+          </a:xfrm>
+          <a:prstGeom prst="rect">
+            <a:avLst/>
+          </a:prstGeom>
+        </p:spPr>
+      </p:pic>
+      <p:sp>
+        <p:nvSpPr>
+          <p:cNvPr id="13" name="TextBox 12"/>
+          <p:cNvSpPr txBox="1"/>
+          <p:nvPr/>
+        </p:nvSpPr>
+        <p:spPr>
+          <a:xfrm>
+            <a:off x="4369623" y="2842061"/>
+            <a:ext cx="6005482" cy="457200"/>
+          </a:xfrm>
+          <a:prstGeom prst="rect">
+            <a:avLst/>
+          </a:prstGeom>
+          <a:noFill/>
+        </p:spPr>
+        <p:txBody>
+          <a:bodyPr wrap="none" lIns="45720" rIns="45720" tIns="18288" bIns="18288" anchor="ctr">
+            <a:noAutofit/>
+          </a:bodyPr>
+          <a:lstStyle/>
+          <a:p>
+            <a:pPr algn="l"/>
+            <a:r>
+              <a:rPr sz="1710" b="0" i="0">
+                <a:solidFill>
+                  <a:srgbClr val="1A1A1A"/>
+                </a:solidFill>
+                <a:latin typeface="Lexend"/>
+              </a:rPr>
+              <a:t> — a drawing length and the real length it stands for</a:t>
+            </a:r>
+          </a:p>
+        </p:txBody>
+      </p:sp>
+      <p:sp>
+        <p:nvSpPr>
+          <p:cNvPr id="14" name="TextBox 13"/>
+          <p:cNvSpPr txBox="1"/>
+          <p:nvPr/>
+        </p:nvSpPr>
+        <p:spPr>
+          <a:xfrm>
+            <a:off x="777240" y="3604061"/>
+            <a:ext cx="10607040" cy="357808"/>
+          </a:xfrm>
+          <a:prstGeom prst="rect">
+            <a:avLst/>
+          </a:prstGeom>
+          <a:noFill/>
+        </p:spPr>
+        <p:txBody>
+          <a:bodyPr wrap="square" lIns="45720" rIns="45720" tIns="18288" bIns="18288" anchor="t">
+            <a:spAutoFit/>
+          </a:bodyPr>
+          <a:lstStyle/>
+          <a:p>
+            <a:pPr algn="l"/>
+            <a:r>
+              <a:rPr sz="1900" b="1" i="0">
                 <a:solidFill>
                   <a:srgbClr val="0B5394"/>
                 </a:solidFill>
@@ -14947,64 +17346,147 @@
       </p:sp>
       <p:sp>
         <p:nvSpPr>
-          <p:cNvPr id="13" name="TextBox 12"/>
-          <p:cNvSpPr txBox="1"/>
-          <p:nvPr/>
-        </p:nvSpPr>
-        <p:spPr>
-          <a:xfrm>
-            <a:off x="1143000" y="3834914"/>
-            <a:ext cx="10241280" cy="357808"/>
-          </a:xfrm>
-          <a:prstGeom prst="rect">
-            <a:avLst/>
-          </a:prstGeom>
-          <a:noFill/>
-        </p:spPr>
-        <p:txBody>
-          <a:bodyPr wrap="square" lIns="45720" rIns="45720" tIns="18288" bIns="18288" anchor="t">
-            <a:spAutoFit/>
-          </a:bodyPr>
-          <a:lstStyle/>
-          <a:p>
-            <a:pPr algn="l"/>
-            <a:r>
-              <a:rPr sz="1900" b="0" i="0">
+          <p:cNvPr id="15" name="TextBox 14"/>
+          <p:cNvSpPr txBox="1"/>
+          <p:nvPr/>
+        </p:nvSpPr>
+        <p:spPr>
+          <a:xfrm>
+            <a:off x="1143000" y="4065501"/>
+            <a:ext cx="4261196" cy="457200"/>
+          </a:xfrm>
+          <a:prstGeom prst="rect">
+            <a:avLst/>
+          </a:prstGeom>
+          <a:noFill/>
+        </p:spPr>
+        <p:txBody>
+          <a:bodyPr wrap="none" lIns="45720" rIns="45720" tIns="18288" bIns="18288" anchor="ctr">
+            <a:noAutofit/>
+          </a:bodyPr>
+          <a:lstStyle/>
+          <a:p>
+            <a:pPr algn="l"/>
+            <a:r>
+              <a:rPr sz="1710" b="0" i="0">
                 <a:solidFill>
                   <a:srgbClr val="1A1A1A"/>
                 </a:solidFill>
                 <a:latin typeface="Lexend"/>
               </a:rPr>
-              <a:t>the scale written per 1 drawing unit: ¼ in : 1 ft is 1 in : 4 ft</a:t>
-            </a:r>
-          </a:p>
-        </p:txBody>
-      </p:sp>
-      <p:sp>
-        <p:nvSpPr>
-          <p:cNvPr id="14" name="TextBox 13"/>
-          <p:cNvSpPr txBox="1"/>
-          <p:nvPr/>
-        </p:nvSpPr>
-        <p:spPr>
-          <a:xfrm>
-            <a:off x="777240" y="4430466"/>
-            <a:ext cx="10607040" cy="393589"/>
-          </a:xfrm>
-          <a:prstGeom prst="rect">
-            <a:avLst/>
-          </a:prstGeom>
-          <a:noFill/>
-        </p:spPr>
-        <p:txBody>
-          <a:bodyPr wrap="square" lIns="45720" rIns="45720" tIns="18288" bIns="18288" anchor="t">
-            <a:spAutoFit/>
-          </a:bodyPr>
-          <a:lstStyle/>
-          <a:p>
-            <a:pPr algn="l"/>
-            <a:r>
-              <a:rPr sz="2090" b="1" i="0">
+              <a:t>the scale written per 1 drawing unit: </a:t>
+            </a:r>
+          </a:p>
+        </p:txBody>
+      </p:sp>
+      <p:pic>
+        <p:nvPicPr>
+          <p:cNvPr id="16" name="Picture 15" descr="992378efc32c8a4e.png"/>
+          <p:cNvPicPr>
+            <a:picLocks noChangeAspect="1"/>
+          </p:cNvPicPr>
+          <p:nvPr/>
+        </p:nvPicPr>
+        <p:blipFill>
+          <a:blip r:embed="rId2"/>
+          <a:stretch>
+            <a:fillRect/>
+          </a:stretch>
+        </p:blipFill>
+        <p:spPr>
+          <a:xfrm>
+            <a:off x="5267036" y="3961869"/>
+            <a:ext cx="1456944" cy="664464"/>
+          </a:xfrm>
+          <a:prstGeom prst="rect">
+            <a:avLst/>
+          </a:prstGeom>
+        </p:spPr>
+      </p:pic>
+      <p:sp>
+        <p:nvSpPr>
+          <p:cNvPr id="17" name="TextBox 16"/>
+          <p:cNvSpPr txBox="1"/>
+          <p:nvPr/>
+        </p:nvSpPr>
+        <p:spPr>
+          <a:xfrm>
+            <a:off x="6723980" y="4065501"/>
+            <a:ext cx="513448" cy="457200"/>
+          </a:xfrm>
+          <a:prstGeom prst="rect">
+            <a:avLst/>
+          </a:prstGeom>
+          <a:noFill/>
+        </p:spPr>
+        <p:txBody>
+          <a:bodyPr wrap="none" lIns="45720" rIns="45720" tIns="18288" bIns="18288" anchor="ctr">
+            <a:noAutofit/>
+          </a:bodyPr>
+          <a:lstStyle/>
+          <a:p>
+            <a:pPr algn="l"/>
+            <a:r>
+              <a:rPr sz="1710" b="0" i="0">
+                <a:solidFill>
+                  <a:srgbClr val="1A1A1A"/>
+                </a:solidFill>
+                <a:latin typeface="Lexend"/>
+              </a:rPr>
+              <a:t> is </a:t>
+            </a:r>
+          </a:p>
+        </p:txBody>
+      </p:sp>
+      <p:pic>
+        <p:nvPicPr>
+          <p:cNvPr id="18" name="Picture 17" descr="2e89f08f987938e8.png"/>
+          <p:cNvPicPr>
+            <a:picLocks noChangeAspect="1"/>
+          </p:cNvPicPr>
+          <p:nvPr/>
+        </p:nvPicPr>
+        <p:blipFill>
+          <a:blip r:embed="rId3"/>
+          <a:stretch>
+            <a:fillRect/>
+          </a:stretch>
+        </p:blipFill>
+        <p:spPr>
+          <a:xfrm>
+            <a:off x="7100268" y="4084170"/>
+            <a:ext cx="1374648" cy="301752"/>
+          </a:xfrm>
+          <a:prstGeom prst="rect">
+            <a:avLst/>
+          </a:prstGeom>
+        </p:spPr>
+      </p:pic>
+      <p:sp>
+        <p:nvSpPr>
+          <p:cNvPr id="19" name="TextBox 18"/>
+          <p:cNvSpPr txBox="1"/>
+          <p:nvPr/>
+        </p:nvSpPr>
+        <p:spPr>
+          <a:xfrm>
+            <a:off x="777240" y="4827501"/>
+            <a:ext cx="10607040" cy="357808"/>
+          </a:xfrm>
+          <a:prstGeom prst="rect">
+            <a:avLst/>
+          </a:prstGeom>
+          <a:noFill/>
+        </p:spPr>
+        <p:txBody>
+          <a:bodyPr wrap="square" lIns="45720" rIns="45720" tIns="18288" bIns="18288" anchor="t">
+            <a:spAutoFit/>
+          </a:bodyPr>
+          <a:lstStyle/>
+          <a:p>
+            <a:pPr algn="l"/>
+            <a:r>
+              <a:rPr sz="1900" b="1" i="0">
                 <a:solidFill>
                   <a:srgbClr val="0B5394"/>
                 </a:solidFill>
@@ -15015,37 +17497,214 @@
           </a:p>
         </p:txBody>
       </p:sp>
-      <p:sp>
-        <p:nvSpPr>
-          <p:cNvPr id="15" name="TextBox 14"/>
-          <p:cNvSpPr txBox="1"/>
-          <p:nvPr/>
-        </p:nvSpPr>
-        <p:spPr>
-          <a:xfrm>
-            <a:off x="1143000" y="4824056"/>
-            <a:ext cx="10241280" cy="715617"/>
-          </a:xfrm>
-          <a:prstGeom prst="rect">
-            <a:avLst/>
-          </a:prstGeom>
-          <a:noFill/>
-        </p:spPr>
-        <p:txBody>
-          <a:bodyPr wrap="square" lIns="45720" rIns="45720" tIns="18288" bIns="18288" anchor="t">
-            <a:spAutoFit/>
-          </a:bodyPr>
-          <a:lstStyle/>
-          <a:p>
-            <a:pPr algn="l"/>
-            <a:r>
-              <a:rPr sz="1900" b="0" i="0">
+      <p:pic>
+        <p:nvPicPr>
+          <p:cNvPr id="20" name="Picture 19" descr="978f6528d2268aaa.png"/>
+          <p:cNvPicPr>
+            <a:picLocks noChangeAspect="1"/>
+          </p:cNvPicPr>
+          <p:nvPr/>
+        </p:nvPicPr>
+        <p:blipFill>
+          <a:blip r:embed="rId4"/>
+          <a:stretch>
+            <a:fillRect/>
+          </a:stretch>
+        </p:blipFill>
+        <p:spPr>
+          <a:xfrm>
+            <a:off x="1143000" y="5205503"/>
+            <a:ext cx="826008" cy="277368"/>
+          </a:xfrm>
+          <a:prstGeom prst="rect">
+            <a:avLst/>
+          </a:prstGeom>
+        </p:spPr>
+      </p:pic>
+      <p:sp>
+        <p:nvSpPr>
+          <p:cNvPr id="21" name="TextBox 20"/>
+          <p:cNvSpPr txBox="1"/>
+          <p:nvPr/>
+        </p:nvSpPr>
+        <p:spPr>
+          <a:xfrm>
+            <a:off x="1969008" y="5162450"/>
+            <a:ext cx="4887602" cy="457200"/>
+          </a:xfrm>
+          <a:prstGeom prst="rect">
+            <a:avLst/>
+          </a:prstGeom>
+          <a:noFill/>
+        </p:spPr>
+        <p:txBody>
+          <a:bodyPr wrap="none" lIns="45720" rIns="45720" tIns="18288" bIns="18288" anchor="ctr">
+            <a:noAutofit/>
+          </a:bodyPr>
+          <a:lstStyle/>
+          <a:p>
+            <a:pPr algn="l"/>
+            <a:r>
+              <a:rPr sz="1710" b="0" i="0">
                 <a:solidFill>
                   <a:srgbClr val="1A1A1A"/>
                 </a:solidFill>
                 <a:latin typeface="Lexend"/>
               </a:rPr>
-              <a:t>1 : 50 — no units: 1 cm of model is 50 cm of car. 1 in : 4 ft is 1 : 48 this way, and 48 is the scale factor</a:t>
+              <a:t> — no units: 1 cm of model is 50 cm of car. </a:t>
+            </a:r>
+          </a:p>
+        </p:txBody>
+      </p:sp>
+      <p:pic>
+        <p:nvPicPr>
+          <p:cNvPr id="22" name="Picture 21" descr="2e89f08f987938e8.png"/>
+          <p:cNvPicPr>
+            <a:picLocks noChangeAspect="1"/>
+          </p:cNvPicPr>
+          <p:nvPr/>
+        </p:nvPicPr>
+        <p:blipFill>
+          <a:blip r:embed="rId3"/>
+          <a:stretch>
+            <a:fillRect/>
+          </a:stretch>
+        </p:blipFill>
+        <p:spPr>
+          <a:xfrm>
+            <a:off x="6719450" y="5185310"/>
+            <a:ext cx="1374648" cy="301752"/>
+          </a:xfrm>
+          <a:prstGeom prst="rect">
+            <a:avLst/>
+          </a:prstGeom>
+        </p:spPr>
+      </p:pic>
+      <p:sp>
+        <p:nvSpPr>
+          <p:cNvPr id="23" name="TextBox 22"/>
+          <p:cNvSpPr txBox="1"/>
+          <p:nvPr/>
+        </p:nvSpPr>
+        <p:spPr>
+          <a:xfrm>
+            <a:off x="8094098" y="5162450"/>
+            <a:ext cx="513448" cy="457200"/>
+          </a:xfrm>
+          <a:prstGeom prst="rect">
+            <a:avLst/>
+          </a:prstGeom>
+          <a:noFill/>
+        </p:spPr>
+        <p:txBody>
+          <a:bodyPr wrap="none" lIns="45720" rIns="45720" tIns="18288" bIns="18288" anchor="ctr">
+            <a:noAutofit/>
+          </a:bodyPr>
+          <a:lstStyle/>
+          <a:p>
+            <a:pPr algn="l"/>
+            <a:r>
+              <a:rPr sz="1710" b="0" i="0">
+                <a:solidFill>
+                  <a:srgbClr val="1A1A1A"/>
+                </a:solidFill>
+                <a:latin typeface="Lexend"/>
+              </a:rPr>
+              <a:t> is </a:t>
+            </a:r>
+          </a:p>
+        </p:txBody>
+      </p:sp>
+      <p:pic>
+        <p:nvPicPr>
+          <p:cNvPr id="24" name="Picture 23" descr="f0627971b559795d.png"/>
+          <p:cNvPicPr>
+            <a:picLocks noChangeAspect="1"/>
+          </p:cNvPicPr>
+          <p:nvPr/>
+        </p:nvPicPr>
+        <p:blipFill>
+          <a:blip r:embed="rId5"/>
+          <a:stretch>
+            <a:fillRect/>
+          </a:stretch>
+        </p:blipFill>
+        <p:spPr>
+          <a:xfrm>
+            <a:off x="8470387" y="5205503"/>
+            <a:ext cx="832104" cy="277368"/>
+          </a:xfrm>
+          <a:prstGeom prst="rect">
+            <a:avLst/>
+          </a:prstGeom>
+        </p:spPr>
+      </p:pic>
+      <p:sp>
+        <p:nvSpPr>
+          <p:cNvPr id="25" name="TextBox 24"/>
+          <p:cNvSpPr txBox="1"/>
+          <p:nvPr/>
+        </p:nvSpPr>
+        <p:spPr>
+          <a:xfrm>
+            <a:off x="9302491" y="5162450"/>
+            <a:ext cx="1257652" cy="457200"/>
+          </a:xfrm>
+          <a:prstGeom prst="rect">
+            <a:avLst/>
+          </a:prstGeom>
+          <a:noFill/>
+        </p:spPr>
+        <p:txBody>
+          <a:bodyPr wrap="none" lIns="45720" rIns="45720" tIns="18288" bIns="18288" anchor="ctr">
+            <a:noAutofit/>
+          </a:bodyPr>
+          <a:lstStyle/>
+          <a:p>
+            <a:pPr algn="l"/>
+            <a:r>
+              <a:rPr sz="1710" b="0" i="0">
+                <a:solidFill>
+                  <a:srgbClr val="1A1A1A"/>
+                </a:solidFill>
+                <a:latin typeface="Lexend"/>
+              </a:rPr>
+              <a:t> this way,</a:t>
+            </a:r>
+          </a:p>
+        </p:txBody>
+      </p:sp>
+      <p:sp>
+        <p:nvSpPr>
+          <p:cNvPr id="26" name="TextBox 25"/>
+          <p:cNvSpPr txBox="1"/>
+          <p:nvPr/>
+        </p:nvSpPr>
+        <p:spPr>
+          <a:xfrm>
+            <a:off x="1143000" y="5647082"/>
+            <a:ext cx="3017475" cy="457200"/>
+          </a:xfrm>
+          <a:prstGeom prst="rect">
+            <a:avLst/>
+          </a:prstGeom>
+          <a:noFill/>
+        </p:spPr>
+        <p:txBody>
+          <a:bodyPr wrap="none" lIns="45720" rIns="45720" tIns="18288" bIns="18288" anchor="ctr">
+            <a:noAutofit/>
+          </a:bodyPr>
+          <a:lstStyle/>
+          <a:p>
+            <a:pPr algn="l"/>
+            <a:r>
+              <a:rPr sz="1710" b="0" i="0">
+                <a:solidFill>
+                  <a:srgbClr val="1A1A1A"/>
+                </a:solidFill>
+                <a:latin typeface="Lexend"/>
+              </a:rPr>
+              <a:t>and 48 is the scale factor</a:t>
             </a:r>
           </a:p>
         </p:txBody>
@@ -15745,7 +18404,7 @@
         </p:blipFill>
         <p:spPr>
           <a:xfrm>
-            <a:off x="4507992" y="5740907"/>
+            <a:off x="4507992" y="5705855"/>
             <a:ext cx="3145536" cy="341376"/>
           </a:xfrm>
           <a:prstGeom prst="rect">
@@ -16067,7 +18726,7 @@
         </p:blipFill>
         <p:spPr>
           <a:xfrm>
-            <a:off x="4931663" y="2048256"/>
+            <a:off x="4931663" y="2027301"/>
             <a:ext cx="2298192" cy="301752"/>
           </a:xfrm>
           <a:prstGeom prst="rect">
@@ -16364,7 +19023,101 @@
         </p:nvSpPr>
         <p:spPr>
           <a:xfrm>
-            <a:off x="777240" y="2103120"/>
+            <a:off x="3606016" y="1778507"/>
+            <a:ext cx="3757832" cy="457200"/>
+          </a:xfrm>
+          <a:prstGeom prst="rect">
+            <a:avLst/>
+          </a:prstGeom>
+          <a:noFill/>
+        </p:spPr>
+        <p:txBody>
+          <a:bodyPr wrap="none" lIns="45720" rIns="45720" tIns="18288" bIns="18288" anchor="ctr">
+            <a:noAutofit/>
+          </a:bodyPr>
+          <a:lstStyle/>
+          <a:p>
+            <a:pPr algn="l"/>
+            <a:r>
+              <a:rPr sz="2280" b="0" i="0">
+                <a:solidFill>
+                  <a:srgbClr val="1A1A1A"/>
+                </a:solidFill>
+                <a:latin typeface="Lexend"/>
+              </a:rPr>
+              <a:t>A floor plan is drawn at </a:t>
+            </a:r>
+          </a:p>
+        </p:txBody>
+      </p:sp>
+      <p:pic>
+        <p:nvPicPr>
+          <p:cNvPr id="9" name="Picture 8" descr="9ca189c78b28bad0.png"/>
+          <p:cNvPicPr>
+            <a:picLocks noChangeAspect="1"/>
+          </p:cNvPicPr>
+          <p:nvPr/>
+        </p:nvPicPr>
+        <p:blipFill>
+          <a:blip r:embed="rId2"/>
+          <a:stretch>
+            <a:fillRect/>
+          </a:stretch>
+        </p:blipFill>
+        <p:spPr>
+          <a:xfrm>
+            <a:off x="7226689" y="1737360"/>
+            <a:ext cx="1185672" cy="539496"/>
+          </a:xfrm>
+          <a:prstGeom prst="rect">
+            <a:avLst/>
+          </a:prstGeom>
+        </p:spPr>
+      </p:pic>
+      <p:sp>
+        <p:nvSpPr>
+          <p:cNvPr id="10" name="TextBox 9"/>
+          <p:cNvSpPr txBox="1"/>
+          <p:nvPr/>
+        </p:nvSpPr>
+        <p:spPr>
+          <a:xfrm>
+            <a:off x="8412361" y="1778507"/>
+            <a:ext cx="280301" cy="457200"/>
+          </a:xfrm>
+          <a:prstGeom prst="rect">
+            <a:avLst/>
+          </a:prstGeom>
+          <a:noFill/>
+        </p:spPr>
+        <p:txBody>
+          <a:bodyPr wrap="none" lIns="45720" rIns="45720" tIns="18288" bIns="18288" anchor="ctr">
+            <a:noAutofit/>
+          </a:bodyPr>
+          <a:lstStyle/>
+          <a:p>
+            <a:pPr algn="l"/>
+            <a:r>
+              <a:rPr sz="2280" b="0" i="0">
+                <a:solidFill>
+                  <a:srgbClr val="1A1A1A"/>
+                </a:solidFill>
+                <a:latin typeface="Lexend"/>
+              </a:rPr>
+              <a:t>.</a:t>
+            </a:r>
+          </a:p>
+        </p:txBody>
+      </p:sp>
+      <p:sp>
+        <p:nvSpPr>
+          <p:cNvPr id="11" name="TextBox 10"/>
+          <p:cNvSpPr txBox="1"/>
+          <p:nvPr/>
+        </p:nvSpPr>
+        <p:spPr>
+          <a:xfrm>
+            <a:off x="777240" y="2551175"/>
             <a:ext cx="10607040" cy="429370"/>
           </a:xfrm>
           <a:prstGeom prst="rect">
@@ -16386,20 +19139,20 @@
                 </a:solidFill>
                 <a:latin typeface="Lexend"/>
               </a:rPr>
-              <a:t>A floor plan is drawn at ¼ in : 1 ft. A room is 2.5 in by 3 in on the plan.</a:t>
-            </a:r>
-          </a:p>
-        </p:txBody>
-      </p:sp>
-      <p:sp>
-        <p:nvSpPr>
-          <p:cNvPr id="9" name="TextBox 8"/>
-          <p:cNvSpPr txBox="1"/>
-          <p:nvPr/>
-        </p:nvSpPr>
-        <p:spPr>
-          <a:xfrm>
-            <a:off x="777240" y="2825098"/>
+              <a:t>A room is 2.5 in by 3 in on the plan.</a:t>
+            </a:r>
+          </a:p>
+        </p:txBody>
+      </p:sp>
+      <p:sp>
+        <p:nvSpPr>
+          <p:cNvPr id="12" name="TextBox 11"/>
+          <p:cNvSpPr txBox="1"/>
+          <p:nvPr/>
+        </p:nvSpPr>
+        <p:spPr>
+          <a:xfrm>
+            <a:off x="777240" y="3273154"/>
             <a:ext cx="10607040" cy="429370"/>
           </a:xfrm>
           <a:prstGeom prst="rect">

--- a/a7/packages/A7 Unit 5 - Multi-Step Proportional Relationships/Lessons/5.04/A7 5.04 Real-World Scale Drawings - Slides.pptx
+++ b/a7/packages/A7 Unit 5 - Multi-Step Proportional Relationships/Lessons/5.04/A7 5.04 Real-World Scale Drawings - Slides.pptx
@@ -3673,7 +3673,7 @@
         </p:nvSpPr>
         <p:spPr>
           <a:xfrm>
-            <a:off x="3606016" y="1641348"/>
+            <a:off x="3606969" y="1641538"/>
             <a:ext cx="3757832" cy="457200"/>
           </a:xfrm>
           <a:prstGeom prst="rect">
@@ -3702,7 +3702,7 @@
       </p:sp>
       <p:pic>
         <p:nvPicPr>
-          <p:cNvPr id="9" name="Picture 8" descr="9ca189c78b28bad0.png"/>
+          <p:cNvPr id="9" name="Picture 8" descr="992378efc32c8a4e.png"/>
           <p:cNvPicPr>
             <a:picLocks noChangeAspect="1"/>
           </p:cNvPicPr>
@@ -3716,8 +3716,8 @@
         </p:blipFill>
         <p:spPr>
           <a:xfrm>
-            <a:off x="7226689" y="1600200"/>
-            <a:ext cx="1185672" cy="539496"/>
+            <a:off x="7227642" y="1600200"/>
+            <a:ext cx="1183766" cy="539877"/>
           </a:xfrm>
           <a:prstGeom prst="rect">
             <a:avLst/>
@@ -3732,7 +3732,7 @@
         </p:nvSpPr>
         <p:spPr>
           <a:xfrm>
-            <a:off x="8412361" y="1641348"/>
+            <a:off x="8411409" y="1641538"/>
             <a:ext cx="280301" cy="457200"/>
           </a:xfrm>
           <a:prstGeom prst="rect">
@@ -3767,7 +3767,7 @@
         </p:nvSpPr>
         <p:spPr>
           <a:xfrm>
-            <a:off x="777240" y="2414015"/>
+            <a:off x="777240" y="2414397"/>
             <a:ext cx="10607040" cy="429370"/>
           </a:xfrm>
           <a:prstGeom prst="rect">
@@ -3802,7 +3802,7 @@
         </p:nvSpPr>
         <p:spPr>
           <a:xfrm>
-            <a:off x="777240" y="2953114"/>
+            <a:off x="777240" y="2953495"/>
             <a:ext cx="10607040" cy="429370"/>
           </a:xfrm>
           <a:prstGeom prst="rect">
@@ -4065,7 +4065,7 @@
         </p:nvSpPr>
         <p:spPr>
           <a:xfrm>
-            <a:off x="3604492" y="1641348"/>
+            <a:off x="3605731" y="1642776"/>
             <a:ext cx="3757832" cy="457200"/>
           </a:xfrm>
           <a:prstGeom prst="rect">
@@ -4094,7 +4094,7 @@
       </p:sp>
       <p:pic>
         <p:nvPicPr>
-          <p:cNvPr id="9" name="Picture 8" descr="9141fd4a1e45fcc5.png"/>
+          <p:cNvPr id="9" name="Picture 8" descr="ea6ef832dff2cc77.png"/>
           <p:cNvPicPr>
             <a:picLocks noChangeAspect="1"/>
           </p:cNvPicPr>
@@ -4108,8 +4108,8 @@
         </p:blipFill>
         <p:spPr>
           <a:xfrm>
-            <a:off x="7225165" y="1600200"/>
-            <a:ext cx="1188720" cy="539496"/>
+            <a:off x="7226404" y="1600200"/>
+            <a:ext cx="1186243" cy="542353"/>
           </a:xfrm>
           <a:prstGeom prst="rect">
             <a:avLst/>
@@ -4124,7 +4124,7 @@
         </p:nvSpPr>
         <p:spPr>
           <a:xfrm>
-            <a:off x="8413885" y="1641348"/>
+            <a:off x="8412647" y="1642776"/>
             <a:ext cx="280301" cy="457200"/>
           </a:xfrm>
           <a:prstGeom prst="rect">
@@ -4159,7 +4159,7 @@
         </p:nvSpPr>
         <p:spPr>
           <a:xfrm>
-            <a:off x="777240" y="2414015"/>
+            <a:off x="777240" y="2416873"/>
             <a:ext cx="10607040" cy="429370"/>
           </a:xfrm>
           <a:prstGeom prst="rect">
@@ -4194,7 +4194,7 @@
         </p:nvSpPr>
         <p:spPr>
           <a:xfrm>
-            <a:off x="777240" y="2953114"/>
+            <a:off x="777240" y="2955971"/>
             <a:ext cx="10607040" cy="429370"/>
           </a:xfrm>
           <a:prstGeom prst="rect">
@@ -4237,7 +4237,7 @@
         </p:blipFill>
         <p:spPr>
           <a:xfrm>
-            <a:off x="4375403" y="3659281"/>
+            <a:off x="4375403" y="3662138"/>
             <a:ext cx="3523488" cy="256032"/>
           </a:xfrm>
           <a:prstGeom prst="rect">
@@ -4261,7 +4261,7 @@
         </p:blipFill>
         <p:spPr>
           <a:xfrm>
-            <a:off x="4375403" y="4195729"/>
+            <a:off x="4375403" y="4198586"/>
             <a:ext cx="1551432" cy="252984"/>
           </a:xfrm>
           <a:prstGeom prst="rect">
@@ -4277,7 +4277,7 @@
         </p:nvSpPr>
         <p:spPr>
           <a:xfrm>
-            <a:off x="777240" y="4653500"/>
+            <a:off x="777240" y="4656358"/>
             <a:ext cx="10607040" cy="548640"/>
           </a:xfrm>
           <a:prstGeom prst="rect">
@@ -5520,7 +5520,7 @@
       </p:sp>
       <p:pic>
         <p:nvPicPr>
-          <p:cNvPr id="10" name="Picture 9" descr="bbb8c08ba0d81647.png"/>
+          <p:cNvPr id="10" name="Picture 9" descr="b264694ef97dafb1.png"/>
           <p:cNvPicPr>
             <a:picLocks noChangeAspect="1"/>
           </p:cNvPicPr>
@@ -5534,8 +5534,8 @@
         </p:blipFill>
         <p:spPr>
           <a:xfrm>
-            <a:off x="4514874" y="3274835"/>
-            <a:ext cx="1642872" cy="256032"/>
+            <a:off x="4449052" y="3255452"/>
+            <a:ext cx="1777507" cy="275304"/>
           </a:xfrm>
           <a:prstGeom prst="rect">
             <a:avLst/>
@@ -5550,7 +5550,7 @@
         </p:nvSpPr>
         <p:spPr>
           <a:xfrm>
-            <a:off x="6157746" y="3158059"/>
+            <a:off x="6226560" y="3158059"/>
             <a:ext cx="1735787" cy="457200"/>
           </a:xfrm>
           <a:prstGeom prst="rect">
@@ -5593,7 +5593,7 @@
         </p:blipFill>
         <p:spPr>
           <a:xfrm>
-            <a:off x="4514874" y="3814331"/>
+            <a:off x="4449052" y="3814331"/>
             <a:ext cx="1923288" cy="256032"/>
           </a:xfrm>
           <a:prstGeom prst="rect">
@@ -5872,7 +5872,7 @@
         </p:nvSpPr>
         <p:spPr>
           <a:xfrm>
-            <a:off x="1234440" y="1917192"/>
+            <a:off x="1234440" y="1917096"/>
             <a:ext cx="2976011" cy="457200"/>
           </a:xfrm>
           <a:prstGeom prst="rect">
@@ -5901,7 +5901,7 @@
       </p:sp>
       <p:pic>
         <p:nvPicPr>
-          <p:cNvPr id="9" name="Picture 8" descr="e7b684faf8832363.png"/>
+          <p:cNvPr id="9" name="Picture 8" descr="a22f3f49cdf11ec2.png"/>
           <p:cNvPicPr>
             <a:picLocks noChangeAspect="1"/>
           </p:cNvPicPr>
@@ -5916,7 +5916,7 @@
         <p:spPr>
           <a:xfrm>
             <a:off x="4073291" y="1874519"/>
-            <a:ext cx="1161288" cy="542544"/>
+            <a:ext cx="1161478" cy="542353"/>
           </a:xfrm>
           <a:prstGeom prst="rect">
             <a:avLst/>
@@ -5931,7 +5931,7 @@
         </p:nvSpPr>
         <p:spPr>
           <a:xfrm>
-            <a:off x="5234579" y="1917192"/>
+            <a:off x="5234770" y="1917096"/>
             <a:ext cx="280301" cy="457200"/>
           </a:xfrm>
           <a:prstGeom prst="rect">
@@ -5966,7 +5966,7 @@
         </p:nvSpPr>
         <p:spPr>
           <a:xfrm>
-            <a:off x="1234440" y="2618232"/>
+            <a:off x="1234440" y="2618041"/>
             <a:ext cx="10058400" cy="429370"/>
           </a:xfrm>
           <a:prstGeom prst="rect">
@@ -6001,7 +6001,7 @@
         </p:nvSpPr>
         <p:spPr>
           <a:xfrm>
-            <a:off x="1234440" y="3157330"/>
+            <a:off x="1234440" y="3157139"/>
             <a:ext cx="10058400" cy="429370"/>
           </a:xfrm>
           <a:prstGeom prst="rect">
@@ -6299,7 +6299,7 @@
         </p:nvSpPr>
         <p:spPr>
           <a:xfrm>
-            <a:off x="1234440" y="1917192"/>
+            <a:off x="1234440" y="1918334"/>
             <a:ext cx="2976011" cy="457200"/>
           </a:xfrm>
           <a:prstGeom prst="rect">
@@ -6328,7 +6328,7 @@
       </p:sp>
       <p:pic>
         <p:nvPicPr>
-          <p:cNvPr id="9" name="Picture 8" descr="73bf4039381e9adf.png"/>
+          <p:cNvPr id="9" name="Picture 8" descr="ad7010ee96b3fed4.png"/>
           <p:cNvPicPr>
             <a:picLocks noChangeAspect="1"/>
           </p:cNvPicPr>
@@ -6343,7 +6343,7 @@
         <p:spPr>
           <a:xfrm>
             <a:off x="4073291" y="1874519"/>
-            <a:ext cx="1167384" cy="542544"/>
+            <a:ext cx="1163955" cy="544830"/>
           </a:xfrm>
           <a:prstGeom prst="rect">
             <a:avLst/>
@@ -6358,7 +6358,7 @@
         </p:nvSpPr>
         <p:spPr>
           <a:xfrm>
-            <a:off x="5240675" y="1917192"/>
+            <a:off x="5237246" y="1918334"/>
             <a:ext cx="280301" cy="457200"/>
           </a:xfrm>
           <a:prstGeom prst="rect">
@@ -6393,7 +6393,7 @@
         </p:nvSpPr>
         <p:spPr>
           <a:xfrm>
-            <a:off x="1234440" y="2618232"/>
+            <a:off x="1234440" y="2620518"/>
             <a:ext cx="10058400" cy="429370"/>
           </a:xfrm>
           <a:prstGeom prst="rect">
@@ -6428,7 +6428,7 @@
         </p:nvSpPr>
         <p:spPr>
           <a:xfrm>
-            <a:off x="1234440" y="3157330"/>
+            <a:off x="1234440" y="3159616"/>
             <a:ext cx="10058400" cy="429370"/>
           </a:xfrm>
           <a:prstGeom prst="rect">
@@ -6471,7 +6471,7 @@
         </p:blipFill>
         <p:spPr>
           <a:xfrm>
-            <a:off x="4605528" y="3815300"/>
+            <a:off x="4605528" y="3817586"/>
             <a:ext cx="3060192" cy="606552"/>
           </a:xfrm>
           <a:prstGeom prst="rect">
@@ -6495,7 +6495,7 @@
         </p:blipFill>
         <p:spPr>
           <a:xfrm>
-            <a:off x="4605528" y="4646833"/>
+            <a:off x="4605528" y="4649119"/>
             <a:ext cx="1210056" cy="249935"/>
           </a:xfrm>
           <a:prstGeom prst="rect">
@@ -6511,7 +6511,7 @@
         </p:nvSpPr>
         <p:spPr>
           <a:xfrm>
-            <a:off x="777240" y="5098508"/>
+            <a:off x="777240" y="5100794"/>
             <a:ext cx="10607040" cy="548640"/>
           </a:xfrm>
           <a:prstGeom prst="rect">
@@ -6803,7 +6803,7 @@
       </p:sp>
       <p:pic>
         <p:nvPicPr>
-          <p:cNvPr id="9" name="Picture 8" descr="d7e1b174636e6749.png"/>
+          <p:cNvPr id="9" name="Picture 8" descr="84427c8d2ac694af.png"/>
           <p:cNvPicPr>
             <a:picLocks noChangeAspect="1"/>
           </p:cNvPicPr>
@@ -6817,8 +6817,8 @@
         </p:blipFill>
         <p:spPr>
           <a:xfrm>
-            <a:off x="4073291" y="1956815"/>
-            <a:ext cx="1094232" cy="243840"/>
+            <a:off x="4073291" y="1954339"/>
+            <a:ext cx="1087183" cy="245173"/>
           </a:xfrm>
           <a:prstGeom prst="rect">
             <a:avLst/>
@@ -6833,7 +6833,7 @@
         </p:nvSpPr>
         <p:spPr>
           <a:xfrm>
-            <a:off x="5167523" y="1851660"/>
+            <a:off x="5160475" y="1851660"/>
             <a:ext cx="280301" cy="457200"/>
           </a:xfrm>
           <a:prstGeom prst="rect">
@@ -7230,7 +7230,7 @@
       </p:sp>
       <p:pic>
         <p:nvPicPr>
-          <p:cNvPr id="9" name="Picture 8" descr="bc94ef922c26df09.png"/>
+          <p:cNvPr id="9" name="Picture 8" descr="36f237721cbc450a.png"/>
           <p:cNvPicPr>
             <a:picLocks noChangeAspect="1"/>
           </p:cNvPicPr>
@@ -7244,8 +7244,8 @@
         </p:blipFill>
         <p:spPr>
           <a:xfrm>
-            <a:off x="4073291" y="1956815"/>
-            <a:ext cx="1094232" cy="243840"/>
+            <a:off x="4073291" y="1954339"/>
+            <a:ext cx="1087183" cy="245173"/>
           </a:xfrm>
           <a:prstGeom prst="rect">
             <a:avLst/>
@@ -7260,7 +7260,7 @@
         </p:nvSpPr>
         <p:spPr>
           <a:xfrm>
-            <a:off x="5167523" y="1851660"/>
+            <a:off x="5160475" y="1851660"/>
             <a:ext cx="280301" cy="457200"/>
           </a:xfrm>
           <a:prstGeom prst="rect">
@@ -7681,7 +7681,7 @@
       </p:sp>
       <p:pic>
         <p:nvPicPr>
-          <p:cNvPr id="9" name="Picture 8" descr="edb32a36259546d5.png"/>
+          <p:cNvPr id="9" name="Picture 8" descr="146e78fc0ae7d00c.png"/>
           <p:cNvPicPr>
             <a:picLocks noChangeAspect="1"/>
           </p:cNvPicPr>
@@ -7695,8 +7695,8 @@
         </p:blipFill>
         <p:spPr>
           <a:xfrm>
-            <a:off x="4739998" y="1507045"/>
-            <a:ext cx="786384" cy="277368"/>
+            <a:off x="4739998" y="1517253"/>
+            <a:ext cx="752340" cy="265811"/>
           </a:xfrm>
           <a:prstGeom prst="rect">
             <a:avLst/>
@@ -7711,7 +7711,7 @@
         </p:nvSpPr>
         <p:spPr>
           <a:xfrm>
-            <a:off x="5526382" y="1440180"/>
+            <a:off x="5492338" y="1440180"/>
             <a:ext cx="2026935" cy="457200"/>
           </a:xfrm>
           <a:prstGeom prst="rect">
@@ -7740,7 +7740,7 @@
       </p:sp>
       <p:pic>
         <p:nvPicPr>
-          <p:cNvPr id="11" name="Picture 10" descr="365db93adf7efc23.png"/>
+          <p:cNvPr id="11" name="Picture 10" descr="df787c7f4ce7736d.png"/>
           <p:cNvPicPr>
             <a:picLocks noChangeAspect="1"/>
           </p:cNvPicPr>
@@ -7754,8 +7754,8 @@
         </p:blipFill>
         <p:spPr>
           <a:xfrm>
-            <a:off x="7416157" y="1546669"/>
-            <a:ext cx="612648" cy="231648"/>
+            <a:off x="7382113" y="1555226"/>
+            <a:ext cx="586208" cy="223091"/>
           </a:xfrm>
           <a:prstGeom prst="rect">
             <a:avLst/>
@@ -7770,7 +7770,7 @@
         </p:nvSpPr>
         <p:spPr>
           <a:xfrm>
-            <a:off x="8028805" y="1440180"/>
+            <a:off x="7968321" y="1440180"/>
             <a:ext cx="2738367" cy="457200"/>
           </a:xfrm>
           <a:prstGeom prst="rect">
@@ -7869,7 +7869,7 @@
       </p:sp>
       <p:pic>
         <p:nvPicPr>
-          <p:cNvPr id="15" name="Picture 14" descr="7ec5cb8616fd94f3.png"/>
+          <p:cNvPr id="15" name="Picture 14" descr="5daa986ee9f3de63.png"/>
           <p:cNvPicPr>
             <a:picLocks noChangeAspect="1"/>
           </p:cNvPicPr>
@@ -7883,8 +7883,8 @@
         </p:blipFill>
         <p:spPr>
           <a:xfrm>
-            <a:off x="5012661" y="2784157"/>
-            <a:ext cx="1072896" cy="225552"/>
+            <a:off x="5012661" y="2792388"/>
+            <a:ext cx="1027644" cy="215971"/>
           </a:xfrm>
           <a:prstGeom prst="rect">
             <a:avLst/>
@@ -8191,7 +8191,7 @@
       </p:sp>
       <p:pic>
         <p:nvPicPr>
-          <p:cNvPr id="9" name="Picture 8" descr="d7e1b174636e6749.png"/>
+          <p:cNvPr id="9" name="Picture 8" descr="84427c8d2ac694af.png"/>
           <p:cNvPicPr>
             <a:picLocks noChangeAspect="1"/>
           </p:cNvPicPr>
@@ -8205,8 +8205,8 @@
         </p:blipFill>
         <p:spPr>
           <a:xfrm>
-            <a:off x="4073291" y="1956815"/>
-            <a:ext cx="1094232" cy="243840"/>
+            <a:off x="4073291" y="1954339"/>
+            <a:ext cx="1087183" cy="245173"/>
           </a:xfrm>
           <a:prstGeom prst="rect">
             <a:avLst/>
@@ -8221,7 +8221,7 @@
         </p:nvSpPr>
         <p:spPr>
           <a:xfrm>
-            <a:off x="5167523" y="1851660"/>
+            <a:off x="5160475" y="1851660"/>
             <a:ext cx="280301" cy="457200"/>
           </a:xfrm>
           <a:prstGeom prst="rect">
@@ -8618,7 +8618,7 @@
       </p:sp>
       <p:pic>
         <p:nvPicPr>
-          <p:cNvPr id="9" name="Picture 8" descr="bc94ef922c26df09.png"/>
+          <p:cNvPr id="9" name="Picture 8" descr="36f237721cbc450a.png"/>
           <p:cNvPicPr>
             <a:picLocks noChangeAspect="1"/>
           </p:cNvPicPr>
@@ -8632,8 +8632,8 @@
         </p:blipFill>
         <p:spPr>
           <a:xfrm>
-            <a:off x="4073291" y="1956815"/>
-            <a:ext cx="1094232" cy="243840"/>
+            <a:off x="4073291" y="1954339"/>
+            <a:ext cx="1087183" cy="245173"/>
           </a:xfrm>
           <a:prstGeom prst="rect">
             <a:avLst/>
@@ -8648,7 +8648,7 @@
         </p:nvSpPr>
         <p:spPr>
           <a:xfrm>
-            <a:off x="5167523" y="1851660"/>
+            <a:off x="5160475" y="1851660"/>
             <a:ext cx="280301" cy="457200"/>
           </a:xfrm>
           <a:prstGeom prst="rect">
@@ -9069,7 +9069,7 @@
       </p:sp>
       <p:pic>
         <p:nvPicPr>
-          <p:cNvPr id="9" name="Picture 8" descr="bea53fde14d6fb61.png"/>
+          <p:cNvPr id="9" name="Picture 8" descr="978f6528d2268aaa.png"/>
           <p:cNvPicPr>
             <a:picLocks noChangeAspect="1"/>
           </p:cNvPicPr>
@@ -9083,8 +9083,8 @@
         </p:blipFill>
         <p:spPr>
           <a:xfrm>
-            <a:off x="4645994" y="1975103"/>
-            <a:ext cx="673608" cy="225552"/>
+            <a:off x="4645994" y="1974151"/>
+            <a:ext cx="671131" cy="225361"/>
           </a:xfrm>
           <a:prstGeom prst="rect">
             <a:avLst/>
@@ -9099,7 +9099,7 @@
         </p:nvSpPr>
         <p:spPr>
           <a:xfrm>
-            <a:off x="5319602" y="1851660"/>
+            <a:off x="5317125" y="1851660"/>
             <a:ext cx="2782979" cy="457200"/>
           </a:xfrm>
           <a:prstGeom prst="rect">
@@ -9697,7 +9697,7 @@
       </p:sp>
       <p:pic>
         <p:nvPicPr>
-          <p:cNvPr id="9" name="Picture 8" descr="bea53fde14d6fb61.png"/>
+          <p:cNvPr id="9" name="Picture 8" descr="f950ae6c97c70c15.png"/>
           <p:cNvPicPr>
             <a:picLocks noChangeAspect="1"/>
           </p:cNvPicPr>
@@ -9711,8 +9711,8 @@
         </p:blipFill>
         <p:spPr>
           <a:xfrm>
-            <a:off x="4645994" y="1975103"/>
-            <a:ext cx="673608" cy="225552"/>
+            <a:off x="4645994" y="1974151"/>
+            <a:ext cx="673607" cy="225361"/>
           </a:xfrm>
           <a:prstGeom prst="rect">
             <a:avLst/>
@@ -9791,7 +9791,7 @@
       </p:sp>
       <p:pic>
         <p:nvPicPr>
-          <p:cNvPr id="12" name="Picture 11" descr="4fc1d381e1a99bac.png"/>
+          <p:cNvPr id="12" name="Picture 11" descr="f87205a9484c63db.png"/>
           <p:cNvPicPr>
             <a:picLocks noChangeAspect="1"/>
           </p:cNvPicPr>
@@ -9805,8 +9805,8 @@
         </p:blipFill>
         <p:spPr>
           <a:xfrm>
-            <a:off x="4826280" y="3242102"/>
-            <a:ext cx="1847088" cy="252984"/>
+            <a:off x="4776132" y="3222663"/>
+            <a:ext cx="2004933" cy="272311"/>
           </a:xfrm>
           <a:prstGeom prst="rect">
             <a:avLst/>
@@ -9821,7 +9821,7 @@
         </p:nvSpPr>
         <p:spPr>
           <a:xfrm>
-            <a:off x="6673368" y="3122278"/>
+            <a:off x="6781065" y="3122278"/>
             <a:ext cx="854203" cy="457200"/>
           </a:xfrm>
           <a:prstGeom prst="rect">
@@ -9864,7 +9864,7 @@
         </p:blipFill>
         <p:spPr>
           <a:xfrm>
-            <a:off x="4826280" y="3781598"/>
+            <a:off x="4776132" y="3781598"/>
             <a:ext cx="2103120" cy="252984"/>
           </a:xfrm>
           <a:prstGeom prst="rect">
@@ -9880,7 +9880,7 @@
         </p:nvSpPr>
         <p:spPr>
           <a:xfrm>
-            <a:off x="6929400" y="3661774"/>
+            <a:off x="6879252" y="3661774"/>
             <a:ext cx="655775" cy="457200"/>
           </a:xfrm>
           <a:prstGeom prst="rect">
@@ -10178,7 +10178,7 @@
         </p:nvSpPr>
         <p:spPr>
           <a:xfrm>
-            <a:off x="1234440" y="1915667"/>
+            <a:off x="1234440" y="1915858"/>
             <a:ext cx="2976011" cy="457200"/>
           </a:xfrm>
           <a:prstGeom prst="rect">
@@ -10207,7 +10207,7 @@
       </p:sp>
       <p:pic>
         <p:nvPicPr>
-          <p:cNvPr id="9" name="Picture 8" descr="9ca189c78b28bad0.png"/>
+          <p:cNvPr id="9" name="Picture 8" descr="992378efc32c8a4e.png"/>
           <p:cNvPicPr>
             <a:picLocks noChangeAspect="1"/>
           </p:cNvPicPr>
@@ -10222,7 +10222,7 @@
         <p:spPr>
           <a:xfrm>
             <a:off x="4073291" y="1874519"/>
-            <a:ext cx="1185672" cy="539496"/>
+            <a:ext cx="1183766" cy="539877"/>
           </a:xfrm>
           <a:prstGeom prst="rect">
             <a:avLst/>
@@ -10237,7 +10237,7 @@
         </p:nvSpPr>
         <p:spPr>
           <a:xfrm>
-            <a:off x="5258963" y="1915667"/>
+            <a:off x="5257058" y="1915858"/>
             <a:ext cx="280301" cy="457200"/>
           </a:xfrm>
           <a:prstGeom prst="rect">
@@ -10272,7 +10272,7 @@
         </p:nvSpPr>
         <p:spPr>
           <a:xfrm>
-            <a:off x="1234440" y="2615184"/>
+            <a:off x="1234440" y="2615565"/>
             <a:ext cx="10058400" cy="429370"/>
           </a:xfrm>
           <a:prstGeom prst="rect">
@@ -10307,7 +10307,7 @@
         </p:nvSpPr>
         <p:spPr>
           <a:xfrm>
-            <a:off x="1234440" y="3154282"/>
+            <a:off x="1234440" y="3154663"/>
             <a:ext cx="10058400" cy="429370"/>
           </a:xfrm>
           <a:prstGeom prst="rect">
@@ -10605,7 +10605,7 @@
         </p:nvSpPr>
         <p:spPr>
           <a:xfrm>
-            <a:off x="1234440" y="1915667"/>
+            <a:off x="1234440" y="1917096"/>
             <a:ext cx="2976011" cy="457200"/>
           </a:xfrm>
           <a:prstGeom prst="rect">
@@ -10634,7 +10634,7 @@
       </p:sp>
       <p:pic>
         <p:nvPicPr>
-          <p:cNvPr id="9" name="Picture 8" descr="9141fd4a1e45fcc5.png"/>
+          <p:cNvPr id="9" name="Picture 8" descr="ea6ef832dff2cc77.png"/>
           <p:cNvPicPr>
             <a:picLocks noChangeAspect="1"/>
           </p:cNvPicPr>
@@ -10649,7 +10649,7 @@
         <p:spPr>
           <a:xfrm>
             <a:off x="4073291" y="1874519"/>
-            <a:ext cx="1188720" cy="539496"/>
+            <a:ext cx="1186243" cy="542353"/>
           </a:xfrm>
           <a:prstGeom prst="rect">
             <a:avLst/>
@@ -10664,7 +10664,7 @@
         </p:nvSpPr>
         <p:spPr>
           <a:xfrm>
-            <a:off x="5262011" y="1915667"/>
+            <a:off x="5259535" y="1917096"/>
             <a:ext cx="280301" cy="457200"/>
           </a:xfrm>
           <a:prstGeom prst="rect">
@@ -10699,7 +10699,7 @@
         </p:nvSpPr>
         <p:spPr>
           <a:xfrm>
-            <a:off x="1234440" y="2615184"/>
+            <a:off x="1234440" y="2618041"/>
             <a:ext cx="10058400" cy="429370"/>
           </a:xfrm>
           <a:prstGeom prst="rect">
@@ -10734,7 +10734,7 @@
         </p:nvSpPr>
         <p:spPr>
           <a:xfrm>
-            <a:off x="1234440" y="3154282"/>
+            <a:off x="1234440" y="3157139"/>
             <a:ext cx="10058400" cy="429370"/>
           </a:xfrm>
           <a:prstGeom prst="rect">
@@ -10777,7 +10777,7 @@
         </p:blipFill>
         <p:spPr>
           <a:xfrm>
-            <a:off x="4197095" y="3887881"/>
+            <a:off x="4197095" y="3890738"/>
             <a:ext cx="3877056" cy="274320"/>
           </a:xfrm>
           <a:prstGeom prst="rect">
@@ -11085,7 +11085,7 @@
       </p:sp>
       <p:pic>
         <p:nvPicPr>
-          <p:cNvPr id="9" name="Picture 8" descr="69da27b14c874025.png"/>
+          <p:cNvPr id="9" name="Picture 8" descr="2e89f08f987938e8.png"/>
           <p:cNvPicPr>
             <a:picLocks noChangeAspect="1"/>
           </p:cNvPicPr>
@@ -11099,8 +11099,8 @@
         </p:blipFill>
         <p:spPr>
           <a:xfrm>
-            <a:off x="4073291" y="1956815"/>
-            <a:ext cx="1121664" cy="243840"/>
+            <a:off x="4073291" y="1954339"/>
+            <a:ext cx="1116901" cy="245173"/>
           </a:xfrm>
           <a:prstGeom prst="rect">
             <a:avLst/>
@@ -11115,7 +11115,7 @@
         </p:nvSpPr>
         <p:spPr>
           <a:xfrm>
-            <a:off x="5194955" y="1851660"/>
+            <a:off x="5190193" y="1851660"/>
             <a:ext cx="280301" cy="457200"/>
           </a:xfrm>
           <a:prstGeom prst="rect">
@@ -11748,7 +11748,7 @@
       </p:sp>
       <p:pic>
         <p:nvPicPr>
-          <p:cNvPr id="9" name="Picture 8" descr="0108e640f9a5d2fa.png"/>
+          <p:cNvPr id="9" name="Picture 8" descr="123cd4c222dc2b70.png"/>
           <p:cNvPicPr>
             <a:picLocks noChangeAspect="1"/>
           </p:cNvPicPr>
@@ -11762,8 +11762,8 @@
         </p:blipFill>
         <p:spPr>
           <a:xfrm>
-            <a:off x="4073291" y="1956815"/>
-            <a:ext cx="1121664" cy="243840"/>
+            <a:off x="4073291" y="1954339"/>
+            <a:ext cx="1116901" cy="245173"/>
           </a:xfrm>
           <a:prstGeom prst="rect">
             <a:avLst/>
@@ -11778,7 +11778,7 @@
         </p:nvSpPr>
         <p:spPr>
           <a:xfrm>
-            <a:off x="5194955" y="1851660"/>
+            <a:off x="5190193" y="1851660"/>
             <a:ext cx="280301" cy="457200"/>
           </a:xfrm>
           <a:prstGeom prst="rect">
@@ -12267,7 +12267,7 @@
       </p:sp>
       <p:pic>
         <p:nvPicPr>
-          <p:cNvPr id="10" name="Picture 9" descr="556f5c83e30f33be.png"/>
+          <p:cNvPr id="10" name="Picture 9" descr="f0627971b559795d.png"/>
           <p:cNvPicPr>
             <a:picLocks noChangeAspect="1"/>
           </p:cNvPicPr>
@@ -12281,8 +12281,8 @@
         </p:blipFill>
         <p:spPr>
           <a:xfrm>
-            <a:off x="5143862" y="2514202"/>
-            <a:ext cx="679704" cy="225552"/>
+            <a:off x="5143862" y="2513249"/>
+            <a:ext cx="676084" cy="225361"/>
           </a:xfrm>
           <a:prstGeom prst="rect">
             <a:avLst/>
@@ -12297,7 +12297,7 @@
         </p:nvSpPr>
         <p:spPr>
           <a:xfrm>
-            <a:off x="5823566" y="2390758"/>
+            <a:off x="5819946" y="2390758"/>
             <a:ext cx="2031880" cy="457200"/>
           </a:xfrm>
           <a:prstGeom prst="rect">
@@ -12326,7 +12326,7 @@
       </p:sp>
       <p:pic>
         <p:nvPicPr>
-          <p:cNvPr id="12" name="Picture 11" descr="3e9707db2572cbc9.png"/>
+          <p:cNvPr id="12" name="Picture 11" descr="ae14a7ed505182d9.png"/>
           <p:cNvPicPr>
             <a:picLocks noChangeAspect="1"/>
           </p:cNvPicPr>
@@ -12340,8 +12340,8 @@
         </p:blipFill>
         <p:spPr>
           <a:xfrm>
-            <a:off x="7718287" y="2514202"/>
-            <a:ext cx="652272" cy="225552"/>
+            <a:off x="7714667" y="2513249"/>
+            <a:ext cx="648843" cy="225361"/>
           </a:xfrm>
           <a:prstGeom prst="rect">
             <a:avLst/>
@@ -12356,7 +12356,7 @@
         </p:nvSpPr>
         <p:spPr>
           <a:xfrm>
-            <a:off x="8370559" y="2390758"/>
+            <a:off x="8363510" y="2390758"/>
             <a:ext cx="280301" cy="457200"/>
           </a:xfrm>
           <a:prstGeom prst="rect">
@@ -12753,7 +12753,7 @@
       </p:sp>
       <p:pic>
         <p:nvPicPr>
-          <p:cNvPr id="10" name="Picture 9" descr="556f5c83e30f33be.png"/>
+          <p:cNvPr id="10" name="Picture 9" descr="ea7aeef4c430443b.png"/>
           <p:cNvPicPr>
             <a:picLocks noChangeAspect="1"/>
           </p:cNvPicPr>
@@ -12767,8 +12767,8 @@
         </p:blipFill>
         <p:spPr>
           <a:xfrm>
-            <a:off x="5143862" y="2514202"/>
-            <a:ext cx="679704" cy="225552"/>
+            <a:off x="5143862" y="2513249"/>
+            <a:ext cx="676084" cy="225361"/>
           </a:xfrm>
           <a:prstGeom prst="rect">
             <a:avLst/>
@@ -12783,7 +12783,7 @@
         </p:nvSpPr>
         <p:spPr>
           <a:xfrm>
-            <a:off x="5823566" y="2390758"/>
+            <a:off x="5819946" y="2390758"/>
             <a:ext cx="2031880" cy="457200"/>
           </a:xfrm>
           <a:prstGeom prst="rect">
@@ -12812,7 +12812,7 @@
       </p:sp>
       <p:pic>
         <p:nvPicPr>
-          <p:cNvPr id="12" name="Picture 11" descr="3e9707db2572cbc9.png"/>
+          <p:cNvPr id="12" name="Picture 11" descr="ae14a7ed505182d9.png"/>
           <p:cNvPicPr>
             <a:picLocks noChangeAspect="1"/>
           </p:cNvPicPr>
@@ -12826,8 +12826,8 @@
         </p:blipFill>
         <p:spPr>
           <a:xfrm>
-            <a:off x="7718287" y="2514202"/>
-            <a:ext cx="652272" cy="225552"/>
+            <a:off x="7714667" y="2513249"/>
+            <a:ext cx="648843" cy="225361"/>
           </a:xfrm>
           <a:prstGeom prst="rect">
             <a:avLst/>
@@ -12842,7 +12842,7 @@
         </p:nvSpPr>
         <p:spPr>
           <a:xfrm>
-            <a:off x="8370559" y="2390758"/>
+            <a:off x="8363510" y="2390758"/>
             <a:ext cx="280301" cy="457200"/>
           </a:xfrm>
           <a:prstGeom prst="rect">
@@ -12906,7 +12906,7 @@
       </p:sp>
       <p:pic>
         <p:nvPicPr>
-          <p:cNvPr id="15" name="Picture 14" descr="5542fd061f65cd2d.png"/>
+          <p:cNvPr id="15" name="Picture 14" descr="a89ced5ccc91c1d0.png"/>
           <p:cNvPicPr>
             <a:picLocks noChangeAspect="1"/>
           </p:cNvPicPr>
@@ -12920,8 +12920,8 @@
         </p:blipFill>
         <p:spPr>
           <a:xfrm>
-            <a:off x="3973067" y="3778153"/>
-            <a:ext cx="1953768" cy="256032"/>
+            <a:off x="3973067" y="3758769"/>
+            <a:ext cx="2112660" cy="275304"/>
           </a:xfrm>
           <a:prstGeom prst="rect">
             <a:avLst/>
@@ -12936,7 +12936,7 @@
         </p:nvSpPr>
         <p:spPr>
           <a:xfrm>
-            <a:off x="5926835" y="3661376"/>
+            <a:off x="6085728" y="3661376"/>
             <a:ext cx="637940" cy="457200"/>
           </a:xfrm>
           <a:prstGeom prst="rect">
@@ -13287,7 +13287,7 @@
       </p:sp>
       <p:pic>
         <p:nvPicPr>
-          <p:cNvPr id="9" name="Picture 8" descr="edb32a36259546d5.png"/>
+          <p:cNvPr id="9" name="Picture 8" descr="146e78fc0ae7d00c.png"/>
           <p:cNvPicPr>
             <a:picLocks noChangeAspect="1"/>
           </p:cNvPicPr>
@@ -13301,8 +13301,8 @@
         </p:blipFill>
         <p:spPr>
           <a:xfrm>
-            <a:off x="4739998" y="1507045"/>
-            <a:ext cx="786384" cy="277368"/>
+            <a:off x="4739998" y="1517253"/>
+            <a:ext cx="752340" cy="265811"/>
           </a:xfrm>
           <a:prstGeom prst="rect">
             <a:avLst/>
@@ -13317,7 +13317,7 @@
         </p:nvSpPr>
         <p:spPr>
           <a:xfrm>
-            <a:off x="5526382" y="1440180"/>
+            <a:off x="5492338" y="1440180"/>
             <a:ext cx="2026935" cy="457200"/>
           </a:xfrm>
           <a:prstGeom prst="rect">
@@ -13346,7 +13346,7 @@
       </p:sp>
       <p:pic>
         <p:nvPicPr>
-          <p:cNvPr id="11" name="Picture 10" descr="365db93adf7efc23.png"/>
+          <p:cNvPr id="11" name="Picture 10" descr="df787c7f4ce7736d.png"/>
           <p:cNvPicPr>
             <a:picLocks noChangeAspect="1"/>
           </p:cNvPicPr>
@@ -13360,8 +13360,8 @@
         </p:blipFill>
         <p:spPr>
           <a:xfrm>
-            <a:off x="7416157" y="1546669"/>
-            <a:ext cx="612648" cy="231648"/>
+            <a:off x="7382113" y="1555226"/>
+            <a:ext cx="586208" cy="223091"/>
           </a:xfrm>
           <a:prstGeom prst="rect">
             <a:avLst/>
@@ -13376,7 +13376,7 @@
         </p:nvSpPr>
         <p:spPr>
           <a:xfrm>
-            <a:off x="8028805" y="1440180"/>
+            <a:off x="7968321" y="1440180"/>
             <a:ext cx="2738367" cy="457200"/>
           </a:xfrm>
           <a:prstGeom prst="rect">
@@ -13554,7 +13554,7 @@
       </p:sp>
       <p:pic>
         <p:nvPicPr>
-          <p:cNvPr id="17" name="Picture 16" descr="7ec5cb8616fd94f3.png"/>
+          <p:cNvPr id="17" name="Picture 16" descr="5daa986ee9f3de63.png"/>
           <p:cNvPicPr>
             <a:picLocks noChangeAspect="1"/>
           </p:cNvPicPr>
@@ -13568,8 +13568,8 @@
         </p:blipFill>
         <p:spPr>
           <a:xfrm>
-            <a:off x="5012661" y="3698557"/>
-            <a:ext cx="1072896" cy="225552"/>
+            <a:off x="5012661" y="3706788"/>
+            <a:ext cx="1027644" cy="215971"/>
           </a:xfrm>
           <a:prstGeom prst="rect">
             <a:avLst/>
@@ -13584,7 +13584,7 @@
         </p:nvSpPr>
         <p:spPr>
           <a:xfrm>
-            <a:off x="6634197" y="3579876"/>
+            <a:off x="6588946" y="3579876"/>
             <a:ext cx="630047" cy="457200"/>
           </a:xfrm>
           <a:prstGeom prst="rect">
@@ -13981,7 +13981,7 @@
       </p:sp>
       <p:pic>
         <p:nvPicPr>
-          <p:cNvPr id="10" name="Picture 9" descr="799b2639d3e366c8.png"/>
+          <p:cNvPr id="10" name="Picture 9" descr="a99ea26457b7317a.png"/>
           <p:cNvPicPr>
             <a:picLocks noChangeAspect="1"/>
           </p:cNvPicPr>
@@ -13995,8 +13995,8 @@
         </p:blipFill>
         <p:spPr>
           <a:xfrm>
-            <a:off x="4248889" y="2495914"/>
-            <a:ext cx="1097280" cy="243840"/>
+            <a:off x="4248889" y="2493437"/>
+            <a:ext cx="1094613" cy="245173"/>
           </a:xfrm>
           <a:prstGeom prst="rect">
             <a:avLst/>
@@ -14011,7 +14011,7 @@
         </p:nvSpPr>
         <p:spPr>
           <a:xfrm>
-            <a:off x="5346169" y="2390758"/>
+            <a:off x="5343502" y="2390758"/>
             <a:ext cx="280301" cy="457200"/>
           </a:xfrm>
           <a:prstGeom prst="rect">
@@ -14408,7 +14408,7 @@
       </p:sp>
       <p:pic>
         <p:nvPicPr>
-          <p:cNvPr id="10" name="Picture 9" descr="4cffcd08a805c9ef.png"/>
+          <p:cNvPr id="10" name="Picture 9" descr="815ebff852359ba1.png"/>
           <p:cNvPicPr>
             <a:picLocks noChangeAspect="1"/>
           </p:cNvPicPr>
@@ -14422,8 +14422,8 @@
         </p:blipFill>
         <p:spPr>
           <a:xfrm>
-            <a:off x="4248889" y="2495914"/>
-            <a:ext cx="1100328" cy="243840"/>
+            <a:off x="4248889" y="2493437"/>
+            <a:ext cx="1094613" cy="245173"/>
           </a:xfrm>
           <a:prstGeom prst="rect">
             <a:avLst/>
@@ -14438,7 +14438,7 @@
         </p:nvSpPr>
         <p:spPr>
           <a:xfrm>
-            <a:off x="5349217" y="2390758"/>
+            <a:off x="5343502" y="2390758"/>
             <a:ext cx="280301" cy="457200"/>
           </a:xfrm>
           <a:prstGeom prst="rect">
@@ -17119,22 +17119,22 @@
         <p:spPr>
           <a:xfrm>
             <a:off x="777240" y="1463040"/>
-            <a:ext cx="10607040" cy="357808"/>
-          </a:xfrm>
-          <a:prstGeom prst="rect">
-            <a:avLst/>
-          </a:prstGeom>
-          <a:noFill/>
-        </p:spPr>
-        <p:txBody>
-          <a:bodyPr wrap="square" lIns="45720" rIns="45720" tIns="18288" bIns="18288" anchor="t">
-            <a:spAutoFit/>
-          </a:bodyPr>
-          <a:lstStyle/>
-          <a:p>
-            <a:pPr algn="l"/>
-            <a:r>
-              <a:rPr sz="1900" b="1" i="0">
+            <a:ext cx="10607040" cy="393589"/>
+          </a:xfrm>
+          <a:prstGeom prst="rect">
+            <a:avLst/>
+          </a:prstGeom>
+          <a:noFill/>
+        </p:spPr>
+        <p:txBody>
+          <a:bodyPr wrap="square" lIns="45720" rIns="45720" tIns="18288" bIns="18288" anchor="t">
+            <a:spAutoFit/>
+          </a:bodyPr>
+          <a:lstStyle/>
+          <a:p>
+            <a:pPr algn="l"/>
+            <a:r>
+              <a:rPr sz="2090" b="1" i="0">
                 <a:solidFill>
                   <a:srgbClr val="0B5394"/>
                 </a:solidFill>
@@ -17153,23 +17153,23 @@
         </p:nvSpPr>
         <p:spPr>
           <a:xfrm>
-            <a:off x="1143000" y="1820848"/>
-            <a:ext cx="10241280" cy="322027"/>
-          </a:xfrm>
-          <a:prstGeom prst="rect">
-            <a:avLst/>
-          </a:prstGeom>
-          <a:noFill/>
-        </p:spPr>
-        <p:txBody>
-          <a:bodyPr wrap="square" lIns="45720" rIns="45720" tIns="18288" bIns="18288" anchor="t">
-            <a:spAutoFit/>
-          </a:bodyPr>
-          <a:lstStyle/>
-          <a:p>
-            <a:pPr algn="l"/>
-            <a:r>
-              <a:rPr sz="1710" b="0" i="0">
+            <a:off x="1143000" y="1856629"/>
+            <a:ext cx="10241280" cy="357808"/>
+          </a:xfrm>
+          <a:prstGeom prst="rect">
+            <a:avLst/>
+          </a:prstGeom>
+          <a:noFill/>
+        </p:spPr>
+        <p:txBody>
+          <a:bodyPr wrap="square" lIns="45720" rIns="45720" tIns="18288" bIns="18288" anchor="t">
+            <a:spAutoFit/>
+          </a:bodyPr>
+          <a:lstStyle/>
+          <a:p>
+            <a:pPr algn="l"/>
+            <a:r>
+              <a:rPr sz="1900" b="0" i="0">
                 <a:solidFill>
                   <a:srgbClr val="1A1A1A"/>
                 </a:solidFill>
@@ -17188,23 +17188,23 @@
         </p:nvSpPr>
         <p:spPr>
           <a:xfrm>
-            <a:off x="777240" y="2380620"/>
-            <a:ext cx="10607040" cy="357808"/>
-          </a:xfrm>
-          <a:prstGeom prst="rect">
-            <a:avLst/>
-          </a:prstGeom>
-          <a:noFill/>
-        </p:spPr>
-        <p:txBody>
-          <a:bodyPr wrap="square" lIns="45720" rIns="45720" tIns="18288" bIns="18288" anchor="t">
-            <a:spAutoFit/>
-          </a:bodyPr>
-          <a:lstStyle/>
-          <a:p>
-            <a:pPr algn="l"/>
-            <a:r>
-              <a:rPr sz="1900" b="1" i="0">
+            <a:off x="777240" y="2452182"/>
+            <a:ext cx="10607040" cy="393589"/>
+          </a:xfrm>
+          <a:prstGeom prst="rect">
+            <a:avLst/>
+          </a:prstGeom>
+          <a:noFill/>
+        </p:spPr>
+        <p:txBody>
+          <a:bodyPr wrap="square" lIns="45720" rIns="45720" tIns="18288" bIns="18288" anchor="t">
+            <a:spAutoFit/>
+          </a:bodyPr>
+          <a:lstStyle/>
+          <a:p>
+            <a:pPr algn="l"/>
+            <a:r>
+              <a:rPr sz="2090" b="1" i="0">
                 <a:solidFill>
                   <a:srgbClr val="0B5394"/>
                 </a:solidFill>
@@ -17223,8 +17223,8 @@
         </p:nvSpPr>
         <p:spPr>
           <a:xfrm>
-            <a:off x="1143000" y="2842061"/>
-            <a:ext cx="1906839" cy="457200"/>
+            <a:off x="1143000" y="2842120"/>
+            <a:ext cx="2095375" cy="457200"/>
           </a:xfrm>
           <a:prstGeom prst="rect">
             <a:avLst/>
@@ -17239,7 +17239,7 @@
           <a:p>
             <a:pPr algn="l"/>
             <a:r>
-              <a:rPr sz="1710" b="0" i="0">
+              <a:rPr sz="1900" b="0" i="0">
                 <a:solidFill>
                   <a:srgbClr val="1A1A1A"/>
                 </a:solidFill>
@@ -17266,8 +17266,8 @@
         </p:blipFill>
         <p:spPr>
           <a:xfrm>
-            <a:off x="2912679" y="2738429"/>
-            <a:ext cx="1456944" cy="664464"/>
+            <a:off x="3101215" y="2845771"/>
+            <a:ext cx="986472" cy="449897"/>
           </a:xfrm>
           <a:prstGeom prst="rect">
             <a:avLst/>
@@ -17282,8 +17282,8 @@
         </p:nvSpPr>
         <p:spPr>
           <a:xfrm>
-            <a:off x="4369623" y="2842061"/>
-            <a:ext cx="6005482" cy="457200"/>
+            <a:off x="4087688" y="2842120"/>
+            <a:ext cx="6649323" cy="457200"/>
           </a:xfrm>
           <a:prstGeom prst="rect">
             <a:avLst/>
@@ -17298,7 +17298,7 @@
           <a:p>
             <a:pPr algn="l"/>
             <a:r>
-              <a:rPr sz="1710" b="0" i="0">
+              <a:rPr sz="1900" b="0" i="0">
                 <a:solidFill>
                   <a:srgbClr val="1A1A1A"/>
                 </a:solidFill>
@@ -17317,23 +17317,23 @@
         </p:nvSpPr>
         <p:spPr>
           <a:xfrm>
-            <a:off x="777240" y="3604061"/>
-            <a:ext cx="10607040" cy="357808"/>
-          </a:xfrm>
-          <a:prstGeom prst="rect">
-            <a:avLst/>
-          </a:prstGeom>
-          <a:noFill/>
-        </p:spPr>
-        <p:txBody>
-          <a:bodyPr wrap="square" lIns="45720" rIns="45720" tIns="18288" bIns="18288" anchor="t">
-            <a:spAutoFit/>
-          </a:bodyPr>
-          <a:lstStyle/>
-          <a:p>
-            <a:pPr algn="l"/>
-            <a:r>
-              <a:rPr sz="1900" b="1" i="0">
+            <a:off x="777240" y="3496837"/>
+            <a:ext cx="10607040" cy="393589"/>
+          </a:xfrm>
+          <a:prstGeom prst="rect">
+            <a:avLst/>
+          </a:prstGeom>
+          <a:noFill/>
+        </p:spPr>
+        <p:txBody>
+          <a:bodyPr wrap="square" lIns="45720" rIns="45720" tIns="18288" bIns="18288" anchor="t">
+            <a:spAutoFit/>
+          </a:bodyPr>
+          <a:lstStyle/>
+          <a:p>
+            <a:pPr algn="l"/>
+            <a:r>
+              <a:rPr sz="2090" b="1" i="0">
                 <a:solidFill>
                   <a:srgbClr val="0B5394"/>
                 </a:solidFill>
@@ -17352,8 +17352,8 @@
         </p:nvSpPr>
         <p:spPr>
           <a:xfrm>
-            <a:off x="1143000" y="4065501"/>
-            <a:ext cx="4261196" cy="457200"/>
+            <a:off x="1143000" y="3886775"/>
+            <a:ext cx="4711305" cy="457200"/>
           </a:xfrm>
           <a:prstGeom prst="rect">
             <a:avLst/>
@@ -17368,7 +17368,7 @@
           <a:p>
             <a:pPr algn="l"/>
             <a:r>
-              <a:rPr sz="1710" b="0" i="0">
+              <a:rPr sz="1900" b="0" i="0">
                 <a:solidFill>
                   <a:srgbClr val="1A1A1A"/>
                 </a:solidFill>
@@ -17395,8 +17395,8 @@
         </p:blipFill>
         <p:spPr>
           <a:xfrm>
-            <a:off x="5267036" y="3961869"/>
-            <a:ext cx="1456944" cy="664464"/>
+            <a:off x="5717145" y="3890426"/>
+            <a:ext cx="986472" cy="449897"/>
           </a:xfrm>
           <a:prstGeom prst="rect">
             <a:avLst/>
@@ -17411,8 +17411,8 @@
         </p:nvSpPr>
         <p:spPr>
           <a:xfrm>
-            <a:off x="6723980" y="4065501"/>
-            <a:ext cx="513448" cy="457200"/>
+            <a:off x="6703617" y="3886775"/>
+            <a:ext cx="547169" cy="457200"/>
           </a:xfrm>
           <a:prstGeom prst="rect">
             <a:avLst/>
@@ -17427,7 +17427,7 @@
           <a:p>
             <a:pPr algn="l"/>
             <a:r>
-              <a:rPr sz="1710" b="0" i="0">
+              <a:rPr sz="1900" b="0" i="0">
                 <a:solidFill>
                   <a:srgbClr val="1A1A1A"/>
                 </a:solidFill>
@@ -17454,8 +17454,8 @@
         </p:blipFill>
         <p:spPr>
           <a:xfrm>
-            <a:off x="7100268" y="4084170"/>
-            <a:ext cx="1374648" cy="301752"/>
+            <a:off x="7113627" y="4010441"/>
+            <a:ext cx="930751" cy="204311"/>
           </a:xfrm>
           <a:prstGeom prst="rect">
             <a:avLst/>
@@ -17470,23 +17470,23 @@
         </p:nvSpPr>
         <p:spPr>
           <a:xfrm>
-            <a:off x="777240" y="4827501"/>
-            <a:ext cx="10607040" cy="357808"/>
-          </a:xfrm>
-          <a:prstGeom prst="rect">
-            <a:avLst/>
-          </a:prstGeom>
-          <a:noFill/>
-        </p:spPr>
-        <p:txBody>
-          <a:bodyPr wrap="square" lIns="45720" rIns="45720" tIns="18288" bIns="18288" anchor="t">
-            <a:spAutoFit/>
-          </a:bodyPr>
-          <a:lstStyle/>
-          <a:p>
-            <a:pPr algn="l"/>
-            <a:r>
-              <a:rPr sz="1900" b="1" i="0">
+            <a:off x="777240" y="4541492"/>
+            <a:ext cx="10607040" cy="393589"/>
+          </a:xfrm>
+          <a:prstGeom prst="rect">
+            <a:avLst/>
+          </a:prstGeom>
+          <a:noFill/>
+        </p:spPr>
+        <p:txBody>
+          <a:bodyPr wrap="square" lIns="45720" rIns="45720" tIns="18288" bIns="18288" anchor="t">
+            <a:spAutoFit/>
+          </a:bodyPr>
+          <a:lstStyle/>
+          <a:p>
+            <a:pPr algn="l"/>
+            <a:r>
+              <a:rPr sz="2090" b="1" i="0">
                 <a:solidFill>
                   <a:srgbClr val="0B5394"/>
                 </a:solidFill>
@@ -17513,8 +17513,8 @@
         </p:blipFill>
         <p:spPr>
           <a:xfrm>
-            <a:off x="1143000" y="5205503"/>
-            <a:ext cx="826008" cy="277368"/>
+            <a:off x="1143000" y="5052398"/>
+            <a:ext cx="559276" cy="187801"/>
           </a:xfrm>
           <a:prstGeom prst="rect">
             <a:avLst/>
@@ -17529,8 +17529,8 @@
         </p:nvSpPr>
         <p:spPr>
           <a:xfrm>
-            <a:off x="1969008" y="5162450"/>
-            <a:ext cx="4887602" cy="457200"/>
+            <a:off x="1702276" y="4912221"/>
+            <a:ext cx="5407601" cy="457200"/>
           </a:xfrm>
           <a:prstGeom prst="rect">
             <a:avLst/>
@@ -17545,7 +17545,7 @@
           <a:p>
             <a:pPr algn="l"/>
             <a:r>
-              <a:rPr sz="1710" b="0" i="0">
+              <a:rPr sz="1900" b="0" i="0">
                 <a:solidFill>
                   <a:srgbClr val="1A1A1A"/>
                 </a:solidFill>
@@ -17572,8 +17572,8 @@
         </p:blipFill>
         <p:spPr>
           <a:xfrm>
-            <a:off x="6719450" y="5185310"/>
-            <a:ext cx="1374648" cy="301752"/>
+            <a:off x="6972717" y="5035888"/>
+            <a:ext cx="930751" cy="204311"/>
           </a:xfrm>
           <a:prstGeom prst="rect">
             <a:avLst/>
@@ -17588,8 +17588,8 @@
         </p:nvSpPr>
         <p:spPr>
           <a:xfrm>
-            <a:off x="8094098" y="5162450"/>
-            <a:ext cx="513448" cy="457200"/>
+            <a:off x="7903468" y="4912221"/>
+            <a:ext cx="547169" cy="457200"/>
           </a:xfrm>
           <a:prstGeom prst="rect">
             <a:avLst/>
@@ -17604,7 +17604,7 @@
           <a:p>
             <a:pPr algn="l"/>
             <a:r>
-              <a:rPr sz="1710" b="0" i="0">
+              <a:rPr sz="1900" b="0" i="0">
                 <a:solidFill>
                   <a:srgbClr val="1A1A1A"/>
                 </a:solidFill>
@@ -17631,8 +17631,8 @@
         </p:blipFill>
         <p:spPr>
           <a:xfrm>
-            <a:off x="8470387" y="5205503"/>
-            <a:ext cx="832104" cy="277368"/>
+            <a:off x="8313478" y="5052398"/>
+            <a:ext cx="563403" cy="187801"/>
           </a:xfrm>
           <a:prstGeom prst="rect">
             <a:avLst/>
@@ -17647,8 +17647,8 @@
         </p:nvSpPr>
         <p:spPr>
           <a:xfrm>
-            <a:off x="9302491" y="5162450"/>
-            <a:ext cx="1257652" cy="457200"/>
+            <a:off x="8876881" y="4912221"/>
+            <a:ext cx="1374101" cy="457200"/>
           </a:xfrm>
           <a:prstGeom prst="rect">
             <a:avLst/>
@@ -17663,7 +17663,7 @@
           <a:p>
             <a:pPr algn="l"/>
             <a:r>
-              <a:rPr sz="1710" b="0" i="0">
+              <a:rPr sz="1900" b="0" i="0">
                 <a:solidFill>
                   <a:srgbClr val="1A1A1A"/>
                 </a:solidFill>
@@ -17682,8 +17682,8 @@
         </p:nvSpPr>
         <p:spPr>
           <a:xfrm>
-            <a:off x="1143000" y="5647082"/>
-            <a:ext cx="3017475" cy="457200"/>
+            <a:off x="1143000" y="5396853"/>
+            <a:ext cx="3329404" cy="457200"/>
           </a:xfrm>
           <a:prstGeom prst="rect">
             <a:avLst/>
@@ -17698,7 +17698,7 @@
           <a:p>
             <a:pPr algn="l"/>
             <a:r>
-              <a:rPr sz="1710" b="0" i="0">
+              <a:rPr sz="1900" b="0" i="0">
                 <a:solidFill>
                   <a:srgbClr val="1A1A1A"/>
                 </a:solidFill>
@@ -19023,7 +19023,7 @@
         </p:nvSpPr>
         <p:spPr>
           <a:xfrm>
-            <a:off x="3606016" y="1778507"/>
+            <a:off x="3606969" y="1778698"/>
             <a:ext cx="3757832" cy="457200"/>
           </a:xfrm>
           <a:prstGeom prst="rect">
@@ -19052,7 +19052,7 @@
       </p:sp>
       <p:pic>
         <p:nvPicPr>
-          <p:cNvPr id="9" name="Picture 8" descr="9ca189c78b28bad0.png"/>
+          <p:cNvPr id="9" name="Picture 8" descr="992378efc32c8a4e.png"/>
           <p:cNvPicPr>
             <a:picLocks noChangeAspect="1"/>
           </p:cNvPicPr>
@@ -19066,8 +19066,8 @@
         </p:blipFill>
         <p:spPr>
           <a:xfrm>
-            <a:off x="7226689" y="1737360"/>
-            <a:ext cx="1185672" cy="539496"/>
+            <a:off x="7227642" y="1737360"/>
+            <a:ext cx="1183766" cy="539877"/>
           </a:xfrm>
           <a:prstGeom prst="rect">
             <a:avLst/>
@@ -19082,7 +19082,7 @@
         </p:nvSpPr>
         <p:spPr>
           <a:xfrm>
-            <a:off x="8412361" y="1778507"/>
+            <a:off x="8411409" y="1778698"/>
             <a:ext cx="280301" cy="457200"/>
           </a:xfrm>
           <a:prstGeom prst="rect">
@@ -19117,7 +19117,7 @@
         </p:nvSpPr>
         <p:spPr>
           <a:xfrm>
-            <a:off x="777240" y="2551175"/>
+            <a:off x="777240" y="2551556"/>
             <a:ext cx="10607040" cy="429370"/>
           </a:xfrm>
           <a:prstGeom prst="rect">
@@ -19152,7 +19152,7 @@
         </p:nvSpPr>
         <p:spPr>
           <a:xfrm>
-            <a:off x="777240" y="3273154"/>
+            <a:off x="777240" y="3273535"/>
             <a:ext cx="10607040" cy="429370"/>
           </a:xfrm>
           <a:prstGeom prst="rect">

--- a/a7/packages/A7 Unit 5 - Multi-Step Proportional Relationships/Lessons/5.04/A7 5.04 Real-World Scale Drawings - Slides.pptx
+++ b/a7/packages/A7 Unit 5 - Multi-Step Proportional Relationships/Lessons/5.04/A7 5.04 Real-World Scale Drawings - Slides.pptx
@@ -5534,8 +5534,8 @@
         </p:blipFill>
         <p:spPr>
           <a:xfrm>
-            <a:off x="4449052" y="3255452"/>
-            <a:ext cx="1777507" cy="275304"/>
+            <a:off x="4517302" y="3276169"/>
+            <a:ext cx="1640776" cy="254126"/>
           </a:xfrm>
           <a:prstGeom prst="rect">
             <a:avLst/>
@@ -5550,7 +5550,7 @@
         </p:nvSpPr>
         <p:spPr>
           <a:xfrm>
-            <a:off x="6226560" y="3158059"/>
+            <a:off x="6158079" y="3158059"/>
             <a:ext cx="1735787" cy="457200"/>
           </a:xfrm>
           <a:prstGeom prst="rect">
@@ -5593,7 +5593,7 @@
         </p:blipFill>
         <p:spPr>
           <a:xfrm>
-            <a:off x="4449052" y="3814331"/>
+            <a:off x="4517302" y="3814331"/>
             <a:ext cx="1923288" cy="256032"/>
           </a:xfrm>
           <a:prstGeom prst="rect">
@@ -9805,8 +9805,8 @@
         </p:blipFill>
         <p:spPr>
           <a:xfrm>
-            <a:off x="4776132" y="3222663"/>
-            <a:ext cx="2004933" cy="272311"/>
+            <a:off x="4826280" y="3243150"/>
+            <a:ext cx="1850707" cy="251364"/>
           </a:xfrm>
           <a:prstGeom prst="rect">
             <a:avLst/>
@@ -9821,7 +9821,7 @@
         </p:nvSpPr>
         <p:spPr>
           <a:xfrm>
-            <a:off x="6781065" y="3122278"/>
+            <a:off x="6676987" y="3122278"/>
             <a:ext cx="854203" cy="457200"/>
           </a:xfrm>
           <a:prstGeom prst="rect">
@@ -9864,7 +9864,7 @@
         </p:blipFill>
         <p:spPr>
           <a:xfrm>
-            <a:off x="4776132" y="3781598"/>
+            <a:off x="4826280" y="3781598"/>
             <a:ext cx="2103120" cy="252984"/>
           </a:xfrm>
           <a:prstGeom prst="rect">
@@ -9880,7 +9880,7 @@
         </p:nvSpPr>
         <p:spPr>
           <a:xfrm>
-            <a:off x="6879252" y="3661774"/>
+            <a:off x="6929400" y="3661774"/>
             <a:ext cx="655775" cy="457200"/>
           </a:xfrm>
           <a:prstGeom prst="rect">
@@ -12920,8 +12920,8 @@
         </p:blipFill>
         <p:spPr>
           <a:xfrm>
-            <a:off x="3973067" y="3758769"/>
-            <a:ext cx="2112660" cy="275304"/>
+            <a:off x="3973067" y="3779486"/>
+            <a:ext cx="1950148" cy="254126"/>
           </a:xfrm>
           <a:prstGeom prst="rect">
             <a:avLst/>
@@ -12936,7 +12936,7 @@
         </p:nvSpPr>
         <p:spPr>
           <a:xfrm>
-            <a:off x="6085728" y="3661376"/>
+            <a:off x="5923216" y="3661376"/>
             <a:ext cx="637940" cy="457200"/>
           </a:xfrm>
           <a:prstGeom prst="rect">

--- a/a7/packages/A7 Unit 5 - Multi-Step Proportional Relationships/Lessons/5.04/A7 5.04 Real-World Scale Drawings - Slides.pptx
+++ b/a7/packages/A7 Unit 5 - Multi-Step Proportional Relationships/Lessons/5.04/A7 5.04 Real-World Scale Drawings - Slides.pptx
@@ -18023,7 +18023,7 @@
         </p:blipFill>
         <p:spPr>
           <a:xfrm>
-            <a:off x="3939539" y="1993392"/>
+            <a:off x="3939539" y="2194560"/>
             <a:ext cx="4282440" cy="667512"/>
           </a:xfrm>
           <a:prstGeom prst="rect">
@@ -18039,7 +18039,7 @@
         </p:nvSpPr>
         <p:spPr>
           <a:xfrm>
-            <a:off x="987552" y="2999232"/>
+            <a:off x="987552" y="3401568"/>
             <a:ext cx="10131551" cy="950976"/>
           </a:xfrm>
           <a:prstGeom prst="rect">
@@ -18726,7 +18726,7 @@
         </p:blipFill>
         <p:spPr>
           <a:xfrm>
-            <a:off x="4931663" y="2027301"/>
+            <a:off x="4931663" y="2228469"/>
             <a:ext cx="2298192" cy="301752"/>
           </a:xfrm>
           <a:prstGeom prst="rect">
@@ -18742,7 +18742,7 @@
         </p:nvSpPr>
         <p:spPr>
           <a:xfrm>
-            <a:off x="987552" y="2743200"/>
+            <a:off x="987552" y="3145536"/>
             <a:ext cx="10131551" cy="475488"/>
           </a:xfrm>
           <a:prstGeom prst="rect">

--- a/a7/packages/A7 Unit 5 - Multi-Step Proportional Relationships/Lessons/5.04/A7 5.04 Real-World Scale Drawings - Slides.pptx
+++ b/a7/packages/A7 Unit 5 - Multi-Step Proportional Relationships/Lessons/5.04/A7 5.04 Real-World Scale Drawings - Slides.pptx
@@ -16772,7 +16772,7 @@
                 </a:solidFill>
                 <a:latin typeface="Lexend"/>
               </a:rPr>
-              <a:t>Every skill listed is required, to a SmartScore of 67. Due at the start of the next class.</a:t>
+              <a:t>Every skill listed is required, to a SmartScore of 67. Due by the Unit 5 test.</a:t>
             </a:r>
           </a:p>
         </p:txBody>
